--- a/报告/基于PyTorch的猫狗图像识别.pptx
+++ b/报告/基于PyTorch的猫狗图像识别.pptx
@@ -3,37 +3,37 @@
 <p:presentation xmlns:a="http://schemas.openxmlformats.org/drawingml/2006/main" xmlns:r="http://schemas.openxmlformats.org/officeDocument/2006/relationships" xmlns:p="http://schemas.openxmlformats.org/presentationml/2006/main" strictFirstAndLastChars="0" autoCompressPictures="0">
   <p:sldMasterIdLst>
     <p:sldMasterId id="2147483648" r:id="rId1"/>
-    <p:sldMasterId id="2147483660" r:id="rId3"/>
-    <p:sldMasterId id="2147483662" r:id="rId4"/>
-    <p:sldMasterId id="2147483664" r:id="rId5"/>
-    <p:sldMasterId id="2147483666" r:id="rId6"/>
-    <p:sldMasterId id="2147483668" r:id="rId7"/>
-    <p:sldMasterId id="2147483670" r:id="rId8"/>
-    <p:sldMasterId id="2147483672" r:id="rId9"/>
-    <p:sldMasterId id="2147483674" r:id="rId10"/>
+    <p:sldMasterId id="2147483660" r:id="rId2"/>
+    <p:sldMasterId id="2147483662" r:id="rId3"/>
+    <p:sldMasterId id="2147483664" r:id="rId4"/>
+    <p:sldMasterId id="2147483666" r:id="rId5"/>
+    <p:sldMasterId id="2147483668" r:id="rId6"/>
+    <p:sldMasterId id="2147483670" r:id="rId7"/>
+    <p:sldMasterId id="2147483672" r:id="rId8"/>
+    <p:sldMasterId id="2147483674" r:id="rId9"/>
   </p:sldMasterIdLst>
   <p:notesMasterIdLst>
-    <p:notesMasterId r:id="rId12"/>
+    <p:notesMasterId r:id="rId28"/>
   </p:notesMasterIdLst>
   <p:sldIdLst>
-    <p:sldId id="256" r:id="rId11"/>
-    <p:sldId id="259" r:id="rId13"/>
-    <p:sldId id="258" r:id="rId14"/>
-    <p:sldId id="260" r:id="rId15"/>
-    <p:sldId id="261" r:id="rId16"/>
-    <p:sldId id="262" r:id="rId17"/>
-    <p:sldId id="282" r:id="rId18"/>
-    <p:sldId id="281" r:id="rId19"/>
-    <p:sldId id="276" r:id="rId20"/>
-    <p:sldId id="277" r:id="rId21"/>
-    <p:sldId id="278" r:id="rId22"/>
-    <p:sldId id="283" r:id="rId23"/>
-    <p:sldId id="263" r:id="rId24"/>
-    <p:sldId id="265" r:id="rId25"/>
-    <p:sldId id="266" r:id="rId26"/>
-    <p:sldId id="267" r:id="rId27"/>
-    <p:sldId id="268" r:id="rId28"/>
-    <p:sldId id="275" r:id="rId29"/>
+    <p:sldId id="256" r:id="rId10"/>
+    <p:sldId id="259" r:id="rId11"/>
+    <p:sldId id="258" r:id="rId12"/>
+    <p:sldId id="260" r:id="rId13"/>
+    <p:sldId id="261" r:id="rId14"/>
+    <p:sldId id="262" r:id="rId15"/>
+    <p:sldId id="282" r:id="rId16"/>
+    <p:sldId id="281" r:id="rId17"/>
+    <p:sldId id="276" r:id="rId18"/>
+    <p:sldId id="277" r:id="rId19"/>
+    <p:sldId id="278" r:id="rId20"/>
+    <p:sldId id="283" r:id="rId21"/>
+    <p:sldId id="263" r:id="rId22"/>
+    <p:sldId id="265" r:id="rId23"/>
+    <p:sldId id="266" r:id="rId24"/>
+    <p:sldId id="267" r:id="rId25"/>
+    <p:sldId id="268" r:id="rId26"/>
+    <p:sldId id="275" r:id="rId27"/>
   </p:sldIdLst>
   <p:sldSz cx="12192000" cy="6858000"/>
   <p:notesSz cx="6858000" cy="9144000"/>
@@ -367,6 +367,7 @@
           <a:p>
             <a:fld id="{B7268E1E-0E44-426D-905E-8AD9B19D2182}" type="datetimeFigureOut">
               <a:rPr lang="cs-CZ" smtClean="0"/>
+              <a:t>19.08.2026</a:t>
             </a:fld>
             <a:endParaRPr lang="cs-CZ"/>
           </a:p>
@@ -430,39 +431,35 @@
           <a:p>
             <a:pPr lvl="0"/>
             <a:r>
-              <a:rPr lang="en-US" smtClean="0"/>
+              <a:rPr lang="en-US"/>
               <a:t>Click to edit Master text styles</a:t>
             </a:r>
-            <a:endParaRPr lang="en-US" smtClean="0"/>
           </a:p>
           <a:p>
             <a:pPr lvl="1"/>
             <a:r>
-              <a:rPr lang="en-US" smtClean="0"/>
+              <a:rPr lang="en-US"/>
               <a:t>Second level</a:t>
             </a:r>
-            <a:endParaRPr lang="en-US" smtClean="0"/>
           </a:p>
           <a:p>
             <a:pPr lvl="2"/>
             <a:r>
-              <a:rPr lang="en-US" smtClean="0"/>
+              <a:rPr lang="en-US"/>
               <a:t>Third level</a:t>
             </a:r>
-            <a:endParaRPr lang="en-US" smtClean="0"/>
           </a:p>
           <a:p>
             <a:pPr lvl="3"/>
             <a:r>
-              <a:rPr lang="en-US" smtClean="0"/>
+              <a:rPr lang="en-US"/>
               <a:t>Fourth level</a:t>
             </a:r>
-            <a:endParaRPr lang="en-US" smtClean="0"/>
           </a:p>
           <a:p>
             <a:pPr lvl="4"/>
             <a:r>
-              <a:rPr lang="en-US" smtClean="0"/>
+              <a:rPr lang="en-US"/>
               <a:t>Fifth level</a:t>
             </a:r>
             <a:endParaRPr lang="cs-CZ"/>
@@ -529,6 +526,7 @@
           <a:p>
             <a:fld id="{871B2431-D351-4C6E-A3CF-9DFAC0E3E050}" type="slidenum">
               <a:rPr lang="cs-CZ" smtClean="0"/>
+              <a:t>‹#›</a:t>
             </a:fld>
             <a:endParaRPr lang="cs-CZ"/>
           </a:p>
@@ -675,7 +673,9 @@
               <a:defRPr sz="1200"/>
             </a:lvl1pPr>
           </a:lstStyle>
-          <a:p/>
+          <a:p>
+            <a:endParaRPr/>
+          </a:p>
         </p:txBody>
       </p:sp>
       <p:sp>
@@ -706,10 +706,9 @@
           </a:lstStyle>
           <a:p>
             <a:r>
-              <a:rPr lang="cs-CZ" smtClean="0"/>
+              <a:rPr lang="cs-CZ"/>
               <a:t>1.7.2013</a:t>
             </a:r>
-            <a:endParaRPr lang="cs-CZ" smtClean="0"/>
           </a:p>
         </p:txBody>
       </p:sp>
@@ -741,7 +740,9 @@
         <p:txBody>
           <a:bodyPr vert="horz" lIns="91440" tIns="45720" rIns="91440" bIns="45720" rtlCol="0" anchor="ctr"/>
           <a:lstStyle/>
-          <a:p/>
+          <a:p>
+            <a:endParaRPr/>
+          </a:p>
         </p:txBody>
       </p:sp>
       <p:sp>
@@ -784,11 +785,6 @@
               </a:rPr>
               <a:t>大家好，我们是苏致远、吴多迅、魏龙飞。今天我们将向大家汇报我们的创新应用课程作业——一个基于PyTorch的猫狗图像识别项目。本次报告将详细介绍我们项目的背景、技术实现、遇到的问题以及最终的成果。</a:t>
             </a:r>
-            <a:endParaRPr lang="en-US" sz="1400" b="0" i="0" u="none" strike="noStrike">
-              <a:solidFill>
-                <a:srgbClr val="000000"/>
-              </a:solidFill>
-            </a:endParaRPr>
           </a:p>
         </p:txBody>
       </p:sp>
@@ -818,7 +814,9 @@
               <a:defRPr sz="1200"/>
             </a:lvl1pPr>
           </a:lstStyle>
-          <a:p/>
+          <a:p>
+            <a:endParaRPr/>
+          </a:p>
         </p:txBody>
       </p:sp>
       <p:sp>
@@ -849,10 +847,9 @@
           </a:lstStyle>
           <a:p>
             <a:r>
-              <a:rPr lang="cs-CZ" smtClean="0"/>
+              <a:rPr lang="cs-CZ"/>
               <a:t>‹#›</a:t>
             </a:r>
-            <a:endParaRPr lang="cs-CZ" smtClean="0"/>
           </a:p>
         </p:txBody>
       </p:sp>
@@ -907,7 +904,9 @@
               <a:defRPr sz="1200"/>
             </a:lvl1pPr>
           </a:lstStyle>
-          <a:p/>
+          <a:p>
+            <a:endParaRPr/>
+          </a:p>
         </p:txBody>
       </p:sp>
       <p:sp>
@@ -938,10 +937,9 @@
           </a:lstStyle>
           <a:p>
             <a:r>
-              <a:rPr lang="cs-CZ" smtClean="0"/>
+              <a:rPr lang="cs-CZ"/>
               <a:t>1.7.2013</a:t>
             </a:r>
-            <a:endParaRPr lang="cs-CZ" smtClean="0"/>
           </a:p>
         </p:txBody>
       </p:sp>
@@ -973,7 +971,9 @@
         <p:txBody>
           <a:bodyPr vert="horz" lIns="91440" tIns="45720" rIns="91440" bIns="45720" rtlCol="0" anchor="ctr"/>
           <a:lstStyle/>
-          <a:p/>
+          <a:p>
+            <a:endParaRPr/>
+          </a:p>
         </p:txBody>
       </p:sp>
       <p:sp>
@@ -1016,11 +1016,6 @@
               </a:rPr>
               <a:t>在项目开始前，我们进行了充分的理论学习。我们回顾了从感知机到深层网络的基本原理，理解了激活函数和损失函数的作用。这些理论知识直接指导了我们的代码实践，例如，我们在网络中使用了BatchNorm层，选择了Adam优化器，并采用交叉熵损失函数，这些都是理论学习的直接应用。</a:t>
             </a:r>
-            <a:endParaRPr lang="en-US" sz="1400" b="0" i="0" u="none" strike="noStrike">
-              <a:solidFill>
-                <a:srgbClr val="000000"/>
-              </a:solidFill>
-            </a:endParaRPr>
           </a:p>
         </p:txBody>
       </p:sp>
@@ -1050,7 +1045,9 @@
               <a:defRPr sz="1200"/>
             </a:lvl1pPr>
           </a:lstStyle>
-          <a:p/>
+          <a:p>
+            <a:endParaRPr/>
+          </a:p>
         </p:txBody>
       </p:sp>
       <p:sp>
@@ -1081,10 +1078,9 @@
           </a:lstStyle>
           <a:p>
             <a:r>
-              <a:rPr lang="cs-CZ" smtClean="0"/>
+              <a:rPr lang="cs-CZ"/>
               <a:t>‹#›</a:t>
             </a:r>
-            <a:endParaRPr lang="cs-CZ" smtClean="0"/>
           </a:p>
         </p:txBody>
       </p:sp>
@@ -1139,7 +1135,9 @@
               <a:defRPr sz="1200"/>
             </a:lvl1pPr>
           </a:lstStyle>
-          <a:p/>
+          <a:p>
+            <a:endParaRPr/>
+          </a:p>
         </p:txBody>
       </p:sp>
       <p:sp>
@@ -1170,10 +1168,9 @@
           </a:lstStyle>
           <a:p>
             <a:r>
-              <a:rPr lang="cs-CZ" smtClean="0"/>
+              <a:rPr lang="cs-CZ"/>
               <a:t>1.7.2013</a:t>
             </a:r>
-            <a:endParaRPr lang="cs-CZ" smtClean="0"/>
           </a:p>
         </p:txBody>
       </p:sp>
@@ -1205,7 +1202,9 @@
         <p:txBody>
           <a:bodyPr vert="horz" lIns="91440" tIns="45720" rIns="91440" bIns="45720" rtlCol="0" anchor="ctr"/>
           <a:lstStyle/>
-          <a:p/>
+          <a:p>
+            <a:endParaRPr/>
+          </a:p>
         </p:txBody>
       </p:sp>
       <p:sp>
@@ -1248,11 +1247,6 @@
               </a:rPr>
               <a:t>在项目开始前，我们进行了充分的理论学习。我们回顾了从感知机到深层网络的基本原理，理解了激活函数和损失函数的作用。这些理论知识直接指导了我们的代码实践，例如，我们在网络中使用了BatchNorm层，选择了Adam优化器，并采用交叉熵损失函数，这些都是理论学习的直接应用。</a:t>
             </a:r>
-            <a:endParaRPr lang="en-US" sz="1400" b="0" i="0" u="none" strike="noStrike">
-              <a:solidFill>
-                <a:srgbClr val="000000"/>
-              </a:solidFill>
-            </a:endParaRPr>
           </a:p>
         </p:txBody>
       </p:sp>
@@ -1282,7 +1276,9 @@
               <a:defRPr sz="1200"/>
             </a:lvl1pPr>
           </a:lstStyle>
-          <a:p/>
+          <a:p>
+            <a:endParaRPr/>
+          </a:p>
         </p:txBody>
       </p:sp>
       <p:sp>
@@ -1313,10 +1309,9 @@
           </a:lstStyle>
           <a:p>
             <a:r>
-              <a:rPr lang="cs-CZ" smtClean="0"/>
+              <a:rPr lang="cs-CZ"/>
               <a:t>‹#›</a:t>
             </a:r>
-            <a:endParaRPr lang="cs-CZ" smtClean="0"/>
           </a:p>
         </p:txBody>
       </p:sp>
@@ -1371,7 +1366,9 @@
               <a:defRPr sz="1200"/>
             </a:lvl1pPr>
           </a:lstStyle>
-          <a:p/>
+          <a:p>
+            <a:endParaRPr/>
+          </a:p>
         </p:txBody>
       </p:sp>
       <p:sp>
@@ -1402,10 +1399,9 @@
           </a:lstStyle>
           <a:p>
             <a:r>
-              <a:rPr lang="cs-CZ" smtClean="0"/>
+              <a:rPr lang="cs-CZ"/>
               <a:t>1.7.2013</a:t>
             </a:r>
-            <a:endParaRPr lang="cs-CZ" smtClean="0"/>
           </a:p>
         </p:txBody>
       </p:sp>
@@ -1437,7 +1433,9 @@
         <p:txBody>
           <a:bodyPr vert="horz" lIns="91440" tIns="45720" rIns="91440" bIns="45720" rtlCol="0" anchor="ctr"/>
           <a:lstStyle/>
-          <a:p/>
+          <a:p>
+            <a:endParaRPr/>
+          </a:p>
         </p:txBody>
       </p:sp>
       <p:sp>
@@ -1480,11 +1478,6 @@
               </a:rPr>
               <a:t>在项目开始前，我们进行了充分的理论学习。我们回顾了从感知机到深层网络的基本原理，理解了激活函数和损失函数的作用。这些理论知识直接指导了我们的代码实践，例如，我们在网络中使用了BatchNorm层，选择了Adam优化器，并采用交叉熵损失函数，这些都是理论学习的直接应用。</a:t>
             </a:r>
-            <a:endParaRPr lang="en-US" sz="1400" b="0" i="0" u="none" strike="noStrike">
-              <a:solidFill>
-                <a:srgbClr val="000000"/>
-              </a:solidFill>
-            </a:endParaRPr>
           </a:p>
         </p:txBody>
       </p:sp>
@@ -1514,7 +1507,9 @@
               <a:defRPr sz="1200"/>
             </a:lvl1pPr>
           </a:lstStyle>
-          <a:p/>
+          <a:p>
+            <a:endParaRPr/>
+          </a:p>
         </p:txBody>
       </p:sp>
       <p:sp>
@@ -1545,10 +1540,9 @@
           </a:lstStyle>
           <a:p>
             <a:r>
-              <a:rPr lang="cs-CZ" smtClean="0"/>
+              <a:rPr lang="cs-CZ"/>
               <a:t>‹#›</a:t>
             </a:r>
-            <a:endParaRPr lang="cs-CZ" smtClean="0"/>
           </a:p>
         </p:txBody>
       </p:sp>
@@ -1603,7 +1597,9 @@
               <a:defRPr sz="1200"/>
             </a:lvl1pPr>
           </a:lstStyle>
-          <a:p/>
+          <a:p>
+            <a:endParaRPr/>
+          </a:p>
         </p:txBody>
       </p:sp>
       <p:sp>
@@ -1634,10 +1630,9 @@
           </a:lstStyle>
           <a:p>
             <a:r>
-              <a:rPr lang="cs-CZ" smtClean="0"/>
+              <a:rPr lang="cs-CZ"/>
               <a:t>1.7.2013</a:t>
             </a:r>
-            <a:endParaRPr lang="cs-CZ" smtClean="0"/>
           </a:p>
         </p:txBody>
       </p:sp>
@@ -1669,7 +1664,9 @@
         <p:txBody>
           <a:bodyPr vert="horz" lIns="91440" tIns="45720" rIns="91440" bIns="45720" rtlCol="0" anchor="ctr"/>
           <a:lstStyle/>
-          <a:p/>
+          <a:p>
+            <a:endParaRPr/>
+          </a:p>
         </p:txBody>
       </p:sp>
       <p:sp>
@@ -1712,11 +1709,6 @@
               </a:rPr>
               <a:t>数据准备是项目成功的关键。我们实现了数据的自动化下载和整理，通过脚本自动将Kaggle上的数据集下载并按8:2的比例划分为训练集和验证集。为了提升模型的泛化能力，我们在训练过程中采用了多种数据增强技术，如随机裁剪、翻转和颜色抖动。最终，我们共使用了约一万张图片进行训练和验证。</a:t>
             </a:r>
-            <a:endParaRPr lang="en-US" sz="1400" b="0" i="0" u="none" strike="noStrike">
-              <a:solidFill>
-                <a:srgbClr val="000000"/>
-              </a:solidFill>
-            </a:endParaRPr>
           </a:p>
         </p:txBody>
       </p:sp>
@@ -1746,7 +1738,9 @@
               <a:defRPr sz="1200"/>
             </a:lvl1pPr>
           </a:lstStyle>
-          <a:p/>
+          <a:p>
+            <a:endParaRPr/>
+          </a:p>
         </p:txBody>
       </p:sp>
       <p:sp>
@@ -1777,10 +1771,9 @@
           </a:lstStyle>
           <a:p>
             <a:r>
-              <a:rPr lang="cs-CZ" smtClean="0"/>
+              <a:rPr lang="cs-CZ"/>
               <a:t>‹#›</a:t>
             </a:r>
-            <a:endParaRPr lang="cs-CZ" smtClean="0"/>
           </a:p>
         </p:txBody>
       </p:sp>
@@ -1835,7 +1828,9 @@
               <a:defRPr sz="1200"/>
             </a:lvl1pPr>
           </a:lstStyle>
-          <a:p/>
+          <a:p>
+            <a:endParaRPr/>
+          </a:p>
         </p:txBody>
       </p:sp>
       <p:sp>
@@ -1866,10 +1861,9 @@
           </a:lstStyle>
           <a:p>
             <a:r>
-              <a:rPr lang="cs-CZ" smtClean="0"/>
+              <a:rPr lang="cs-CZ"/>
               <a:t>1.7.2013</a:t>
             </a:r>
-            <a:endParaRPr lang="cs-CZ" smtClean="0"/>
           </a:p>
         </p:txBody>
       </p:sp>
@@ -1885,8 +1879,8 @@
         </p:nvSpPr>
         <p:spPr>
           <a:xfrm>
-            <a:off x="2857500" y="512763"/>
-            <a:ext cx="3429000" cy="2566987"/>
+            <a:off x="2290763" y="512763"/>
+            <a:ext cx="4562475" cy="2566987"/>
           </a:xfrm>
           <a:prstGeom prst="rect">
             <a:avLst/>
@@ -1901,7 +1895,9 @@
         <p:txBody>
           <a:bodyPr vert="horz" lIns="91440" tIns="45720" rIns="91440" bIns="45720" rtlCol="0" anchor="ctr"/>
           <a:lstStyle/>
-          <a:p/>
+          <a:p>
+            <a:endParaRPr/>
+          </a:p>
         </p:txBody>
       </p:sp>
       <p:sp>
@@ -1944,11 +1940,6 @@
               </a:rPr>
               <a:t>在训练阶段，我们选择了Adam作为优化器，学习率初始化为0.001，并使用交叉熵损失函数。我们设置批大小为64，共训练12轮。为了优化训练过程，我们采用了学习率衰减策略，并制定了只保存验证集准确率最高模型的策略，这对于最终模型的性能至关重要。</a:t>
             </a:r>
-            <a:endParaRPr lang="en-US" sz="1400" b="0" i="0" u="none" strike="noStrike">
-              <a:solidFill>
-                <a:srgbClr val="000000"/>
-              </a:solidFill>
-            </a:endParaRPr>
           </a:p>
         </p:txBody>
       </p:sp>
@@ -1978,7 +1969,9 @@
               <a:defRPr sz="1200"/>
             </a:lvl1pPr>
           </a:lstStyle>
-          <a:p/>
+          <a:p>
+            <a:endParaRPr/>
+          </a:p>
         </p:txBody>
       </p:sp>
       <p:sp>
@@ -2009,10 +2002,9 @@
           </a:lstStyle>
           <a:p>
             <a:r>
-              <a:rPr lang="cs-CZ" smtClean="0"/>
+              <a:rPr lang="cs-CZ"/>
               <a:t>‹#›</a:t>
             </a:r>
-            <a:endParaRPr lang="cs-CZ" smtClean="0"/>
           </a:p>
         </p:txBody>
       </p:sp>
@@ -2067,7 +2059,9 @@
               <a:defRPr sz="1200"/>
             </a:lvl1pPr>
           </a:lstStyle>
-          <a:p/>
+          <a:p>
+            <a:endParaRPr/>
+          </a:p>
         </p:txBody>
       </p:sp>
       <p:sp>
@@ -2098,10 +2092,9 @@
           </a:lstStyle>
           <a:p>
             <a:r>
-              <a:rPr lang="cs-CZ" smtClean="0"/>
+              <a:rPr lang="cs-CZ"/>
               <a:t>1.7.2013</a:t>
             </a:r>
-            <a:endParaRPr lang="cs-CZ" smtClean="0"/>
           </a:p>
         </p:txBody>
       </p:sp>
@@ -2133,7 +2126,9 @@
         <p:txBody>
           <a:bodyPr vert="horz" lIns="91440" tIns="45720" rIns="91440" bIns="45720" rtlCol="0" anchor="ctr"/>
           <a:lstStyle/>
-          <a:p/>
+          <a:p>
+            <a:endParaRPr/>
+          </a:p>
         </p:txBody>
       </p:sp>
       <p:sp>
@@ -2176,11 +2171,6 @@
               </a:rPr>
               <a:t>经过12轮训练，我们的模型表现良好。从训练曲线上可以看到，训练损失持续下降，准确率稳步提升。最终，模型在验证集上的整体准确率达到了84.3%。其中，猫的识别率高达94.5%，而狗的识别率为74.1%，这揭示了一些有趣的问题，我们将在下一部分讨论。</a:t>
             </a:r>
-            <a:endParaRPr lang="en-US" sz="1400" b="0" i="0" u="none" strike="noStrike">
-              <a:solidFill>
-                <a:srgbClr val="000000"/>
-              </a:solidFill>
-            </a:endParaRPr>
           </a:p>
         </p:txBody>
       </p:sp>
@@ -2210,7 +2200,9 @@
               <a:defRPr sz="1200"/>
             </a:lvl1pPr>
           </a:lstStyle>
-          <a:p/>
+          <a:p>
+            <a:endParaRPr/>
+          </a:p>
         </p:txBody>
       </p:sp>
       <p:sp>
@@ -2241,10 +2233,9 @@
           </a:lstStyle>
           <a:p>
             <a:r>
-              <a:rPr lang="cs-CZ" smtClean="0"/>
+              <a:rPr lang="cs-CZ"/>
               <a:t>‹#›</a:t>
             </a:r>
-            <a:endParaRPr lang="cs-CZ" smtClean="0"/>
           </a:p>
         </p:txBody>
       </p:sp>
@@ -2299,7 +2290,9 @@
               <a:defRPr sz="1200"/>
             </a:lvl1pPr>
           </a:lstStyle>
-          <a:p/>
+          <a:p>
+            <a:endParaRPr/>
+          </a:p>
         </p:txBody>
       </p:sp>
       <p:sp>
@@ -2330,10 +2323,9 @@
           </a:lstStyle>
           <a:p>
             <a:r>
-              <a:rPr lang="cs-CZ" smtClean="0"/>
+              <a:rPr lang="cs-CZ"/>
               <a:t>1.7.2013</a:t>
             </a:r>
-            <a:endParaRPr lang="cs-CZ" smtClean="0"/>
           </a:p>
         </p:txBody>
       </p:sp>
@@ -2365,7 +2357,9 @@
         <p:txBody>
           <a:bodyPr vert="horz" lIns="91440" tIns="45720" rIns="91440" bIns="45720" rtlCol="0" anchor="ctr"/>
           <a:lstStyle/>
-          <a:p/>
+          <a:p>
+            <a:endParaRPr/>
+          </a:p>
         </p:txBody>
       </p:sp>
       <p:sp>
@@ -2408,11 +2402,6 @@
               </a:rPr>
               <a:t>我们发现模型存在“偏猫”现象，即对狗的识别率显著低于猫。我们分析这主要是因为狗的品种更多样，类内差异大。同时，我们观察到验证曲线存在震荡，这说明我们的模型还不够稳定。针对这些问题，我们提出了几个改进方向，包括增加训练轮数、使用更复杂的网络如ResNet，以及对狗类数据进行特殊处理。</a:t>
             </a:r>
-            <a:endParaRPr lang="en-US" sz="1400" b="0" i="0" u="none" strike="noStrike">
-              <a:solidFill>
-                <a:srgbClr val="000000"/>
-              </a:solidFill>
-            </a:endParaRPr>
           </a:p>
         </p:txBody>
       </p:sp>
@@ -2442,7 +2431,9 @@
               <a:defRPr sz="1200"/>
             </a:lvl1pPr>
           </a:lstStyle>
-          <a:p/>
+          <a:p>
+            <a:endParaRPr/>
+          </a:p>
         </p:txBody>
       </p:sp>
       <p:sp>
@@ -2473,10 +2464,9 @@
           </a:lstStyle>
           <a:p>
             <a:r>
-              <a:rPr lang="cs-CZ" smtClean="0"/>
+              <a:rPr lang="cs-CZ"/>
               <a:t>‹#›</a:t>
             </a:r>
-            <a:endParaRPr lang="cs-CZ" smtClean="0"/>
           </a:p>
         </p:txBody>
       </p:sp>
@@ -2531,7 +2521,9 @@
               <a:defRPr sz="1200"/>
             </a:lvl1pPr>
           </a:lstStyle>
-          <a:p/>
+          <a:p>
+            <a:endParaRPr/>
+          </a:p>
         </p:txBody>
       </p:sp>
       <p:sp>
@@ -2562,10 +2554,9 @@
           </a:lstStyle>
           <a:p>
             <a:r>
-              <a:rPr lang="cs-CZ" smtClean="0"/>
+              <a:rPr lang="cs-CZ"/>
               <a:t>1.7.2013</a:t>
             </a:r>
-            <a:endParaRPr lang="cs-CZ" smtClean="0"/>
           </a:p>
         </p:txBody>
       </p:sp>
@@ -2597,7 +2588,9 @@
         <p:txBody>
           <a:bodyPr vert="horz" lIns="91440" tIns="45720" rIns="91440" bIns="45720" rtlCol="0" anchor="ctr"/>
           <a:lstStyle/>
-          <a:p/>
+          <a:p>
+            <a:endParaRPr/>
+          </a:p>
         </p:txBody>
       </p:sp>
       <p:sp>
@@ -2640,11 +2633,6 @@
               </a:rPr>
               <a:t>总结本次项目，我们认为亮点在于实现了全自动的数据管线，所有代码都可复现，并且手写的网络结构清晰可解释。通过这个项目，我们每个人都收获颇丰，不仅完成了从理论到实践的闭环，更深刻地理解了模型评估的复杂性和团队协作的重要性。</a:t>
             </a:r>
-            <a:endParaRPr lang="en-US" sz="1400" b="0" i="0" u="none" strike="noStrike">
-              <a:solidFill>
-                <a:srgbClr val="000000"/>
-              </a:solidFill>
-            </a:endParaRPr>
           </a:p>
         </p:txBody>
       </p:sp>
@@ -2674,7 +2662,9 @@
               <a:defRPr sz="1200"/>
             </a:lvl1pPr>
           </a:lstStyle>
-          <a:p/>
+          <a:p>
+            <a:endParaRPr/>
+          </a:p>
         </p:txBody>
       </p:sp>
       <p:sp>
@@ -2705,10 +2695,9 @@
           </a:lstStyle>
           <a:p>
             <a:r>
-              <a:rPr lang="cs-CZ" smtClean="0"/>
+              <a:rPr lang="cs-CZ"/>
               <a:t>‹#›</a:t>
             </a:r>
-            <a:endParaRPr lang="cs-CZ" smtClean="0"/>
           </a:p>
         </p:txBody>
       </p:sp>
@@ -2763,7 +2752,9 @@
               <a:defRPr sz="1200"/>
             </a:lvl1pPr>
           </a:lstStyle>
-          <a:p/>
+          <a:p>
+            <a:endParaRPr/>
+          </a:p>
         </p:txBody>
       </p:sp>
       <p:sp>
@@ -2794,10 +2785,9 @@
           </a:lstStyle>
           <a:p>
             <a:r>
-              <a:rPr lang="cs-CZ" smtClean="0"/>
+              <a:rPr lang="cs-CZ"/>
               <a:t>1.7.2013</a:t>
             </a:r>
-            <a:endParaRPr lang="cs-CZ" smtClean="0"/>
           </a:p>
         </p:txBody>
       </p:sp>
@@ -2829,7 +2819,9 @@
         <p:txBody>
           <a:bodyPr vert="horz" lIns="91440" tIns="45720" rIns="91440" bIns="45720" rtlCol="0" anchor="ctr"/>
           <a:lstStyle/>
-          <a:p/>
+          <a:p>
+            <a:endParaRPr/>
+          </a:p>
         </p:txBody>
       </p:sp>
       <p:sp>
@@ -2872,11 +2864,6 @@
               </a:rPr>
               <a:t>总结本次项目，我们认为亮点在于实现了全自动的数据管线，所有代码都可复现，并且手写的网络结构清晰可解释。通过这个项目，我们每个人都收获颇丰，不仅完成了从理论到实践的闭环，更深刻地理解了模型评估的复杂性和团队协作的重要性。</a:t>
             </a:r>
-            <a:endParaRPr lang="en-US" sz="1400" b="0" i="0" u="none" strike="noStrike">
-              <a:solidFill>
-                <a:srgbClr val="000000"/>
-              </a:solidFill>
-            </a:endParaRPr>
           </a:p>
         </p:txBody>
       </p:sp>
@@ -2906,7 +2893,9 @@
               <a:defRPr sz="1200"/>
             </a:lvl1pPr>
           </a:lstStyle>
-          <a:p/>
+          <a:p>
+            <a:endParaRPr/>
+          </a:p>
         </p:txBody>
       </p:sp>
       <p:sp>
@@ -2937,10 +2926,9 @@
           </a:lstStyle>
           <a:p>
             <a:r>
-              <a:rPr lang="cs-CZ" smtClean="0"/>
+              <a:rPr lang="cs-CZ"/>
               <a:t>‹#›</a:t>
             </a:r>
-            <a:endParaRPr lang="cs-CZ" smtClean="0"/>
           </a:p>
         </p:txBody>
       </p:sp>
@@ -2995,7 +2983,9 @@
               <a:defRPr sz="1200"/>
             </a:lvl1pPr>
           </a:lstStyle>
-          <a:p/>
+          <a:p>
+            <a:endParaRPr/>
+          </a:p>
         </p:txBody>
       </p:sp>
       <p:sp>
@@ -3026,10 +3016,9 @@
           </a:lstStyle>
           <a:p>
             <a:r>
-              <a:rPr lang="cs-CZ" smtClean="0"/>
+              <a:rPr lang="cs-CZ"/>
               <a:t>1.7.2013</a:t>
             </a:r>
-            <a:endParaRPr lang="cs-CZ" smtClean="0"/>
           </a:p>
         </p:txBody>
       </p:sp>
@@ -3061,7 +3050,9 @@
         <p:txBody>
           <a:bodyPr vert="horz" lIns="91440" tIns="45720" rIns="91440" bIns="45720" rtlCol="0" anchor="ctr"/>
           <a:lstStyle/>
-          <a:p/>
+          <a:p>
+            <a:endParaRPr/>
+          </a:p>
         </p:txBody>
       </p:sp>
       <p:sp>
@@ -3104,11 +3095,6 @@
               </a:rPr>
               <a:t>在项目中，我们三人分工明确。苏致远主要负责核心代码的编写，吴多迅负责理论总结和训练流程的开发，魏龙飞则负责前期知识的铺垫和模型训练的参与。我们通过Git进行版本控制，采用分支开发和Pull Request的方式协作，确保了文档和代码的同步推进。</a:t>
             </a:r>
-            <a:endParaRPr lang="en-US" sz="1400" b="0" i="0" u="none" strike="noStrike">
-              <a:solidFill>
-                <a:srgbClr val="000000"/>
-              </a:solidFill>
-            </a:endParaRPr>
           </a:p>
         </p:txBody>
       </p:sp>
@@ -3138,7 +3124,9 @@
               <a:defRPr sz="1200"/>
             </a:lvl1pPr>
           </a:lstStyle>
-          <a:p/>
+          <a:p>
+            <a:endParaRPr/>
+          </a:p>
         </p:txBody>
       </p:sp>
       <p:sp>
@@ -3169,10 +3157,9 @@
           </a:lstStyle>
           <a:p>
             <a:r>
-              <a:rPr lang="cs-CZ" smtClean="0"/>
+              <a:rPr lang="cs-CZ"/>
               <a:t>‹#›</a:t>
             </a:r>
-            <a:endParaRPr lang="cs-CZ" smtClean="0"/>
           </a:p>
         </p:txBody>
       </p:sp>
@@ -3227,7 +3214,9 @@
               <a:defRPr sz="1200"/>
             </a:lvl1pPr>
           </a:lstStyle>
-          <a:p/>
+          <a:p>
+            <a:endParaRPr/>
+          </a:p>
         </p:txBody>
       </p:sp>
       <p:sp>
@@ -3258,10 +3247,9 @@
           </a:lstStyle>
           <a:p>
             <a:r>
-              <a:rPr lang="cs-CZ" smtClean="0"/>
+              <a:rPr lang="cs-CZ"/>
               <a:t>1.7.2013</a:t>
             </a:r>
-            <a:endParaRPr lang="cs-CZ" smtClean="0"/>
           </a:p>
         </p:txBody>
       </p:sp>
@@ -3293,7 +3281,9 @@
         <p:txBody>
           <a:bodyPr vert="horz" lIns="91440" tIns="45720" rIns="91440" bIns="45720" rtlCol="0" anchor="ctr"/>
           <a:lstStyle/>
-          <a:p/>
+          <a:p>
+            <a:endParaRPr/>
+          </a:p>
         </p:txBody>
       </p:sp>
       <p:sp>
@@ -3336,11 +3326,6 @@
               </a:rPr>
               <a:t>我们的项目核心功能是，输入一张猫或狗的图片，模型能够输出它的类别以及相应的置信度。我们不仅支持单张图片的预测，还支持对整个文件夹的图片进行批量预测。为了实现这一功能，我们编写了三个核心脚本，分别用于数据下载、模型训练和预测。最终，我们的模型在验证集上达到了84.3%的准确率。</a:t>
             </a:r>
-            <a:endParaRPr lang="en-US" sz="1400" b="0" i="0" u="none" strike="noStrike">
-              <a:solidFill>
-                <a:srgbClr val="000000"/>
-              </a:solidFill>
-            </a:endParaRPr>
           </a:p>
         </p:txBody>
       </p:sp>
@@ -3370,7 +3355,9 @@
               <a:defRPr sz="1200"/>
             </a:lvl1pPr>
           </a:lstStyle>
-          <a:p/>
+          <a:p>
+            <a:endParaRPr/>
+          </a:p>
         </p:txBody>
       </p:sp>
       <p:sp>
@@ -3401,10 +3388,9 @@
           </a:lstStyle>
           <a:p>
             <a:r>
-              <a:rPr lang="cs-CZ" smtClean="0"/>
+              <a:rPr lang="cs-CZ"/>
               <a:t>‹#›</a:t>
             </a:r>
-            <a:endParaRPr lang="cs-CZ" smtClean="0"/>
           </a:p>
         </p:txBody>
       </p:sp>
@@ -3459,7 +3445,9 @@
               <a:defRPr sz="1200"/>
             </a:lvl1pPr>
           </a:lstStyle>
-          <a:p/>
+          <a:p>
+            <a:endParaRPr/>
+          </a:p>
         </p:txBody>
       </p:sp>
       <p:sp>
@@ -3490,10 +3478,9 @@
           </a:lstStyle>
           <a:p>
             <a:r>
-              <a:rPr lang="cs-CZ" smtClean="0"/>
+              <a:rPr lang="cs-CZ"/>
               <a:t>1.7.2013</a:t>
             </a:r>
-            <a:endParaRPr lang="cs-CZ" smtClean="0"/>
           </a:p>
         </p:txBody>
       </p:sp>
@@ -3525,7 +3512,9 @@
         <p:txBody>
           <a:bodyPr vert="horz" lIns="91440" tIns="45720" rIns="91440" bIns="45720" rtlCol="0" anchor="ctr"/>
           <a:lstStyle/>
-          <a:p/>
+          <a:p>
+            <a:endParaRPr/>
+          </a:p>
         </p:txBody>
       </p:sp>
       <p:sp>
@@ -3568,11 +3557,6 @@
               </a:rPr>
               <a:t>我们选择猫狗识别作为项目主题，因为它是CNN入门的经典任务。我们的目标不仅仅是完成识别，更重要的是通过这个项目，将课堂上学到的理论知识付诸实践，完整地走一遍从数据到模型再到应用的全流程，并深入理解CNN中各个组件的作用。</a:t>
             </a:r>
-            <a:endParaRPr lang="en-US" sz="1400" b="0" i="0" u="none" strike="noStrike">
-              <a:solidFill>
-                <a:srgbClr val="000000"/>
-              </a:solidFill>
-            </a:endParaRPr>
           </a:p>
         </p:txBody>
       </p:sp>
@@ -3602,7 +3586,9 @@
               <a:defRPr sz="1200"/>
             </a:lvl1pPr>
           </a:lstStyle>
-          <a:p/>
+          <a:p>
+            <a:endParaRPr/>
+          </a:p>
         </p:txBody>
       </p:sp>
       <p:sp>
@@ -3633,10 +3619,9 @@
           </a:lstStyle>
           <a:p>
             <a:r>
-              <a:rPr lang="cs-CZ" smtClean="0"/>
+              <a:rPr lang="cs-CZ"/>
               <a:t>‹#›</a:t>
             </a:r>
-            <a:endParaRPr lang="cs-CZ" smtClean="0"/>
           </a:p>
         </p:txBody>
       </p:sp>
@@ -3691,7 +3676,9 @@
               <a:defRPr sz="1200"/>
             </a:lvl1pPr>
           </a:lstStyle>
-          <a:p/>
+          <a:p>
+            <a:endParaRPr/>
+          </a:p>
         </p:txBody>
       </p:sp>
       <p:sp>
@@ -3722,10 +3709,9 @@
           </a:lstStyle>
           <a:p>
             <a:r>
-              <a:rPr lang="cs-CZ" smtClean="0"/>
+              <a:rPr lang="cs-CZ"/>
               <a:t>1.7.2013</a:t>
             </a:r>
-            <a:endParaRPr lang="cs-CZ" smtClean="0"/>
           </a:p>
         </p:txBody>
       </p:sp>
@@ -3757,7 +3743,9 @@
         <p:txBody>
           <a:bodyPr vert="horz" lIns="91440" tIns="45720" rIns="91440" bIns="45720" rtlCol="0" anchor="ctr"/>
           <a:lstStyle/>
-          <a:p/>
+          <a:p>
+            <a:endParaRPr/>
+          </a:p>
         </p:txBody>
       </p:sp>
       <p:sp>
@@ -3800,11 +3788,6 @@
               </a:rPr>
               <a:t>我们的技术路线可以概括为四个步骤。首先是理论学习，为项目打下坚实的基础。然后是数据准备，包括数据的下载、整理和增强。接着是核心的模型训练阶段，我们构建并训练自己的CNN模型。最后是评估与预测，检验模型性能并实现应用。这四个步骤分别对应我们编写的三个核心脚本。</a:t>
             </a:r>
-            <a:endParaRPr lang="en-US" sz="1400" b="0" i="0" u="none" strike="noStrike">
-              <a:solidFill>
-                <a:srgbClr val="000000"/>
-              </a:solidFill>
-            </a:endParaRPr>
           </a:p>
         </p:txBody>
       </p:sp>
@@ -3834,7 +3817,9 @@
               <a:defRPr sz="1200"/>
             </a:lvl1pPr>
           </a:lstStyle>
-          <a:p/>
+          <a:p>
+            <a:endParaRPr/>
+          </a:p>
         </p:txBody>
       </p:sp>
       <p:sp>
@@ -3865,10 +3850,9 @@
           </a:lstStyle>
           <a:p>
             <a:r>
-              <a:rPr lang="cs-CZ" smtClean="0"/>
+              <a:rPr lang="cs-CZ"/>
               <a:t>‹#›</a:t>
             </a:r>
-            <a:endParaRPr lang="cs-CZ" smtClean="0"/>
           </a:p>
         </p:txBody>
       </p:sp>
@@ -3923,7 +3907,9 @@
               <a:defRPr sz="1200"/>
             </a:lvl1pPr>
           </a:lstStyle>
-          <a:p/>
+          <a:p>
+            <a:endParaRPr/>
+          </a:p>
         </p:txBody>
       </p:sp>
       <p:sp>
@@ -3954,10 +3940,9 @@
           </a:lstStyle>
           <a:p>
             <a:r>
-              <a:rPr lang="cs-CZ" smtClean="0"/>
+              <a:rPr lang="cs-CZ"/>
               <a:t>1.7.2013</a:t>
             </a:r>
-            <a:endParaRPr lang="cs-CZ" smtClean="0"/>
           </a:p>
         </p:txBody>
       </p:sp>
@@ -3989,7 +3974,9 @@
         <p:txBody>
           <a:bodyPr vert="horz" lIns="91440" tIns="45720" rIns="91440" bIns="45720" rtlCol="0" anchor="ctr"/>
           <a:lstStyle/>
-          <a:p/>
+          <a:p>
+            <a:endParaRPr/>
+          </a:p>
         </p:txBody>
       </p:sp>
       <p:sp>
@@ -4032,11 +4019,6 @@
               </a:rPr>
               <a:t>在项目开始前，我们进行了充分的理论学习。我们回顾了从感知机到深层网络的基本原理，理解了激活函数和损失函数的作用。这些理论知识直接指导了我们的代码实践，例如，我们在网络中使用了BatchNorm层，选择了Adam优化器，并采用交叉熵损失函数，这些都是理论学习的直接应用。</a:t>
             </a:r>
-            <a:endParaRPr lang="en-US" sz="1400" b="0" i="0" u="none" strike="noStrike">
-              <a:solidFill>
-                <a:srgbClr val="000000"/>
-              </a:solidFill>
-            </a:endParaRPr>
           </a:p>
         </p:txBody>
       </p:sp>
@@ -4066,7 +4048,9 @@
               <a:defRPr sz="1200"/>
             </a:lvl1pPr>
           </a:lstStyle>
-          <a:p/>
+          <a:p>
+            <a:endParaRPr/>
+          </a:p>
         </p:txBody>
       </p:sp>
       <p:sp>
@@ -4097,10 +4081,9 @@
           </a:lstStyle>
           <a:p>
             <a:r>
-              <a:rPr lang="cs-CZ" smtClean="0"/>
+              <a:rPr lang="cs-CZ"/>
               <a:t>‹#›</a:t>
             </a:r>
-            <a:endParaRPr lang="cs-CZ" smtClean="0"/>
           </a:p>
         </p:txBody>
       </p:sp>
@@ -4155,7 +4138,9 @@
               <a:defRPr sz="1200"/>
             </a:lvl1pPr>
           </a:lstStyle>
-          <a:p/>
+          <a:p>
+            <a:endParaRPr/>
+          </a:p>
         </p:txBody>
       </p:sp>
       <p:sp>
@@ -4186,10 +4171,9 @@
           </a:lstStyle>
           <a:p>
             <a:r>
-              <a:rPr lang="cs-CZ" smtClean="0"/>
+              <a:rPr lang="cs-CZ"/>
               <a:t>1.7.2013</a:t>
             </a:r>
-            <a:endParaRPr lang="cs-CZ" smtClean="0"/>
           </a:p>
         </p:txBody>
       </p:sp>
@@ -4221,7 +4205,9 @@
         <p:txBody>
           <a:bodyPr vert="horz" lIns="91440" tIns="45720" rIns="91440" bIns="45720" rtlCol="0" anchor="ctr"/>
           <a:lstStyle/>
-          <a:p/>
+          <a:p>
+            <a:endParaRPr/>
+          </a:p>
         </p:txBody>
       </p:sp>
       <p:sp>
@@ -4264,11 +4250,6 @@
               </a:rPr>
               <a:t>在项目开始前，我们进行了充分的理论学习。我们回顾了从感知机到深层网络的基本原理，理解了激活函数和损失函数的作用。这些理论知识直接指导了我们的代码实践，例如，我们在网络中使用了BatchNorm层，选择了Adam优化器，并采用交叉熵损失函数，这些都是理论学习的直接应用。</a:t>
             </a:r>
-            <a:endParaRPr lang="en-US" sz="1400" b="0" i="0" u="none" strike="noStrike">
-              <a:solidFill>
-                <a:srgbClr val="000000"/>
-              </a:solidFill>
-            </a:endParaRPr>
           </a:p>
         </p:txBody>
       </p:sp>
@@ -4298,7 +4279,9 @@
               <a:defRPr sz="1200"/>
             </a:lvl1pPr>
           </a:lstStyle>
-          <a:p/>
+          <a:p>
+            <a:endParaRPr/>
+          </a:p>
         </p:txBody>
       </p:sp>
       <p:sp>
@@ -4329,10 +4312,9 @@
           </a:lstStyle>
           <a:p>
             <a:r>
-              <a:rPr lang="cs-CZ" smtClean="0"/>
+              <a:rPr lang="cs-CZ"/>
               <a:t>‹#›</a:t>
             </a:r>
-            <a:endParaRPr lang="cs-CZ" smtClean="0"/>
           </a:p>
         </p:txBody>
       </p:sp>
@@ -4387,7 +4369,9 @@
               <a:defRPr sz="1200"/>
             </a:lvl1pPr>
           </a:lstStyle>
-          <a:p/>
+          <a:p>
+            <a:endParaRPr/>
+          </a:p>
         </p:txBody>
       </p:sp>
       <p:sp>
@@ -4418,10 +4402,9 @@
           </a:lstStyle>
           <a:p>
             <a:r>
-              <a:rPr lang="cs-CZ" smtClean="0"/>
+              <a:rPr lang="cs-CZ"/>
               <a:t>1.7.2013</a:t>
             </a:r>
-            <a:endParaRPr lang="cs-CZ" smtClean="0"/>
           </a:p>
         </p:txBody>
       </p:sp>
@@ -4453,7 +4436,9 @@
         <p:txBody>
           <a:bodyPr vert="horz" lIns="91440" tIns="45720" rIns="91440" bIns="45720" rtlCol="0" anchor="ctr"/>
           <a:lstStyle/>
-          <a:p/>
+          <a:p>
+            <a:endParaRPr/>
+          </a:p>
         </p:txBody>
       </p:sp>
       <p:sp>
@@ -4496,11 +4481,6 @@
               </a:rPr>
               <a:t>在项目开始前，我们进行了充分的理论学习。我们回顾了从感知机到深层网络的基本原理，理解了激活函数和损失函数的作用。这些理论知识直接指导了我们的代码实践，例如，我们在网络中使用了BatchNorm层，选择了Adam优化器，并采用交叉熵损失函数，这些都是理论学习的直接应用。</a:t>
             </a:r>
-            <a:endParaRPr lang="en-US" sz="1400" b="0" i="0" u="none" strike="noStrike">
-              <a:solidFill>
-                <a:srgbClr val="000000"/>
-              </a:solidFill>
-            </a:endParaRPr>
           </a:p>
         </p:txBody>
       </p:sp>
@@ -4530,7 +4510,9 @@
               <a:defRPr sz="1200"/>
             </a:lvl1pPr>
           </a:lstStyle>
-          <a:p/>
+          <a:p>
+            <a:endParaRPr/>
+          </a:p>
         </p:txBody>
       </p:sp>
       <p:sp>
@@ -4561,10 +4543,9 @@
           </a:lstStyle>
           <a:p>
             <a:r>
-              <a:rPr lang="cs-CZ" smtClean="0"/>
+              <a:rPr lang="cs-CZ"/>
               <a:t>‹#›</a:t>
             </a:r>
-            <a:endParaRPr lang="cs-CZ" smtClean="0"/>
           </a:p>
         </p:txBody>
       </p:sp>
@@ -4619,7 +4600,9 @@
               <a:defRPr sz="1200"/>
             </a:lvl1pPr>
           </a:lstStyle>
-          <a:p/>
+          <a:p>
+            <a:endParaRPr/>
+          </a:p>
         </p:txBody>
       </p:sp>
       <p:sp>
@@ -4650,10 +4633,9 @@
           </a:lstStyle>
           <a:p>
             <a:r>
-              <a:rPr lang="cs-CZ" smtClean="0"/>
+              <a:rPr lang="cs-CZ"/>
               <a:t>1.7.2013</a:t>
             </a:r>
-            <a:endParaRPr lang="cs-CZ" smtClean="0"/>
           </a:p>
         </p:txBody>
       </p:sp>
@@ -4685,7 +4667,9 @@
         <p:txBody>
           <a:bodyPr vert="horz" lIns="91440" tIns="45720" rIns="91440" bIns="45720" rtlCol="0" anchor="ctr"/>
           <a:lstStyle/>
-          <a:p/>
+          <a:p>
+            <a:endParaRPr/>
+          </a:p>
         </p:txBody>
       </p:sp>
       <p:sp>
@@ -4728,11 +4712,6 @@
               </a:rPr>
               <a:t>在项目开始前，我们进行了充分的理论学习。我们回顾了从感知机到深层网络的基本原理，理解了激活函数和损失函数的作用。这些理论知识直接指导了我们的代码实践，例如，我们在网络中使用了BatchNorm层，选择了Adam优化器，并采用交叉熵损失函数，这些都是理论学习的直接应用。</a:t>
             </a:r>
-            <a:endParaRPr lang="en-US" sz="1400" b="0" i="0" u="none" strike="noStrike">
-              <a:solidFill>
-                <a:srgbClr val="000000"/>
-              </a:solidFill>
-            </a:endParaRPr>
           </a:p>
         </p:txBody>
       </p:sp>
@@ -4762,7 +4741,9 @@
               <a:defRPr sz="1200"/>
             </a:lvl1pPr>
           </a:lstStyle>
-          <a:p/>
+          <a:p>
+            <a:endParaRPr/>
+          </a:p>
         </p:txBody>
       </p:sp>
       <p:sp>
@@ -4793,10 +4774,9 @@
           </a:lstStyle>
           <a:p>
             <a:r>
-              <a:rPr lang="cs-CZ" smtClean="0"/>
+              <a:rPr lang="cs-CZ"/>
               <a:t>‹#›</a:t>
             </a:r>
-            <a:endParaRPr lang="cs-CZ" smtClean="0"/>
           </a:p>
         </p:txBody>
       </p:sp>
@@ -4809,11 +4789,11 @@
 </file>
 
 <file path=ppt/slideLayouts/slideLayout1.xml><?xml version="1.0" encoding="utf-8"?>
-<p:sldLayout xmlns:a="http://schemas.openxmlformats.org/drawingml/2006/main" xmlns:r="http://schemas.openxmlformats.org/officeDocument/2006/relationships" xmlns:p="http://schemas.openxmlformats.org/presentationml/2006/main" type="title" matchingName="标题幻灯片">
+<p:sldLayout xmlns:a="http://schemas.openxmlformats.org/drawingml/2006/main" xmlns:r="http://schemas.openxmlformats.org/officeDocument/2006/relationships" xmlns:p="http://schemas.openxmlformats.org/presentationml/2006/main" matchingName="标题幻灯片" type="title">
   <p:cSld name="TITLE">
     <p:spTree>
       <p:nvGrpSpPr>
-        <p:cNvPr id="11" name="Shape 11"/>
+        <p:cNvPr id="1" name="Shape 11"/>
         <p:cNvGrpSpPr/>
         <p:nvPr/>
       </p:nvGrpSpPr>
@@ -4828,7 +4808,9 @@
       <p:sp>
         <p:nvSpPr>
           <p:cNvPr id="12" name="Shape 30"/>
-          <p:cNvSpPr txBox="1"/>
+          <p:cNvSpPr txBox="1">
+            <a:spLocks noGrp="1"/>
+          </p:cNvSpPr>
           <p:nvPr>
             <p:ph type="ctrTitle"/>
           </p:nvPr>
@@ -4958,13 +4940,17 @@
               <a:defRPr/>
             </a:lvl9pPr>
           </a:lstStyle>
-          <a:p/>
+          <a:p>
+            <a:endParaRPr/>
+          </a:p>
         </p:txBody>
       </p:sp>
       <p:sp>
         <p:nvSpPr>
           <p:cNvPr id="13" name="Shape 31"/>
-          <p:cNvSpPr txBox="1"/>
+          <p:cNvSpPr txBox="1">
+            <a:spLocks noGrp="1"/>
+          </p:cNvSpPr>
           <p:nvPr>
             <p:ph type="subTitle" idx="1"/>
           </p:nvPr>
@@ -5141,13 +5127,17 @@
               <a:defRPr sz="1200"/>
             </a:lvl9pPr>
           </a:lstStyle>
-          <a:p/>
+          <a:p>
+            <a:endParaRPr/>
+          </a:p>
         </p:txBody>
       </p:sp>
       <p:sp>
         <p:nvSpPr>
           <p:cNvPr id="14" name="Shape 32"/>
-          <p:cNvSpPr txBox="1"/>
+          <p:cNvSpPr txBox="1">
+            <a:spLocks noGrp="1"/>
+          </p:cNvSpPr>
           <p:nvPr>
             <p:ph type="dt" idx="10"/>
           </p:nvPr>
@@ -5270,13 +5260,17 @@
               <a:defRPr/>
             </a:lvl9pPr>
           </a:lstStyle>
-          <a:p/>
+          <a:p>
+            <a:endParaRPr/>
+          </a:p>
         </p:txBody>
       </p:sp>
       <p:sp>
         <p:nvSpPr>
           <p:cNvPr id="15" name="Shape 33"/>
-          <p:cNvSpPr txBox="1"/>
+          <p:cNvSpPr txBox="1">
+            <a:spLocks noGrp="1"/>
+          </p:cNvSpPr>
           <p:nvPr>
             <p:ph type="ftr" idx="11"/>
           </p:nvPr>
@@ -5399,13 +5393,17 @@
               <a:defRPr/>
             </a:lvl9pPr>
           </a:lstStyle>
-          <a:p/>
+          <a:p>
+            <a:endParaRPr/>
+          </a:p>
         </p:txBody>
       </p:sp>
       <p:sp>
         <p:nvSpPr>
           <p:cNvPr id="16" name="Shape 34"/>
-          <p:cNvSpPr txBox="1"/>
+          <p:cNvSpPr txBox="1">
+            <a:spLocks noGrp="1"/>
+          </p:cNvSpPr>
           <p:nvPr>
             <p:ph type="sldNum" idx="12"/>
           </p:nvPr>
@@ -5503,7 +5501,8 @@
               <a:buNone/>
             </a:pPr>
             <a:fld id="{00000000-1234-1234-1234-123412341234}" type="slidenum">
-              <a:rPr lang="zh-CN"/>
+              <a:rPr lang="en-US" altLang="zh-CN"/>
+              <a:t>‹#›</a:t>
             </a:fld>
             <a:endParaRPr lang="zh-CN"/>
           </a:p>
@@ -5518,11 +5517,11 @@
 </file>
 
 <file path=ppt/slideLayouts/slideLayout10.xml><?xml version="1.0" encoding="utf-8"?>
-<p:sldLayout xmlns:a="http://schemas.openxmlformats.org/drawingml/2006/main" xmlns:r="http://schemas.openxmlformats.org/officeDocument/2006/relationships" xmlns:p="http://schemas.openxmlformats.org/presentationml/2006/main" type="vertTx" matchingName="标题和竖排文字">
+<p:sldLayout xmlns:a="http://schemas.openxmlformats.org/drawingml/2006/main" xmlns:r="http://schemas.openxmlformats.org/officeDocument/2006/relationships" xmlns:p="http://schemas.openxmlformats.org/presentationml/2006/main" matchingName="标题和竖排文字" type="vertTx">
   <p:cSld name="VERTICAL_TEXT">
     <p:spTree>
       <p:nvGrpSpPr>
-        <p:cNvPr id="68" name="Shape 68"/>
+        <p:cNvPr id="1" name="Shape 68"/>
         <p:cNvGrpSpPr/>
         <p:nvPr/>
       </p:nvGrpSpPr>
@@ -5537,7 +5536,9 @@
       <p:sp>
         <p:nvSpPr>
           <p:cNvPr id="69" name="Shape 49"/>
-          <p:cNvSpPr txBox="1"/>
+          <p:cNvSpPr txBox="1">
+            <a:spLocks noGrp="1"/>
+          </p:cNvSpPr>
           <p:nvPr>
             <p:ph type="title"/>
           </p:nvPr>
@@ -5666,13 +5667,17 @@
               <a:defRPr/>
             </a:lvl9pPr>
           </a:lstStyle>
-          <a:p/>
+          <a:p>
+            <a:endParaRPr/>
+          </a:p>
         </p:txBody>
       </p:sp>
       <p:sp>
         <p:nvSpPr>
           <p:cNvPr id="70" name="Shape 50"/>
-          <p:cNvSpPr txBox="1"/>
+          <p:cNvSpPr txBox="1">
+            <a:spLocks noGrp="1"/>
+          </p:cNvSpPr>
           <p:nvPr>
             <p:ph type="body" idx="1"/>
           </p:nvPr>
@@ -5849,13 +5854,17 @@
               <a:defRPr/>
             </a:lvl9pPr>
           </a:lstStyle>
-          <a:p/>
+          <a:p>
+            <a:endParaRPr/>
+          </a:p>
         </p:txBody>
       </p:sp>
       <p:sp>
         <p:nvSpPr>
           <p:cNvPr id="71" name="Shape 51"/>
-          <p:cNvSpPr txBox="1"/>
+          <p:cNvSpPr txBox="1">
+            <a:spLocks noGrp="1"/>
+          </p:cNvSpPr>
           <p:nvPr>
             <p:ph type="dt" idx="10"/>
           </p:nvPr>
@@ -5978,13 +5987,17 @@
               <a:defRPr/>
             </a:lvl9pPr>
           </a:lstStyle>
-          <a:p/>
+          <a:p>
+            <a:endParaRPr/>
+          </a:p>
         </p:txBody>
       </p:sp>
       <p:sp>
         <p:nvSpPr>
           <p:cNvPr id="72" name="Shape 52"/>
-          <p:cNvSpPr txBox="1"/>
+          <p:cNvSpPr txBox="1">
+            <a:spLocks noGrp="1"/>
+          </p:cNvSpPr>
           <p:nvPr>
             <p:ph type="ftr" idx="11"/>
           </p:nvPr>
@@ -6107,13 +6120,17 @@
               <a:defRPr/>
             </a:lvl9pPr>
           </a:lstStyle>
-          <a:p/>
+          <a:p>
+            <a:endParaRPr/>
+          </a:p>
         </p:txBody>
       </p:sp>
       <p:sp>
         <p:nvSpPr>
           <p:cNvPr id="73" name="Shape 53"/>
-          <p:cNvSpPr txBox="1"/>
+          <p:cNvSpPr txBox="1">
+            <a:spLocks noGrp="1"/>
+          </p:cNvSpPr>
           <p:nvPr>
             <p:ph type="sldNum" idx="12"/>
           </p:nvPr>
@@ -6211,7 +6228,8 @@
               <a:buNone/>
             </a:pPr>
             <a:fld id="{00000000-1234-1234-1234-123412341234}" type="slidenum">
-              <a:rPr lang="zh-CN"/>
+              <a:rPr lang="en-US" altLang="zh-CN"/>
+              <a:t>‹#›</a:t>
             </a:fld>
             <a:endParaRPr lang="zh-CN"/>
           </a:p>
@@ -6226,11 +6244,11 @@
 </file>
 
 <file path=ppt/slideLayouts/slideLayout11.xml><?xml version="1.0" encoding="utf-8"?>
-<p:sldLayout xmlns:a="http://schemas.openxmlformats.org/drawingml/2006/main" xmlns:r="http://schemas.openxmlformats.org/officeDocument/2006/relationships" xmlns:p="http://schemas.openxmlformats.org/presentationml/2006/main" type="vertTitleAndTx" matchingName="竖排标题与文本">
+<p:sldLayout xmlns:a="http://schemas.openxmlformats.org/drawingml/2006/main" xmlns:r="http://schemas.openxmlformats.org/officeDocument/2006/relationships" xmlns:p="http://schemas.openxmlformats.org/presentationml/2006/main" matchingName="竖排标题与文本" type="vertTitleAndTx">
   <p:cSld name="VERTICAL_TITLE_AND_VERTICAL_TEXT">
     <p:spTree>
       <p:nvGrpSpPr>
-        <p:cNvPr id="74" name="Shape 74"/>
+        <p:cNvPr id="1" name="Shape 74"/>
         <p:cNvGrpSpPr/>
         <p:nvPr/>
       </p:nvGrpSpPr>
@@ -6245,7 +6263,9 @@
       <p:sp>
         <p:nvSpPr>
           <p:cNvPr id="75" name="Shape 15"/>
-          <p:cNvSpPr txBox="1"/>
+          <p:cNvSpPr txBox="1">
+            <a:spLocks noGrp="1"/>
+          </p:cNvSpPr>
           <p:nvPr>
             <p:ph type="title"/>
           </p:nvPr>
@@ -6374,13 +6394,17 @@
               <a:defRPr/>
             </a:lvl9pPr>
           </a:lstStyle>
-          <a:p/>
+          <a:p>
+            <a:endParaRPr/>
+          </a:p>
         </p:txBody>
       </p:sp>
       <p:sp>
         <p:nvSpPr>
           <p:cNvPr id="76" name="Shape 16"/>
-          <p:cNvSpPr txBox="1"/>
+          <p:cNvSpPr txBox="1">
+            <a:spLocks noGrp="1"/>
+          </p:cNvSpPr>
           <p:nvPr>
             <p:ph type="body" idx="1"/>
           </p:nvPr>
@@ -6557,13 +6581,17 @@
               <a:defRPr/>
             </a:lvl9pPr>
           </a:lstStyle>
-          <a:p/>
+          <a:p>
+            <a:endParaRPr/>
+          </a:p>
         </p:txBody>
       </p:sp>
       <p:sp>
         <p:nvSpPr>
           <p:cNvPr id="77" name="Shape 17"/>
-          <p:cNvSpPr txBox="1"/>
+          <p:cNvSpPr txBox="1">
+            <a:spLocks noGrp="1"/>
+          </p:cNvSpPr>
           <p:nvPr>
             <p:ph type="dt" idx="10"/>
           </p:nvPr>
@@ -6686,13 +6714,17 @@
               <a:defRPr/>
             </a:lvl9pPr>
           </a:lstStyle>
-          <a:p/>
+          <a:p>
+            <a:endParaRPr/>
+          </a:p>
         </p:txBody>
       </p:sp>
       <p:sp>
         <p:nvSpPr>
           <p:cNvPr id="78" name="Shape 18"/>
-          <p:cNvSpPr txBox="1"/>
+          <p:cNvSpPr txBox="1">
+            <a:spLocks noGrp="1"/>
+          </p:cNvSpPr>
           <p:nvPr>
             <p:ph type="ftr" idx="11"/>
           </p:nvPr>
@@ -6815,13 +6847,17 @@
               <a:defRPr/>
             </a:lvl9pPr>
           </a:lstStyle>
-          <a:p/>
+          <a:p>
+            <a:endParaRPr/>
+          </a:p>
         </p:txBody>
       </p:sp>
       <p:sp>
         <p:nvSpPr>
           <p:cNvPr id="79" name="Shape 19"/>
-          <p:cNvSpPr txBox="1"/>
+          <p:cNvSpPr txBox="1">
+            <a:spLocks noGrp="1"/>
+          </p:cNvSpPr>
           <p:nvPr>
             <p:ph type="sldNum" idx="12"/>
           </p:nvPr>
@@ -6919,7 +6955,8 @@
               <a:buNone/>
             </a:pPr>
             <a:fld id="{00000000-1234-1234-1234-123412341234}" type="slidenum">
-              <a:rPr lang="zh-CN"/>
+              <a:rPr lang="en-US" altLang="zh-CN"/>
+              <a:t>‹#›</a:t>
             </a:fld>
             <a:endParaRPr lang="zh-CN"/>
           </a:p>
@@ -7134,11 +7171,11 @@
 </file>
 
 <file path=ppt/slideLayouts/slideLayout2.xml><?xml version="1.0" encoding="utf-8"?>
-<p:sldLayout xmlns:a="http://schemas.openxmlformats.org/drawingml/2006/main" xmlns:r="http://schemas.openxmlformats.org/officeDocument/2006/relationships" xmlns:p="http://schemas.openxmlformats.org/presentationml/2006/main" type="obj" matchingName="标题和内容">
+<p:sldLayout xmlns:a="http://schemas.openxmlformats.org/drawingml/2006/main" xmlns:r="http://schemas.openxmlformats.org/officeDocument/2006/relationships" xmlns:p="http://schemas.openxmlformats.org/presentationml/2006/main" matchingName="标题和内容" type="obj">
   <p:cSld name="OBJECT">
     <p:spTree>
       <p:nvGrpSpPr>
-        <p:cNvPr id="17" name="Shape 17"/>
+        <p:cNvPr id="1" name="Shape 17"/>
         <p:cNvGrpSpPr/>
         <p:nvPr/>
       </p:nvGrpSpPr>
@@ -7153,7 +7190,9 @@
       <p:sp>
         <p:nvSpPr>
           <p:cNvPr id="18" name="Shape 54"/>
-          <p:cNvSpPr txBox="1"/>
+          <p:cNvSpPr txBox="1">
+            <a:spLocks noGrp="1"/>
+          </p:cNvSpPr>
           <p:nvPr>
             <p:ph type="title"/>
           </p:nvPr>
@@ -7282,13 +7321,17 @@
               <a:defRPr/>
             </a:lvl9pPr>
           </a:lstStyle>
-          <a:p/>
+          <a:p>
+            <a:endParaRPr/>
+          </a:p>
         </p:txBody>
       </p:sp>
       <p:sp>
         <p:nvSpPr>
           <p:cNvPr id="19" name="Shape 55"/>
-          <p:cNvSpPr txBox="1"/>
+          <p:cNvSpPr txBox="1">
+            <a:spLocks noGrp="1"/>
+          </p:cNvSpPr>
           <p:nvPr>
             <p:ph type="body" idx="1"/>
           </p:nvPr>
@@ -7465,13 +7508,17 @@
               <a:defRPr/>
             </a:lvl9pPr>
           </a:lstStyle>
-          <a:p/>
+          <a:p>
+            <a:endParaRPr/>
+          </a:p>
         </p:txBody>
       </p:sp>
       <p:sp>
         <p:nvSpPr>
           <p:cNvPr id="20" name="Shape 56"/>
-          <p:cNvSpPr txBox="1"/>
+          <p:cNvSpPr txBox="1">
+            <a:spLocks noGrp="1"/>
+          </p:cNvSpPr>
           <p:nvPr>
             <p:ph type="dt" idx="10"/>
           </p:nvPr>
@@ -7594,13 +7641,17 @@
               <a:defRPr/>
             </a:lvl9pPr>
           </a:lstStyle>
-          <a:p/>
+          <a:p>
+            <a:endParaRPr/>
+          </a:p>
         </p:txBody>
       </p:sp>
       <p:sp>
         <p:nvSpPr>
           <p:cNvPr id="21" name="Shape 57"/>
-          <p:cNvSpPr txBox="1"/>
+          <p:cNvSpPr txBox="1">
+            <a:spLocks noGrp="1"/>
+          </p:cNvSpPr>
           <p:nvPr>
             <p:ph type="ftr" idx="11"/>
           </p:nvPr>
@@ -7723,13 +7774,17 @@
               <a:defRPr/>
             </a:lvl9pPr>
           </a:lstStyle>
-          <a:p/>
+          <a:p>
+            <a:endParaRPr/>
+          </a:p>
         </p:txBody>
       </p:sp>
       <p:sp>
         <p:nvSpPr>
           <p:cNvPr id="22" name="Shape 58"/>
-          <p:cNvSpPr txBox="1"/>
+          <p:cNvSpPr txBox="1">
+            <a:spLocks noGrp="1"/>
+          </p:cNvSpPr>
           <p:nvPr>
             <p:ph type="sldNum" idx="12"/>
           </p:nvPr>
@@ -7827,7 +7882,8 @@
               <a:buNone/>
             </a:pPr>
             <a:fld id="{00000000-1234-1234-1234-123412341234}" type="slidenum">
-              <a:rPr lang="zh-CN"/>
+              <a:rPr lang="en-US" altLang="zh-CN"/>
+              <a:t>‹#›</a:t>
             </a:fld>
             <a:endParaRPr lang="zh-CN"/>
           </a:p>
@@ -7842,11 +7898,11 @@
 </file>
 
 <file path=ppt/slideLayouts/slideLayout3.xml><?xml version="1.0" encoding="utf-8"?>
-<p:sldLayout xmlns:a="http://schemas.openxmlformats.org/drawingml/2006/main" xmlns:r="http://schemas.openxmlformats.org/officeDocument/2006/relationships" xmlns:p="http://schemas.openxmlformats.org/presentationml/2006/main" type="secHead" matchingName="节标题">
+<p:sldLayout xmlns:a="http://schemas.openxmlformats.org/drawingml/2006/main" xmlns:r="http://schemas.openxmlformats.org/officeDocument/2006/relationships" xmlns:p="http://schemas.openxmlformats.org/presentationml/2006/main" matchingName="节标题" type="secHead">
   <p:cSld name="SECTION_HEADER">
     <p:spTree>
       <p:nvGrpSpPr>
-        <p:cNvPr id="23" name="Shape 23"/>
+        <p:cNvPr id="1" name="Shape 23"/>
         <p:cNvGrpSpPr/>
         <p:nvPr/>
       </p:nvGrpSpPr>
@@ -7861,7 +7917,9 @@
       <p:sp>
         <p:nvSpPr>
           <p:cNvPr id="24" name="Shape 59"/>
-          <p:cNvSpPr txBox="1"/>
+          <p:cNvSpPr txBox="1">
+            <a:spLocks noGrp="1"/>
+          </p:cNvSpPr>
           <p:nvPr>
             <p:ph type="title"/>
           </p:nvPr>
@@ -7991,13 +8049,17 @@
               <a:defRPr/>
             </a:lvl9pPr>
           </a:lstStyle>
-          <a:p/>
+          <a:p>
+            <a:endParaRPr/>
+          </a:p>
         </p:txBody>
       </p:sp>
       <p:sp>
         <p:nvSpPr>
           <p:cNvPr id="25" name="Shape 60"/>
-          <p:cNvSpPr txBox="1"/>
+          <p:cNvSpPr txBox="1">
+            <a:spLocks noGrp="1"/>
+          </p:cNvSpPr>
           <p:nvPr>
             <p:ph type="body" idx="1"/>
           </p:nvPr>
@@ -8210,13 +8272,17 @@
               </a:defRPr>
             </a:lvl9pPr>
           </a:lstStyle>
-          <a:p/>
+          <a:p>
+            <a:endParaRPr/>
+          </a:p>
         </p:txBody>
       </p:sp>
       <p:sp>
         <p:nvSpPr>
           <p:cNvPr id="26" name="Shape 61"/>
-          <p:cNvSpPr txBox="1"/>
+          <p:cNvSpPr txBox="1">
+            <a:spLocks noGrp="1"/>
+          </p:cNvSpPr>
           <p:nvPr>
             <p:ph type="dt" idx="10"/>
           </p:nvPr>
@@ -8339,13 +8405,17 @@
               <a:defRPr/>
             </a:lvl9pPr>
           </a:lstStyle>
-          <a:p/>
+          <a:p>
+            <a:endParaRPr/>
+          </a:p>
         </p:txBody>
       </p:sp>
       <p:sp>
         <p:nvSpPr>
           <p:cNvPr id="27" name="Shape 62"/>
-          <p:cNvSpPr txBox="1"/>
+          <p:cNvSpPr txBox="1">
+            <a:spLocks noGrp="1"/>
+          </p:cNvSpPr>
           <p:nvPr>
             <p:ph type="ftr" idx="11"/>
           </p:nvPr>
@@ -8468,13 +8538,17 @@
               <a:defRPr/>
             </a:lvl9pPr>
           </a:lstStyle>
-          <a:p/>
+          <a:p>
+            <a:endParaRPr/>
+          </a:p>
         </p:txBody>
       </p:sp>
       <p:sp>
         <p:nvSpPr>
           <p:cNvPr id="28" name="Shape 63"/>
-          <p:cNvSpPr txBox="1"/>
+          <p:cNvSpPr txBox="1">
+            <a:spLocks noGrp="1"/>
+          </p:cNvSpPr>
           <p:nvPr>
             <p:ph type="sldNum" idx="12"/>
           </p:nvPr>
@@ -8572,7 +8646,8 @@
               <a:buNone/>
             </a:pPr>
             <a:fld id="{00000000-1234-1234-1234-123412341234}" type="slidenum">
-              <a:rPr lang="zh-CN"/>
+              <a:rPr lang="en-US" altLang="zh-CN"/>
+              <a:t>‹#›</a:t>
             </a:fld>
             <a:endParaRPr lang="zh-CN"/>
           </a:p>
@@ -8587,11 +8662,11 @@
 </file>
 
 <file path=ppt/slideLayouts/slideLayout4.xml><?xml version="1.0" encoding="utf-8"?>
-<p:sldLayout xmlns:a="http://schemas.openxmlformats.org/drawingml/2006/main" xmlns:r="http://schemas.openxmlformats.org/officeDocument/2006/relationships" xmlns:p="http://schemas.openxmlformats.org/presentationml/2006/main" type="twoObj" matchingName="两栏内容">
+<p:sldLayout xmlns:a="http://schemas.openxmlformats.org/drawingml/2006/main" xmlns:r="http://schemas.openxmlformats.org/officeDocument/2006/relationships" xmlns:p="http://schemas.openxmlformats.org/presentationml/2006/main" matchingName="两栏内容" type="twoObj">
   <p:cSld name="TWO_OBJECTS">
     <p:spTree>
       <p:nvGrpSpPr>
-        <p:cNvPr id="29" name="Shape 29"/>
+        <p:cNvPr id="1" name="Shape 29"/>
         <p:cNvGrpSpPr/>
         <p:nvPr/>
       </p:nvGrpSpPr>
@@ -8606,7 +8681,9 @@
       <p:sp>
         <p:nvSpPr>
           <p:cNvPr id="30" name="Shape 9"/>
-          <p:cNvSpPr txBox="1"/>
+          <p:cNvSpPr txBox="1">
+            <a:spLocks noGrp="1"/>
+          </p:cNvSpPr>
           <p:nvPr>
             <p:ph type="title"/>
           </p:nvPr>
@@ -8735,13 +8812,17 @@
               <a:defRPr/>
             </a:lvl9pPr>
           </a:lstStyle>
-          <a:p/>
+          <a:p>
+            <a:endParaRPr/>
+          </a:p>
         </p:txBody>
       </p:sp>
       <p:sp>
         <p:nvSpPr>
           <p:cNvPr id="31" name="Shape 10"/>
-          <p:cNvSpPr txBox="1"/>
+          <p:cNvSpPr txBox="1">
+            <a:spLocks noGrp="1"/>
+          </p:cNvSpPr>
           <p:nvPr>
             <p:ph type="body" idx="1"/>
           </p:nvPr>
@@ -8918,13 +8999,17 @@
               <a:defRPr/>
             </a:lvl9pPr>
           </a:lstStyle>
-          <a:p/>
+          <a:p>
+            <a:endParaRPr/>
+          </a:p>
         </p:txBody>
       </p:sp>
       <p:sp>
         <p:nvSpPr>
           <p:cNvPr id="32" name="Shape 11"/>
-          <p:cNvSpPr txBox="1"/>
+          <p:cNvSpPr txBox="1">
+            <a:spLocks noGrp="1"/>
+          </p:cNvSpPr>
           <p:nvPr>
             <p:ph type="body" idx="2"/>
           </p:nvPr>
@@ -9101,13 +9186,17 @@
               <a:defRPr/>
             </a:lvl9pPr>
           </a:lstStyle>
-          <a:p/>
+          <a:p>
+            <a:endParaRPr/>
+          </a:p>
         </p:txBody>
       </p:sp>
       <p:sp>
         <p:nvSpPr>
           <p:cNvPr id="33" name="Shape 12"/>
-          <p:cNvSpPr txBox="1"/>
+          <p:cNvSpPr txBox="1">
+            <a:spLocks noGrp="1"/>
+          </p:cNvSpPr>
           <p:nvPr>
             <p:ph type="dt" idx="10"/>
           </p:nvPr>
@@ -9230,13 +9319,17 @@
               <a:defRPr/>
             </a:lvl9pPr>
           </a:lstStyle>
-          <a:p/>
+          <a:p>
+            <a:endParaRPr/>
+          </a:p>
         </p:txBody>
       </p:sp>
       <p:sp>
         <p:nvSpPr>
           <p:cNvPr id="34" name="Shape 13"/>
-          <p:cNvSpPr txBox="1"/>
+          <p:cNvSpPr txBox="1">
+            <a:spLocks noGrp="1"/>
+          </p:cNvSpPr>
           <p:nvPr>
             <p:ph type="ftr" idx="11"/>
           </p:nvPr>
@@ -9359,13 +9452,17 @@
               <a:defRPr/>
             </a:lvl9pPr>
           </a:lstStyle>
-          <a:p/>
+          <a:p>
+            <a:endParaRPr/>
+          </a:p>
         </p:txBody>
       </p:sp>
       <p:sp>
         <p:nvSpPr>
           <p:cNvPr id="35" name="Shape 14"/>
-          <p:cNvSpPr txBox="1"/>
+          <p:cNvSpPr txBox="1">
+            <a:spLocks noGrp="1"/>
+          </p:cNvSpPr>
           <p:nvPr>
             <p:ph type="sldNum" idx="12"/>
           </p:nvPr>
@@ -9463,7 +9560,8 @@
               <a:buNone/>
             </a:pPr>
             <a:fld id="{00000000-1234-1234-1234-123412341234}" type="slidenum">
-              <a:rPr lang="zh-CN"/>
+              <a:rPr lang="en-US" altLang="zh-CN"/>
+              <a:t>‹#›</a:t>
             </a:fld>
             <a:endParaRPr lang="zh-CN"/>
           </a:p>
@@ -9478,11 +9576,11 @@
 </file>
 
 <file path=ppt/slideLayouts/slideLayout5.xml><?xml version="1.0" encoding="utf-8"?>
-<p:sldLayout xmlns:a="http://schemas.openxmlformats.org/drawingml/2006/main" xmlns:r="http://schemas.openxmlformats.org/officeDocument/2006/relationships" xmlns:p="http://schemas.openxmlformats.org/presentationml/2006/main" type="twoTxTwoObj" matchingName="比较">
+<p:sldLayout xmlns:a="http://schemas.openxmlformats.org/drawingml/2006/main" xmlns:r="http://schemas.openxmlformats.org/officeDocument/2006/relationships" xmlns:p="http://schemas.openxmlformats.org/presentationml/2006/main" matchingName="比较" type="twoTxTwoObj">
   <p:cSld name="TWO_OBJECTS_WITH_TEXT">
     <p:spTree>
       <p:nvGrpSpPr>
-        <p:cNvPr id="36" name="Shape 36"/>
+        <p:cNvPr id="1" name="Shape 36"/>
         <p:cNvGrpSpPr/>
         <p:nvPr/>
       </p:nvGrpSpPr>
@@ -9497,7 +9595,9 @@
       <p:sp>
         <p:nvSpPr>
           <p:cNvPr id="37" name="Shape 35"/>
-          <p:cNvSpPr txBox="1"/>
+          <p:cNvSpPr txBox="1">
+            <a:spLocks noGrp="1"/>
+          </p:cNvSpPr>
           <p:nvPr>
             <p:ph type="title"/>
           </p:nvPr>
@@ -9626,13 +9726,17 @@
               <a:defRPr/>
             </a:lvl9pPr>
           </a:lstStyle>
-          <a:p/>
+          <a:p>
+            <a:endParaRPr/>
+          </a:p>
         </p:txBody>
       </p:sp>
       <p:sp>
         <p:nvSpPr>
           <p:cNvPr id="38" name="Shape 36"/>
-          <p:cNvSpPr txBox="1"/>
+          <p:cNvSpPr txBox="1">
+            <a:spLocks noGrp="1"/>
+          </p:cNvSpPr>
           <p:nvPr>
             <p:ph type="body" idx="1"/>
           </p:nvPr>
@@ -9809,13 +9913,17 @@
               <a:defRPr sz="1200" b="1"/>
             </a:lvl9pPr>
           </a:lstStyle>
-          <a:p/>
+          <a:p>
+            <a:endParaRPr/>
+          </a:p>
         </p:txBody>
       </p:sp>
       <p:sp>
         <p:nvSpPr>
           <p:cNvPr id="39" name="Shape 37"/>
-          <p:cNvSpPr txBox="1"/>
+          <p:cNvSpPr txBox="1">
+            <a:spLocks noGrp="1"/>
+          </p:cNvSpPr>
           <p:nvPr>
             <p:ph type="body" idx="2"/>
           </p:nvPr>
@@ -9992,13 +10100,17 @@
               <a:defRPr/>
             </a:lvl9pPr>
           </a:lstStyle>
-          <a:p/>
+          <a:p>
+            <a:endParaRPr/>
+          </a:p>
         </p:txBody>
       </p:sp>
       <p:sp>
         <p:nvSpPr>
           <p:cNvPr id="40" name="Shape 38"/>
-          <p:cNvSpPr txBox="1"/>
+          <p:cNvSpPr txBox="1">
+            <a:spLocks noGrp="1"/>
+          </p:cNvSpPr>
           <p:nvPr>
             <p:ph type="body" idx="3"/>
           </p:nvPr>
@@ -10175,13 +10287,17 @@
               <a:defRPr sz="1200" b="1"/>
             </a:lvl9pPr>
           </a:lstStyle>
-          <a:p/>
+          <a:p>
+            <a:endParaRPr/>
+          </a:p>
         </p:txBody>
       </p:sp>
       <p:sp>
         <p:nvSpPr>
           <p:cNvPr id="41" name="Shape 39"/>
-          <p:cNvSpPr txBox="1"/>
+          <p:cNvSpPr txBox="1">
+            <a:spLocks noGrp="1"/>
+          </p:cNvSpPr>
           <p:nvPr>
             <p:ph type="body" idx="4"/>
           </p:nvPr>
@@ -10358,13 +10474,17 @@
               <a:defRPr/>
             </a:lvl9pPr>
           </a:lstStyle>
-          <a:p/>
+          <a:p>
+            <a:endParaRPr/>
+          </a:p>
         </p:txBody>
       </p:sp>
       <p:sp>
         <p:nvSpPr>
           <p:cNvPr id="42" name="Shape 40"/>
-          <p:cNvSpPr txBox="1"/>
+          <p:cNvSpPr txBox="1">
+            <a:spLocks noGrp="1"/>
+          </p:cNvSpPr>
           <p:nvPr>
             <p:ph type="dt" idx="10"/>
           </p:nvPr>
@@ -10487,13 +10607,17 @@
               <a:defRPr/>
             </a:lvl9pPr>
           </a:lstStyle>
-          <a:p/>
+          <a:p>
+            <a:endParaRPr/>
+          </a:p>
         </p:txBody>
       </p:sp>
       <p:sp>
         <p:nvSpPr>
           <p:cNvPr id="43" name="Shape 41"/>
-          <p:cNvSpPr txBox="1"/>
+          <p:cNvSpPr txBox="1">
+            <a:spLocks noGrp="1"/>
+          </p:cNvSpPr>
           <p:nvPr>
             <p:ph type="ftr" idx="11"/>
           </p:nvPr>
@@ -10616,13 +10740,17 @@
               <a:defRPr/>
             </a:lvl9pPr>
           </a:lstStyle>
-          <a:p/>
+          <a:p>
+            <a:endParaRPr/>
+          </a:p>
         </p:txBody>
       </p:sp>
       <p:sp>
         <p:nvSpPr>
           <p:cNvPr id="44" name="Shape 42"/>
-          <p:cNvSpPr txBox="1"/>
+          <p:cNvSpPr txBox="1">
+            <a:spLocks noGrp="1"/>
+          </p:cNvSpPr>
           <p:nvPr>
             <p:ph type="sldNum" idx="12"/>
           </p:nvPr>
@@ -10720,7 +10848,8 @@
               <a:buNone/>
             </a:pPr>
             <a:fld id="{00000000-1234-1234-1234-123412341234}" type="slidenum">
-              <a:rPr lang="zh-CN"/>
+              <a:rPr lang="en-US" altLang="zh-CN"/>
+              <a:t>‹#›</a:t>
             </a:fld>
             <a:endParaRPr lang="zh-CN"/>
           </a:p>
@@ -10735,11 +10864,11 @@
 </file>
 
 <file path=ppt/slideLayouts/slideLayout6.xml><?xml version="1.0" encoding="utf-8"?>
-<p:sldLayout xmlns:a="http://schemas.openxmlformats.org/drawingml/2006/main" xmlns:r="http://schemas.openxmlformats.org/officeDocument/2006/relationships" xmlns:p="http://schemas.openxmlformats.org/presentationml/2006/main" type="titleOnly" matchingName="仅标题">
+<p:sldLayout xmlns:a="http://schemas.openxmlformats.org/drawingml/2006/main" xmlns:r="http://schemas.openxmlformats.org/officeDocument/2006/relationships" xmlns:p="http://schemas.openxmlformats.org/presentationml/2006/main" matchingName="仅标题" type="titleOnly">
   <p:cSld name="TITLE_ONLY">
     <p:spTree>
       <p:nvGrpSpPr>
-        <p:cNvPr id="45" name="Shape 45"/>
+        <p:cNvPr id="1" name="Shape 45"/>
         <p:cNvGrpSpPr/>
         <p:nvPr/>
       </p:nvGrpSpPr>
@@ -10754,7 +10883,9 @@
       <p:sp>
         <p:nvSpPr>
           <p:cNvPr id="46" name="Shape 20"/>
-          <p:cNvSpPr txBox="1"/>
+          <p:cNvSpPr txBox="1">
+            <a:spLocks noGrp="1"/>
+          </p:cNvSpPr>
           <p:nvPr>
             <p:ph type="title"/>
           </p:nvPr>
@@ -10883,13 +11014,17 @@
               <a:defRPr/>
             </a:lvl9pPr>
           </a:lstStyle>
-          <a:p/>
+          <a:p>
+            <a:endParaRPr/>
+          </a:p>
         </p:txBody>
       </p:sp>
       <p:sp>
         <p:nvSpPr>
           <p:cNvPr id="47" name="Shape 21"/>
-          <p:cNvSpPr txBox="1"/>
+          <p:cNvSpPr txBox="1">
+            <a:spLocks noGrp="1"/>
+          </p:cNvSpPr>
           <p:nvPr>
             <p:ph type="dt" idx="10"/>
           </p:nvPr>
@@ -11012,13 +11147,17 @@
               <a:defRPr/>
             </a:lvl9pPr>
           </a:lstStyle>
-          <a:p/>
+          <a:p>
+            <a:endParaRPr/>
+          </a:p>
         </p:txBody>
       </p:sp>
       <p:sp>
         <p:nvSpPr>
           <p:cNvPr id="48" name="Shape 22"/>
-          <p:cNvSpPr txBox="1"/>
+          <p:cNvSpPr txBox="1">
+            <a:spLocks noGrp="1"/>
+          </p:cNvSpPr>
           <p:nvPr>
             <p:ph type="ftr" idx="11"/>
           </p:nvPr>
@@ -11141,13 +11280,17 @@
               <a:defRPr/>
             </a:lvl9pPr>
           </a:lstStyle>
-          <a:p/>
+          <a:p>
+            <a:endParaRPr/>
+          </a:p>
         </p:txBody>
       </p:sp>
       <p:sp>
         <p:nvSpPr>
           <p:cNvPr id="49" name="Shape 23"/>
-          <p:cNvSpPr txBox="1"/>
+          <p:cNvSpPr txBox="1">
+            <a:spLocks noGrp="1"/>
+          </p:cNvSpPr>
           <p:nvPr>
             <p:ph type="sldNum" idx="12"/>
           </p:nvPr>
@@ -11245,7 +11388,8 @@
               <a:buNone/>
             </a:pPr>
             <a:fld id="{00000000-1234-1234-1234-123412341234}" type="slidenum">
-              <a:rPr lang="zh-CN"/>
+              <a:rPr lang="en-US" altLang="zh-CN"/>
+              <a:t>‹#›</a:t>
             </a:fld>
             <a:endParaRPr lang="zh-CN"/>
           </a:p>
@@ -11260,11 +11404,11 @@
 </file>
 
 <file path=ppt/slideLayouts/slideLayout7.xml><?xml version="1.0" encoding="utf-8"?>
-<p:sldLayout xmlns:a="http://schemas.openxmlformats.org/drawingml/2006/main" xmlns:r="http://schemas.openxmlformats.org/officeDocument/2006/relationships" xmlns:p="http://schemas.openxmlformats.org/presentationml/2006/main" type="blank" matchingName="空白">
+<p:sldLayout xmlns:a="http://schemas.openxmlformats.org/drawingml/2006/main" xmlns:r="http://schemas.openxmlformats.org/officeDocument/2006/relationships" xmlns:p="http://schemas.openxmlformats.org/presentationml/2006/main" matchingName="空白" type="blank">
   <p:cSld name="BLANK">
     <p:spTree>
       <p:nvGrpSpPr>
-        <p:cNvPr id="50" name="Shape 50"/>
+        <p:cNvPr id="1" name="Shape 50"/>
         <p:cNvGrpSpPr/>
         <p:nvPr/>
       </p:nvGrpSpPr>
@@ -11279,7 +11423,9 @@
       <p:sp>
         <p:nvSpPr>
           <p:cNvPr id="51" name="Shape 6"/>
-          <p:cNvSpPr txBox="1"/>
+          <p:cNvSpPr txBox="1">
+            <a:spLocks noGrp="1"/>
+          </p:cNvSpPr>
           <p:nvPr>
             <p:ph type="dt" idx="10"/>
           </p:nvPr>
@@ -11402,13 +11548,17 @@
               <a:defRPr/>
             </a:lvl9pPr>
           </a:lstStyle>
-          <a:p/>
+          <a:p>
+            <a:endParaRPr/>
+          </a:p>
         </p:txBody>
       </p:sp>
       <p:sp>
         <p:nvSpPr>
           <p:cNvPr id="52" name="Shape 7"/>
-          <p:cNvSpPr txBox="1"/>
+          <p:cNvSpPr txBox="1">
+            <a:spLocks noGrp="1"/>
+          </p:cNvSpPr>
           <p:nvPr>
             <p:ph type="ftr" idx="11"/>
           </p:nvPr>
@@ -11531,13 +11681,17 @@
               <a:defRPr/>
             </a:lvl9pPr>
           </a:lstStyle>
-          <a:p/>
+          <a:p>
+            <a:endParaRPr/>
+          </a:p>
         </p:txBody>
       </p:sp>
       <p:sp>
         <p:nvSpPr>
           <p:cNvPr id="53" name="Shape 8"/>
-          <p:cNvSpPr txBox="1"/>
+          <p:cNvSpPr txBox="1">
+            <a:spLocks noGrp="1"/>
+          </p:cNvSpPr>
           <p:nvPr>
             <p:ph type="sldNum" idx="12"/>
           </p:nvPr>
@@ -11635,7 +11789,8 @@
               <a:buNone/>
             </a:pPr>
             <a:fld id="{00000000-1234-1234-1234-123412341234}" type="slidenum">
-              <a:rPr lang="zh-CN"/>
+              <a:rPr lang="en-US" altLang="zh-CN"/>
+              <a:t>‹#›</a:t>
             </a:fld>
             <a:endParaRPr lang="zh-CN"/>
           </a:p>
@@ -11650,11 +11805,11 @@
 </file>
 
 <file path=ppt/slideLayouts/slideLayout8.xml><?xml version="1.0" encoding="utf-8"?>
-<p:sldLayout xmlns:a="http://schemas.openxmlformats.org/drawingml/2006/main" xmlns:r="http://schemas.openxmlformats.org/officeDocument/2006/relationships" xmlns:p="http://schemas.openxmlformats.org/presentationml/2006/main" type="objTx" matchingName="内容与标题">
+<p:sldLayout xmlns:a="http://schemas.openxmlformats.org/drawingml/2006/main" xmlns:r="http://schemas.openxmlformats.org/officeDocument/2006/relationships" xmlns:p="http://schemas.openxmlformats.org/presentationml/2006/main" matchingName="内容与标题" type="objTx">
   <p:cSld name="OBJECT_WITH_CAPTION_TEXT">
     <p:spTree>
       <p:nvGrpSpPr>
-        <p:cNvPr id="54" name="Shape 54"/>
+        <p:cNvPr id="1" name="Shape 54"/>
         <p:cNvGrpSpPr/>
         <p:nvPr/>
       </p:nvGrpSpPr>
@@ -11669,7 +11824,9 @@
       <p:sp>
         <p:nvSpPr>
           <p:cNvPr id="55" name="Shape 43"/>
-          <p:cNvSpPr txBox="1"/>
+          <p:cNvSpPr txBox="1">
+            <a:spLocks noGrp="1"/>
+          </p:cNvSpPr>
           <p:nvPr>
             <p:ph type="title"/>
           </p:nvPr>
@@ -11799,13 +11956,17 @@
               <a:defRPr/>
             </a:lvl9pPr>
           </a:lstStyle>
-          <a:p/>
+          <a:p>
+            <a:endParaRPr/>
+          </a:p>
         </p:txBody>
       </p:sp>
       <p:sp>
         <p:nvSpPr>
           <p:cNvPr id="56" name="Shape 44"/>
-          <p:cNvSpPr txBox="1"/>
+          <p:cNvSpPr txBox="1">
+            <a:spLocks noGrp="1"/>
+          </p:cNvSpPr>
           <p:nvPr>
             <p:ph type="body" idx="1"/>
           </p:nvPr>
@@ -11982,13 +12143,17 @@
               <a:defRPr sz="1500"/>
             </a:lvl9pPr>
           </a:lstStyle>
-          <a:p/>
+          <a:p>
+            <a:endParaRPr/>
+          </a:p>
         </p:txBody>
       </p:sp>
       <p:sp>
         <p:nvSpPr>
           <p:cNvPr id="57" name="Shape 45"/>
-          <p:cNvSpPr txBox="1"/>
+          <p:cNvSpPr txBox="1">
+            <a:spLocks noGrp="1"/>
+          </p:cNvSpPr>
           <p:nvPr>
             <p:ph type="body" idx="2"/>
           </p:nvPr>
@@ -12165,13 +12330,17 @@
               <a:defRPr sz="800"/>
             </a:lvl9pPr>
           </a:lstStyle>
-          <a:p/>
+          <a:p>
+            <a:endParaRPr/>
+          </a:p>
         </p:txBody>
       </p:sp>
       <p:sp>
         <p:nvSpPr>
           <p:cNvPr id="58" name="Shape 46"/>
-          <p:cNvSpPr txBox="1"/>
+          <p:cNvSpPr txBox="1">
+            <a:spLocks noGrp="1"/>
+          </p:cNvSpPr>
           <p:nvPr>
             <p:ph type="dt" idx="10"/>
           </p:nvPr>
@@ -12294,13 +12463,17 @@
               <a:defRPr/>
             </a:lvl9pPr>
           </a:lstStyle>
-          <a:p/>
+          <a:p>
+            <a:endParaRPr/>
+          </a:p>
         </p:txBody>
       </p:sp>
       <p:sp>
         <p:nvSpPr>
           <p:cNvPr id="59" name="Shape 47"/>
-          <p:cNvSpPr txBox="1"/>
+          <p:cNvSpPr txBox="1">
+            <a:spLocks noGrp="1"/>
+          </p:cNvSpPr>
           <p:nvPr>
             <p:ph type="ftr" idx="11"/>
           </p:nvPr>
@@ -12423,13 +12596,17 @@
               <a:defRPr/>
             </a:lvl9pPr>
           </a:lstStyle>
-          <a:p/>
+          <a:p>
+            <a:endParaRPr/>
+          </a:p>
         </p:txBody>
       </p:sp>
       <p:sp>
         <p:nvSpPr>
           <p:cNvPr id="60" name="Shape 48"/>
-          <p:cNvSpPr txBox="1"/>
+          <p:cNvSpPr txBox="1">
+            <a:spLocks noGrp="1"/>
+          </p:cNvSpPr>
           <p:nvPr>
             <p:ph type="sldNum" idx="12"/>
           </p:nvPr>
@@ -12527,7 +12704,8 @@
               <a:buNone/>
             </a:pPr>
             <a:fld id="{00000000-1234-1234-1234-123412341234}" type="slidenum">
-              <a:rPr lang="zh-CN"/>
+              <a:rPr lang="en-US" altLang="zh-CN"/>
+              <a:t>‹#›</a:t>
             </a:fld>
             <a:endParaRPr lang="zh-CN"/>
           </a:p>
@@ -12542,11 +12720,11 @@
 </file>
 
 <file path=ppt/slideLayouts/slideLayout9.xml><?xml version="1.0" encoding="utf-8"?>
-<p:sldLayout xmlns:a="http://schemas.openxmlformats.org/drawingml/2006/main" xmlns:r="http://schemas.openxmlformats.org/officeDocument/2006/relationships" xmlns:p="http://schemas.openxmlformats.org/presentationml/2006/main" type="picTx" matchingName="图片与标题">
+<p:sldLayout xmlns:a="http://schemas.openxmlformats.org/drawingml/2006/main" xmlns:r="http://schemas.openxmlformats.org/officeDocument/2006/relationships" xmlns:p="http://schemas.openxmlformats.org/presentationml/2006/main" matchingName="图片与标题" type="picTx">
   <p:cSld name="PICTURE_WITH_CAPTION_TEXT">
     <p:spTree>
       <p:nvGrpSpPr>
-        <p:cNvPr id="61" name="Shape 61"/>
+        <p:cNvPr id="1" name="Shape 61"/>
         <p:cNvGrpSpPr/>
         <p:nvPr/>
       </p:nvGrpSpPr>
@@ -12561,7 +12739,9 @@
       <p:sp>
         <p:nvSpPr>
           <p:cNvPr id="62" name="Shape 24"/>
-          <p:cNvSpPr txBox="1"/>
+          <p:cNvSpPr txBox="1">
+            <a:spLocks noGrp="1"/>
+          </p:cNvSpPr>
           <p:nvPr>
             <p:ph type="title"/>
           </p:nvPr>
@@ -12691,13 +12871,17 @@
               <a:defRPr/>
             </a:lvl9pPr>
           </a:lstStyle>
-          <a:p/>
+          <a:p>
+            <a:endParaRPr/>
+          </a:p>
         </p:txBody>
       </p:sp>
       <p:sp>
         <p:nvSpPr>
           <p:cNvPr id="63" name="Shape 25"/>
-          <p:cNvSpPr/>
+          <p:cNvSpPr>
+            <a:spLocks noGrp="1"/>
+          </p:cNvSpPr>
           <p:nvPr>
             <p:ph type="pic" idx="2"/>
           </p:nvPr>
@@ -12719,7 +12903,9 @@
       <p:sp>
         <p:nvSpPr>
           <p:cNvPr id="64" name="Shape 26"/>
-          <p:cNvSpPr txBox="1"/>
+          <p:cNvSpPr txBox="1">
+            <a:spLocks noGrp="1"/>
+          </p:cNvSpPr>
           <p:nvPr>
             <p:ph type="body" idx="1"/>
           </p:nvPr>
@@ -12896,13 +13082,17 @@
               <a:defRPr sz="800"/>
             </a:lvl9pPr>
           </a:lstStyle>
-          <a:p/>
+          <a:p>
+            <a:endParaRPr/>
+          </a:p>
         </p:txBody>
       </p:sp>
       <p:sp>
         <p:nvSpPr>
           <p:cNvPr id="65" name="Shape 27"/>
-          <p:cNvSpPr txBox="1"/>
+          <p:cNvSpPr txBox="1">
+            <a:spLocks noGrp="1"/>
+          </p:cNvSpPr>
           <p:nvPr>
             <p:ph type="dt" idx="10"/>
           </p:nvPr>
@@ -13025,13 +13215,17 @@
               <a:defRPr/>
             </a:lvl9pPr>
           </a:lstStyle>
-          <a:p/>
+          <a:p>
+            <a:endParaRPr/>
+          </a:p>
         </p:txBody>
       </p:sp>
       <p:sp>
         <p:nvSpPr>
           <p:cNvPr id="66" name="Shape 28"/>
-          <p:cNvSpPr txBox="1"/>
+          <p:cNvSpPr txBox="1">
+            <a:spLocks noGrp="1"/>
+          </p:cNvSpPr>
           <p:nvPr>
             <p:ph type="ftr" idx="11"/>
           </p:nvPr>
@@ -13154,13 +13348,17 @@
               <a:defRPr/>
             </a:lvl9pPr>
           </a:lstStyle>
-          <a:p/>
+          <a:p>
+            <a:endParaRPr/>
+          </a:p>
         </p:txBody>
       </p:sp>
       <p:sp>
         <p:nvSpPr>
           <p:cNvPr id="67" name="Shape 29"/>
-          <p:cNvSpPr txBox="1"/>
+          <p:cNvSpPr txBox="1">
+            <a:spLocks noGrp="1"/>
+          </p:cNvSpPr>
           <p:nvPr>
             <p:ph type="sldNum" idx="12"/>
           </p:nvPr>
@@ -13258,7 +13456,8 @@
               <a:buNone/>
             </a:pPr>
             <a:fld id="{00000000-1234-1234-1234-123412341234}" type="slidenum">
-              <a:rPr lang="zh-CN"/>
+              <a:rPr lang="en-US" altLang="zh-CN"/>
+              <a:t>‹#›</a:t>
             </a:fld>
             <a:endParaRPr lang="zh-CN"/>
           </a:p>
@@ -13285,7 +13484,7 @@
     </p:bg>
     <p:spTree>
       <p:nvGrpSpPr>
-        <p:cNvPr id="5" name="Shape 5"/>
+        <p:cNvPr id="1" name="Shape 5"/>
         <p:cNvGrpSpPr/>
         <p:nvPr/>
       </p:nvGrpSpPr>
@@ -13300,7 +13499,9 @@
       <p:sp>
         <p:nvSpPr>
           <p:cNvPr id="6" name="Shape 1"/>
-          <p:cNvSpPr txBox="1"/>
+          <p:cNvSpPr txBox="1">
+            <a:spLocks noGrp="1"/>
+          </p:cNvSpPr>
           <p:nvPr>
             <p:ph type="title"/>
           </p:nvPr>
@@ -13438,13 +13639,17 @@
               <a:defRPr sz="1400"/>
             </a:lvl9pPr>
           </a:lstStyle>
-          <a:p/>
+          <a:p>
+            <a:endParaRPr/>
+          </a:p>
         </p:txBody>
       </p:sp>
       <p:sp>
         <p:nvSpPr>
           <p:cNvPr id="7" name="Shape 2"/>
-          <p:cNvSpPr txBox="1"/>
+          <p:cNvSpPr txBox="1">
+            <a:spLocks noGrp="1"/>
+          </p:cNvSpPr>
           <p:nvPr>
             <p:ph type="body" idx="1"/>
           </p:nvPr>
@@ -13702,13 +13907,17 @@
               </a:defRPr>
             </a:lvl9pPr>
           </a:lstStyle>
-          <a:p/>
+          <a:p>
+            <a:endParaRPr/>
+          </a:p>
         </p:txBody>
       </p:sp>
       <p:sp>
         <p:nvSpPr>
           <p:cNvPr id="8" name="Shape 3"/>
-          <p:cNvSpPr txBox="1"/>
+          <p:cNvSpPr txBox="1">
+            <a:spLocks noGrp="1"/>
+          </p:cNvSpPr>
           <p:nvPr>
             <p:ph type="dt" idx="10"/>
           </p:nvPr>
@@ -13903,13 +14112,17 @@
               </a:defRPr>
             </a:lvl9pPr>
           </a:lstStyle>
-          <a:p/>
+          <a:p>
+            <a:endParaRPr/>
+          </a:p>
         </p:txBody>
       </p:sp>
       <p:sp>
         <p:nvSpPr>
           <p:cNvPr id="9" name="Shape 4"/>
-          <p:cNvSpPr txBox="1"/>
+          <p:cNvSpPr txBox="1">
+            <a:spLocks noGrp="1"/>
+          </p:cNvSpPr>
           <p:nvPr>
             <p:ph type="ftr" idx="11"/>
           </p:nvPr>
@@ -14104,13 +14317,17 @@
               </a:defRPr>
             </a:lvl9pPr>
           </a:lstStyle>
-          <a:p/>
+          <a:p>
+            <a:endParaRPr/>
+          </a:p>
         </p:txBody>
       </p:sp>
       <p:sp>
         <p:nvSpPr>
           <p:cNvPr id="10" name="Shape 5"/>
-          <p:cNvSpPr txBox="1"/>
+          <p:cNvSpPr txBox="1">
+            <a:spLocks noGrp="1"/>
+          </p:cNvSpPr>
           <p:nvPr>
             <p:ph type="sldNum" idx="12"/>
           </p:nvPr>
@@ -14280,7 +14497,8 @@
               <a:buNone/>
             </a:pPr>
             <a:fld id="{00000000-1234-1234-1234-123412341234}" type="slidenum">
-              <a:rPr lang="zh-CN"/>
+              <a:rPr lang="en-US" altLang="zh-CN"/>
+              <a:t>‹#›</a:t>
             </a:fld>
             <a:endParaRPr lang="zh-CN"/>
           </a:p>
@@ -15010,7 +15228,7 @@
     </p:bg>
     <p:spTree>
       <p:nvGrpSpPr>
-        <p:cNvPr id="5" name="Shape 5"/>
+        <p:cNvPr id="1" name="Shape 5"/>
         <p:cNvGrpSpPr/>
         <p:nvPr/>
       </p:nvGrpSpPr>
@@ -15736,7 +15954,7 @@
     </p:bg>
     <p:spTree>
       <p:nvGrpSpPr>
-        <p:cNvPr id="5" name="Shape 5"/>
+        <p:cNvPr id="1" name="Shape 5"/>
         <p:cNvGrpSpPr/>
         <p:nvPr/>
       </p:nvGrpSpPr>
@@ -16462,7 +16680,7 @@
     </p:bg>
     <p:spTree>
       <p:nvGrpSpPr>
-        <p:cNvPr id="5" name="Shape 5"/>
+        <p:cNvPr id="1" name="Shape 5"/>
         <p:cNvGrpSpPr/>
         <p:nvPr/>
       </p:nvGrpSpPr>
@@ -17188,7 +17406,7 @@
     </p:bg>
     <p:spTree>
       <p:nvGrpSpPr>
-        <p:cNvPr id="5" name="Shape 5"/>
+        <p:cNvPr id="1" name="Shape 5"/>
         <p:cNvGrpSpPr/>
         <p:nvPr/>
       </p:nvGrpSpPr>
@@ -17914,7 +18132,7 @@
     </p:bg>
     <p:spTree>
       <p:nvGrpSpPr>
-        <p:cNvPr id="5" name="Shape 5"/>
+        <p:cNvPr id="1" name="Shape 5"/>
         <p:cNvGrpSpPr/>
         <p:nvPr/>
       </p:nvGrpSpPr>
@@ -18640,7 +18858,7 @@
     </p:bg>
     <p:spTree>
       <p:nvGrpSpPr>
-        <p:cNvPr id="5" name="Shape 5"/>
+        <p:cNvPr id="1" name="Shape 5"/>
         <p:cNvGrpSpPr/>
         <p:nvPr/>
       </p:nvGrpSpPr>
@@ -19366,7 +19584,7 @@
     </p:bg>
     <p:spTree>
       <p:nvGrpSpPr>
-        <p:cNvPr id="5" name="Shape 5"/>
+        <p:cNvPr id="1" name="Shape 5"/>
         <p:cNvGrpSpPr/>
         <p:nvPr/>
       </p:nvGrpSpPr>
@@ -20092,7 +20310,7 @@
     </p:bg>
     <p:spTree>
       <p:nvGrpSpPr>
-        <p:cNvPr id="5" name="Shape 5"/>
+        <p:cNvPr id="1" name="Shape 5"/>
         <p:cNvGrpSpPr/>
         <p:nvPr/>
       </p:nvGrpSpPr>
@@ -20809,7 +21027,7 @@
     <p:bg>
       <p:bgPr>
         <a:blipFill dpi="0" rotWithShape="1">
-          <a:blip r:embed="rId1"/>
+          <a:blip r:embed="rId12"/>
           <a:srcRect/>
           <a:stretch>
             <a:fillRect/>
@@ -20866,6 +21084,7 @@
             <a:pPr algn="ctr">
               <a:defRPr/>
             </a:pPr>
+            <a:endParaRPr/>
           </a:p>
         </p:txBody>
       </p:sp>
@@ -20969,7 +21188,7 @@
           <p:cNvSpPr/>
           <p:nvPr>
             <p:custDataLst>
-              <p:tags r:id="rId2"/>
+              <p:tags r:id="rId1"/>
             </p:custDataLst>
           </p:nvPr>
         </p:nvSpPr>
@@ -21005,6 +21224,7 @@
             <a:pPr algn="ctr">
               <a:defRPr/>
             </a:pPr>
+            <a:endParaRPr/>
           </a:p>
         </p:txBody>
       </p:sp>
@@ -21014,7 +21234,7 @@
           <p:cNvSpPr/>
           <p:nvPr>
             <p:custDataLst>
-              <p:tags r:id="rId3"/>
+              <p:tags r:id="rId2"/>
             </p:custDataLst>
           </p:nvPr>
         </p:nvSpPr>
@@ -21055,15 +21275,6 @@
               </a:rPr>
               <a:t>✦ 汇报小组</a:t>
             </a:r>
-            <a:endParaRPr lang="en-US" sz="2000" b="1" i="0" u="none" strike="noStrike">
-              <a:solidFill>
-                <a:srgbClr val="FF8C00"/>
-              </a:solidFill>
-              <a:latin typeface="Noto Sans SC" panose="020B0200000000000000" charset="-122"/>
-              <a:ea typeface="Noto Sans SC" panose="020B0200000000000000" charset="-122"/>
-              <a:cs typeface="Noto Sans SC" panose="020B0200000000000000" charset="-122"/>
-              <a:sym typeface="Noto Sans SC" panose="020B0200000000000000" charset="-122"/>
-            </a:endParaRPr>
           </a:p>
         </p:txBody>
       </p:sp>
@@ -21073,7 +21284,7 @@
           <p:cNvSpPr/>
           <p:nvPr>
             <p:custDataLst>
-              <p:tags r:id="rId4"/>
+              <p:tags r:id="rId3"/>
             </p:custDataLst>
           </p:nvPr>
         </p:nvSpPr>
@@ -21116,17 +21327,6 @@
               </a:rPr>
               <a:t>苏致远 / 吴多迅 / 魏龙飞</a:t>
             </a:r>
-            <a:endParaRPr lang="en-US" sz="1800" b="1" i="0" u="none" strike="noStrike">
-              <a:solidFill>
-                <a:srgbClr val="FFFFFF">
-                  <a:alpha val="85098"/>
-                </a:srgbClr>
-              </a:solidFill>
-              <a:latin typeface="Noto Sans SC" panose="020B0200000000000000" charset="-122"/>
-              <a:ea typeface="Noto Sans SC" panose="020B0200000000000000" charset="-122"/>
-              <a:cs typeface="Noto Sans SC" panose="020B0200000000000000" charset="-122"/>
-              <a:sym typeface="Noto Sans SC" panose="020B0200000000000000" charset="-122"/>
-            </a:endParaRPr>
           </a:p>
         </p:txBody>
       </p:sp>
@@ -21136,7 +21336,7 @@
           <p:cNvSpPr/>
           <p:nvPr>
             <p:custDataLst>
-              <p:tags r:id="rId5"/>
+              <p:tags r:id="rId4"/>
             </p:custDataLst>
           </p:nvPr>
         </p:nvSpPr>
@@ -21172,6 +21372,7 @@
             <a:pPr algn="ctr">
               <a:defRPr/>
             </a:pPr>
+            <a:endParaRPr/>
           </a:p>
         </p:txBody>
       </p:sp>
@@ -21181,7 +21382,7 @@
           <p:cNvSpPr/>
           <p:nvPr>
             <p:custDataLst>
-              <p:tags r:id="rId6"/>
+              <p:tags r:id="rId5"/>
             </p:custDataLst>
           </p:nvPr>
         </p:nvSpPr>
@@ -21222,15 +21423,6 @@
               </a:rPr>
               <a:t>✦ 专业与学院</a:t>
             </a:r>
-            <a:endParaRPr lang="en-US" sz="2000" b="1" i="0" u="none" strike="noStrike">
-              <a:solidFill>
-                <a:srgbClr val="FF8C00"/>
-              </a:solidFill>
-              <a:latin typeface="Noto Sans SC" panose="020B0200000000000000" charset="-122"/>
-              <a:ea typeface="Noto Sans SC" panose="020B0200000000000000" charset="-122"/>
-              <a:cs typeface="Noto Sans SC" panose="020B0200000000000000" charset="-122"/>
-              <a:sym typeface="Noto Sans SC" panose="020B0200000000000000" charset="-122"/>
-            </a:endParaRPr>
           </a:p>
         </p:txBody>
       </p:sp>
@@ -21240,7 +21432,7 @@
           <p:cNvSpPr/>
           <p:nvPr>
             <p:custDataLst>
-              <p:tags r:id="rId7"/>
+              <p:tags r:id="rId6"/>
             </p:custDataLst>
           </p:nvPr>
         </p:nvSpPr>
@@ -21283,17 +21475,6 @@
               </a:rPr>
               <a:t>计算机科学与技术学院</a:t>
             </a:r>
-            <a:endParaRPr lang="zh-CN" altLang="en-US" sz="1800" b="1" i="0" u="none" strike="noStrike">
-              <a:solidFill>
-                <a:srgbClr val="FFFFFF">
-                  <a:alpha val="85098"/>
-                </a:srgbClr>
-              </a:solidFill>
-              <a:latin typeface="Noto Sans SC" panose="020B0200000000000000" charset="-122"/>
-              <a:ea typeface="Noto Sans SC" panose="020B0200000000000000" charset="-122"/>
-              <a:cs typeface="Noto Sans SC" panose="020B0200000000000000" charset="-122"/>
-              <a:sym typeface="Noto Sans SC" panose="020B0200000000000000" charset="-122"/>
-            </a:endParaRPr>
           </a:p>
           <a:p>
             <a:pPr marL="0" indent="0" algn="ctr">
@@ -21330,17 +21511,6 @@
               </a:rPr>
               <a:t>专业</a:t>
             </a:r>
-            <a:endParaRPr lang="zh-CN" altLang="en-US" sz="1800" b="1" i="0" u="none" strike="noStrike">
-              <a:solidFill>
-                <a:srgbClr val="FFFFFF">
-                  <a:alpha val="85098"/>
-                </a:srgbClr>
-              </a:solidFill>
-              <a:latin typeface="Noto Sans SC" panose="020B0200000000000000" charset="-122"/>
-              <a:ea typeface="Noto Sans SC" panose="020B0200000000000000" charset="-122"/>
-              <a:cs typeface="Noto Sans SC" panose="020B0200000000000000" charset="-122"/>
-              <a:sym typeface="Noto Sans SC" panose="020B0200000000000000" charset="-122"/>
-            </a:endParaRPr>
           </a:p>
         </p:txBody>
       </p:sp>
@@ -21350,7 +21520,7 @@
           <p:cNvSpPr/>
           <p:nvPr>
             <p:custDataLst>
-              <p:tags r:id="rId8"/>
+              <p:tags r:id="rId7"/>
             </p:custDataLst>
           </p:nvPr>
         </p:nvSpPr>
@@ -21386,6 +21556,7 @@
             <a:pPr algn="ctr">
               <a:defRPr/>
             </a:pPr>
+            <a:endParaRPr/>
           </a:p>
         </p:txBody>
       </p:sp>
@@ -21395,7 +21566,7 @@
           <p:cNvSpPr/>
           <p:nvPr>
             <p:custDataLst>
-              <p:tags r:id="rId9"/>
+              <p:tags r:id="rId8"/>
             </p:custDataLst>
           </p:nvPr>
         </p:nvSpPr>
@@ -21436,15 +21607,6 @@
               </a:rPr>
               <a:t>✦ 报告日期</a:t>
             </a:r>
-            <a:endParaRPr lang="en-US" sz="2000" b="1" i="0" u="none" strike="noStrike">
-              <a:solidFill>
-                <a:srgbClr val="FF8C00"/>
-              </a:solidFill>
-              <a:latin typeface="Noto Sans SC" panose="020B0200000000000000" charset="-122"/>
-              <a:ea typeface="Noto Sans SC" panose="020B0200000000000000" charset="-122"/>
-              <a:cs typeface="Noto Sans SC" panose="020B0200000000000000" charset="-122"/>
-              <a:sym typeface="Noto Sans SC" panose="020B0200000000000000" charset="-122"/>
-            </a:endParaRPr>
           </a:p>
         </p:txBody>
       </p:sp>
@@ -21454,7 +21616,7 @@
           <p:cNvSpPr/>
           <p:nvPr>
             <p:custDataLst>
-              <p:tags r:id="rId10"/>
+              <p:tags r:id="rId9"/>
             </p:custDataLst>
           </p:nvPr>
         </p:nvSpPr>
@@ -21497,17 +21659,6 @@
               </a:rPr>
               <a:t>2026年8月15日</a:t>
             </a:r>
-            <a:endParaRPr lang="en-US" sz="1800" b="1" i="0" u="none" strike="noStrike">
-              <a:solidFill>
-                <a:srgbClr val="FFFFFF">
-                  <a:alpha val="85098"/>
-                </a:srgbClr>
-              </a:solidFill>
-              <a:latin typeface="Noto Sans SC" panose="020B0200000000000000" charset="-122"/>
-              <a:ea typeface="Noto Sans SC" panose="020B0200000000000000" charset="-122"/>
-              <a:cs typeface="Noto Sans SC" panose="020B0200000000000000" charset="-122"/>
-              <a:sym typeface="Noto Sans SC" panose="020B0200000000000000" charset="-122"/>
-            </a:endParaRPr>
           </a:p>
         </p:txBody>
       </p:sp>
@@ -21520,7 +21671,7 @@
           <p:nvPr/>
         </p:nvPicPr>
         <p:blipFill>
-          <a:blip r:embed="rId11"/>
+          <a:blip r:embed="rId13"/>
           <a:srcRect l="254" r="254"/>
           <a:stretch>
             <a:fillRect/>
@@ -21556,7 +21707,7 @@
     <p:bg>
       <p:bgPr>
         <a:blipFill dpi="0" rotWithShape="1">
-          <a:blip r:embed="rId1"/>
+          <a:blip r:embed="rId5"/>
           <a:srcRect/>
           <a:stretch>
             <a:fillRect/>
@@ -21617,6 +21768,7 @@
             <a:pPr algn="ctr">
               <a:defRPr/>
             </a:pPr>
+            <a:endParaRPr/>
           </a:p>
         </p:txBody>
       </p:sp>
@@ -21675,18 +21827,18 @@
           </p:cNvPicPr>
           <p:nvPr>
             <p:custDataLst>
-              <p:tags r:id="rId2"/>
+              <p:tags r:id="rId1"/>
             </p:custDataLst>
           </p:nvPr>
         </p:nvPicPr>
         <p:blipFill>
-          <a:blip r:embed="rId3">
+          <a:blip r:embed="rId6">
             <a:extLst>
               <a:ext uri="{28A0092B-C50C-407E-A947-70E740481C1C}">
                 <a14:useLocalDpi xmlns:a14="http://schemas.microsoft.com/office/drawing/2010/main" val="0"/>
               </a:ext>
               <a:ext uri="{96DAC541-7B7A-43D3-8B79-37D633B846F1}">
-                <asvg:svgBlip xmlns:asvg="http://schemas.microsoft.com/office/drawing/2016/SVG/main" r:embed="rId4"/>
+                <asvg:svgBlip xmlns:asvg="http://schemas.microsoft.com/office/drawing/2016/SVG/main" r:embed="rId7"/>
               </a:ext>
             </a:extLst>
           </a:blip>
@@ -21757,7 +21909,7 @@
           <p:cNvSpPr/>
           <p:nvPr>
             <p:custDataLst>
-              <p:tags r:id="rId5"/>
+              <p:tags r:id="rId2"/>
             </p:custDataLst>
           </p:nvPr>
         </p:nvSpPr>
@@ -21918,15 +22070,6 @@
               </a:rPr>
               <a:t>实践，将理论落到实处。</a:t>
             </a:r>
-            <a:endParaRPr lang="zh-CN" altLang="en-US" sz="1800" b="0" i="0" u="none" strike="noStrike">
-              <a:solidFill>
-                <a:srgbClr val="555555"/>
-              </a:solidFill>
-              <a:latin typeface="Noto Sans SC" panose="020B0200000000000000" charset="-122"/>
-              <a:ea typeface="Noto Sans SC" panose="020B0200000000000000" charset="-122"/>
-              <a:cs typeface="Noto Sans SC" panose="020B0200000000000000" charset="-122"/>
-              <a:sym typeface="Noto Sans SC" panose="020B0200000000000000" charset="-122"/>
-            </a:endParaRPr>
           </a:p>
         </p:txBody>
       </p:sp>
@@ -21950,6 +22093,7 @@
           <a:bodyPr wrap="square" rtlCol="0">
             <a:spAutoFit/>
           </a:bodyPr>
+          <a:lstStyle/>
           <a:p>
             <a:r>
               <a:rPr lang="zh-CN" altLang="en-US" sz="1800" b="1">
@@ -21961,29 +22105,8 @@
                 <a:cs typeface="Noto Sans SC" panose="020B0200000000000000" charset="-122"/>
                 <a:sym typeface="+mn-ea"/>
               </a:rPr>
-              <a:t>神经</a:t>
+              <a:t>神经网络</a:t>
             </a:r>
-            <a:r>
-              <a:rPr lang="zh-CN" altLang="en-US" sz="1800" b="1">
-                <a:solidFill>
-                  <a:srgbClr val="FF8C00"/>
-                </a:solidFill>
-                <a:latin typeface="Noto Sans SC" panose="020B0200000000000000" charset="-122"/>
-                <a:ea typeface="Noto Sans SC" panose="020B0200000000000000" charset="-122"/>
-                <a:cs typeface="Noto Sans SC" panose="020B0200000000000000" charset="-122"/>
-                <a:sym typeface="+mn-ea"/>
-              </a:rPr>
-              <a:t>网络</a:t>
-            </a:r>
-            <a:endParaRPr lang="zh-CN" altLang="en-US" sz="1800" b="1">
-              <a:solidFill>
-                <a:srgbClr val="FF8C00"/>
-              </a:solidFill>
-              <a:latin typeface="Noto Sans SC" panose="020B0200000000000000" charset="-122"/>
-              <a:ea typeface="Noto Sans SC" panose="020B0200000000000000" charset="-122"/>
-              <a:cs typeface="Noto Sans SC" panose="020B0200000000000000" charset="-122"/>
-              <a:sym typeface="+mn-ea"/>
-            </a:endParaRPr>
           </a:p>
         </p:txBody>
       </p:sp>
@@ -21996,7 +22119,7 @@
           <p:nvPr/>
         </p:nvPicPr>
         <p:blipFill>
-          <a:blip r:embed="rId6"/>
+          <a:blip r:embed="rId8"/>
           <a:stretch>
             <a:fillRect/>
           </a:stretch>
@@ -22025,7 +22148,7 @@
     <p:bg>
       <p:bgPr>
         <a:blipFill dpi="0" rotWithShape="1">
-          <a:blip r:embed="rId1"/>
+          <a:blip r:embed="rId4"/>
           <a:srcRect/>
           <a:stretch>
             <a:fillRect/>
@@ -22086,6 +22209,7 @@
             <a:pPr algn="ctr">
               <a:defRPr/>
             </a:pPr>
+            <a:endParaRPr/>
           </a:p>
         </p:txBody>
       </p:sp>
@@ -22189,7 +22313,7 @@
           <p:cNvSpPr/>
           <p:nvPr>
             <p:custDataLst>
-              <p:tags r:id="rId2"/>
+              <p:tags r:id="rId1"/>
             </p:custDataLst>
           </p:nvPr>
         </p:nvSpPr>
@@ -22254,15 +22378,6 @@
               </a:rPr>
               <a:t>进行交互式实践。每个概念均通过代码实现来验证，从张量创建到反向传播，从网络定义到训练流程，逐步贯通理论推导与工程落地，夯实后续模型开发的基础。</a:t>
             </a:r>
-            <a:endParaRPr lang="zh-CN" altLang="en-US" sz="1800" b="0" i="0" u="none" strike="noStrike">
-              <a:solidFill>
-                <a:srgbClr val="555555"/>
-              </a:solidFill>
-              <a:latin typeface="Noto Sans SC" panose="020B0200000000000000" charset="-122"/>
-              <a:ea typeface="Noto Sans SC" panose="020B0200000000000000" charset="-122"/>
-              <a:cs typeface="Noto Sans SC" panose="020B0200000000000000" charset="-122"/>
-              <a:sym typeface="Noto Sans SC" panose="020B0200000000000000" charset="-122"/>
-            </a:endParaRPr>
           </a:p>
         </p:txBody>
       </p:sp>
@@ -22275,7 +22390,7 @@
           <p:nvPr/>
         </p:nvPicPr>
         <p:blipFill>
-          <a:blip r:embed="rId3"/>
+          <a:blip r:embed="rId5"/>
           <a:stretch>
             <a:fillRect/>
           </a:stretch>
@@ -22299,7 +22414,7 @@
           <p:nvPr/>
         </p:nvPicPr>
         <p:blipFill>
-          <a:blip r:embed="rId4"/>
+          <a:blip r:embed="rId6"/>
           <a:stretch>
             <a:fillRect/>
           </a:stretch>
@@ -22328,7 +22443,7 @@
     <p:bg>
       <p:bgPr>
         <a:blipFill dpi="0" rotWithShape="1">
-          <a:blip r:embed="rId1"/>
+          <a:blip r:embed="rId3"/>
           <a:srcRect/>
           <a:stretch>
             <a:fillRect/>
@@ -22389,6 +22504,7 @@
             <a:pPr algn="ctr">
               <a:defRPr/>
             </a:pPr>
+            <a:endParaRPr/>
           </a:p>
         </p:txBody>
       </p:sp>
@@ -22401,7 +22517,7 @@
           <p:nvPr/>
         </p:nvPicPr>
         <p:blipFill>
-          <a:blip r:embed="rId2"/>
+          <a:blip r:embed="rId4"/>
           <a:stretch>
             <a:fillRect/>
           </a:stretch>
@@ -22425,7 +22541,7 @@
           <p:nvPr/>
         </p:nvPicPr>
         <p:blipFill>
-          <a:blip r:embed="rId3"/>
+          <a:blip r:embed="rId5"/>
           <a:stretch>
             <a:fillRect/>
           </a:stretch>
@@ -22449,7 +22565,7 @@
           <p:nvPr/>
         </p:nvPicPr>
         <p:blipFill>
-          <a:blip r:embed="rId4"/>
+          <a:blip r:embed="rId6"/>
           <a:stretch>
             <a:fillRect/>
           </a:stretch>
@@ -22473,7 +22589,7 @@
           <p:nvPr/>
         </p:nvPicPr>
         <p:blipFill>
-          <a:blip r:embed="rId5"/>
+          <a:blip r:embed="rId7"/>
           <a:stretch>
             <a:fillRect/>
           </a:stretch>
@@ -22502,7 +22618,7 @@
     <p:bg>
       <p:bgPr>
         <a:blipFill dpi="0" rotWithShape="1">
-          <a:blip r:embed="rId1"/>
+          <a:blip r:embed="rId3"/>
           <a:srcRect/>
           <a:stretch>
             <a:fillRect/>
@@ -22559,6 +22675,7 @@
             <a:pPr algn="ctr">
               <a:defRPr/>
             </a:pPr>
+            <a:endParaRPr/>
           </a:p>
         </p:txBody>
       </p:sp>
@@ -22647,6 +22764,7 @@
             <a:pPr algn="ctr">
               <a:defRPr/>
             </a:pPr>
+            <a:endParaRPr/>
           </a:p>
         </p:txBody>
       </p:sp>
@@ -22659,13 +22777,13 @@
           <p:nvPr/>
         </p:nvPicPr>
         <p:blipFill>
-          <a:blip r:embed="rId2">
+          <a:blip r:embed="rId4">
             <a:extLst>
               <a:ext uri="{28A0092B-C50C-407E-A947-70E740481C1C}">
                 <a14:useLocalDpi xmlns:a14="http://schemas.microsoft.com/office/drawing/2010/main" val="0"/>
               </a:ext>
               <a:ext uri="{96DAC541-7B7A-43D3-8B79-37D633B846F1}">
-                <asvg:svgBlip xmlns:asvg="http://schemas.microsoft.com/office/drawing/2016/SVG/main" r:embed="rId3"/>
+                <asvg:svgBlip xmlns:asvg="http://schemas.microsoft.com/office/drawing/2016/SVG/main" r:embed="rId5"/>
               </a:ext>
             </a:extLst>
           </a:blip>
@@ -22863,6 +22981,7 @@
             <a:pPr algn="ctr">
               <a:defRPr/>
             </a:pPr>
+            <a:endParaRPr/>
           </a:p>
         </p:txBody>
       </p:sp>
@@ -22875,13 +22994,13 @@
           <p:nvPr/>
         </p:nvPicPr>
         <p:blipFill>
-          <a:blip r:embed="rId4">
+          <a:blip r:embed="rId6">
             <a:extLst>
               <a:ext uri="{28A0092B-C50C-407E-A947-70E740481C1C}">
                 <a14:useLocalDpi xmlns:a14="http://schemas.microsoft.com/office/drawing/2010/main" val="0"/>
               </a:ext>
               <a:ext uri="{96DAC541-7B7A-43D3-8B79-37D633B846F1}">
-                <asvg:svgBlip xmlns:asvg="http://schemas.microsoft.com/office/drawing/2016/SVG/main" r:embed="rId5"/>
+                <asvg:svgBlip xmlns:asvg="http://schemas.microsoft.com/office/drawing/2016/SVG/main" r:embed="rId7"/>
               </a:ext>
             </a:extLst>
           </a:blip>
@@ -23031,6 +23150,7 @@
             <a:pPr algn="ctr">
               <a:defRPr/>
             </a:pPr>
+            <a:endParaRPr/>
           </a:p>
         </p:txBody>
       </p:sp>
@@ -23043,13 +23163,13 @@
           <p:nvPr/>
         </p:nvPicPr>
         <p:blipFill>
-          <a:blip r:embed="rId6">
+          <a:blip r:embed="rId8">
             <a:extLst>
               <a:ext uri="{28A0092B-C50C-407E-A947-70E740481C1C}">
                 <a14:useLocalDpi xmlns:a14="http://schemas.microsoft.com/office/drawing/2010/main" val="0"/>
               </a:ext>
               <a:ext uri="{96DAC541-7B7A-43D3-8B79-37D633B846F1}">
-                <asvg:svgBlip xmlns:asvg="http://schemas.microsoft.com/office/drawing/2016/SVG/main" r:embed="rId7"/>
+                <asvg:svgBlip xmlns:asvg="http://schemas.microsoft.com/office/drawing/2016/SVG/main" r:embed="rId9"/>
               </a:ext>
             </a:extLst>
           </a:blip>
@@ -23223,6 +23343,7 @@
             <a:pPr algn="ctr">
               <a:defRPr/>
             </a:pPr>
+            <a:endParaRPr/>
           </a:p>
         </p:txBody>
       </p:sp>
@@ -23260,6 +23381,7 @@
             <a:pPr algn="ctr">
               <a:defRPr/>
             </a:pPr>
+            <a:endParaRPr/>
           </a:p>
         </p:txBody>
       </p:sp>
@@ -23319,7 +23441,7 @@
           <p:nvPr/>
         </p:nvPicPr>
         <p:blipFill>
-          <a:blip r:embed="rId8"/>
+          <a:blip r:embed="rId10"/>
           <a:stretch>
             <a:fillRect/>
           </a:stretch>
@@ -23348,7 +23470,7 @@
     <p:bg>
       <p:bgPr>
         <a:blipFill dpi="0" rotWithShape="1">
-          <a:blip r:embed="rId1"/>
+          <a:blip r:embed="rId3"/>
           <a:srcRect/>
           <a:stretch>
             <a:fillRect/>
@@ -23409,6 +23531,7 @@
             <a:pPr algn="ctr">
               <a:defRPr/>
             </a:pPr>
+            <a:endParaRPr/>
           </a:p>
         </p:txBody>
       </p:sp>
@@ -23497,6 +23620,7 @@
             <a:pPr algn="ctr">
               <a:defRPr/>
             </a:pPr>
+            <a:endParaRPr/>
           </a:p>
         </p:txBody>
       </p:sp>
@@ -23556,13 +23680,13 @@
           <p:nvPr/>
         </p:nvPicPr>
         <p:blipFill>
-          <a:blip r:embed="rId2">
+          <a:blip r:embed="rId4">
             <a:extLst>
               <a:ext uri="{28A0092B-C50C-407E-A947-70E740481C1C}">
                 <a14:useLocalDpi xmlns:a14="http://schemas.microsoft.com/office/drawing/2010/main" val="0"/>
               </a:ext>
               <a:ext uri="{96DAC541-7B7A-43D3-8B79-37D633B846F1}">
-                <asvg:svgBlip xmlns:asvg="http://schemas.microsoft.com/office/drawing/2016/SVG/main" r:embed="rId3"/>
+                <asvg:svgBlip xmlns:asvg="http://schemas.microsoft.com/office/drawing/2016/SVG/main" r:embed="rId5"/>
               </a:ext>
             </a:extLst>
           </a:blip>
@@ -23659,13 +23783,13 @@
           <p:nvPr/>
         </p:nvPicPr>
         <p:blipFill>
-          <a:blip r:embed="rId4">
+          <a:blip r:embed="rId6">
             <a:extLst>
               <a:ext uri="{28A0092B-C50C-407E-A947-70E740481C1C}">
                 <a14:useLocalDpi xmlns:a14="http://schemas.microsoft.com/office/drawing/2010/main" val="0"/>
               </a:ext>
               <a:ext uri="{96DAC541-7B7A-43D3-8B79-37D633B846F1}">
-                <asvg:svgBlip xmlns:asvg="http://schemas.microsoft.com/office/drawing/2016/SVG/main" r:embed="rId5"/>
+                <asvg:svgBlip xmlns:asvg="http://schemas.microsoft.com/office/drawing/2016/SVG/main" r:embed="rId7"/>
               </a:ext>
             </a:extLst>
           </a:blip>
@@ -23762,13 +23886,13 @@
           <p:nvPr/>
         </p:nvPicPr>
         <p:blipFill>
-          <a:blip r:embed="rId6">
+          <a:blip r:embed="rId8">
             <a:extLst>
               <a:ext uri="{28A0092B-C50C-407E-A947-70E740481C1C}">
                 <a14:useLocalDpi xmlns:a14="http://schemas.microsoft.com/office/drawing/2010/main" val="0"/>
               </a:ext>
               <a:ext uri="{96DAC541-7B7A-43D3-8B79-37D633B846F1}">
-                <asvg:svgBlip xmlns:asvg="http://schemas.microsoft.com/office/drawing/2016/SVG/main" r:embed="rId7"/>
+                <asvg:svgBlip xmlns:asvg="http://schemas.microsoft.com/office/drawing/2016/SVG/main" r:embed="rId9"/>
               </a:ext>
             </a:extLst>
           </a:blip>
@@ -23865,13 +23989,13 @@
           <p:nvPr/>
         </p:nvPicPr>
         <p:blipFill>
-          <a:blip r:embed="rId8">
+          <a:blip r:embed="rId10">
             <a:extLst>
               <a:ext uri="{28A0092B-C50C-407E-A947-70E740481C1C}">
                 <a14:useLocalDpi xmlns:a14="http://schemas.microsoft.com/office/drawing/2010/main" val="0"/>
               </a:ext>
               <a:ext uri="{96DAC541-7B7A-43D3-8B79-37D633B846F1}">
-                <asvg:svgBlip xmlns:asvg="http://schemas.microsoft.com/office/drawing/2016/SVG/main" r:embed="rId9"/>
+                <asvg:svgBlip xmlns:asvg="http://schemas.microsoft.com/office/drawing/2016/SVG/main" r:embed="rId11"/>
               </a:ext>
             </a:extLst>
           </a:blip>
@@ -23921,7 +24045,7 @@
               <a:defRPr/>
             </a:pPr>
             <a:r>
-              <a:rPr lang="en-US" sz="1400" b="1" i="0" u="none" strike="noStrike">
+              <a:rPr lang="en-US" sz="1400" b="1" i="0" u="none" strike="noStrike" dirty="0" err="1">
                 <a:solidFill>
                   <a:srgbClr val="333333"/>
                 </a:solidFill>
@@ -23930,10 +24054,22 @@
                 <a:cs typeface="Noto Sans SC" panose="020B0200000000000000" charset="-122"/>
                 <a:sym typeface="Noto Sans SC" panose="020B0200000000000000" charset="-122"/>
               </a:rPr>
-              <a:t>总轮次: 20 Epochs</a:t>
+              <a:t>总轮次</a:t>
+            </a:r>
+            <a:r>
+              <a:rPr lang="en-US" sz="1400" b="1" i="0" u="none" strike="noStrike" dirty="0">
+                <a:solidFill>
+                  <a:srgbClr val="333333"/>
+                </a:solidFill>
+                <a:latin typeface="Noto Sans SC" panose="020B0200000000000000" charset="-122"/>
+                <a:ea typeface="Noto Sans SC" panose="020B0200000000000000" charset="-122"/>
+                <a:cs typeface="Noto Sans SC" panose="020B0200000000000000" charset="-122"/>
+                <a:sym typeface="Noto Sans SC" panose="020B0200000000000000" charset="-122"/>
+              </a:rPr>
+              <a:t>: 20 Epochs</a:t>
             </a:r>
             <a:br>
-              <a:rPr lang="en-US" sz="1600" b="0" i="0" u="none" strike="noStrike">
+              <a:rPr lang="en-US" sz="1600" b="0" i="0" u="none" strike="noStrike" dirty="0">
                 <a:solidFill>
                   <a:srgbClr val="1F2329"/>
                 </a:solidFill>
@@ -23944,6 +24080,18 @@
               </a:rPr>
             </a:br>
             <a:r>
+              <a:rPr lang="en-US" sz="1200" b="0" i="0" u="none" strike="noStrike" dirty="0">
+                <a:solidFill>
+                  <a:srgbClr val="666666"/>
+                </a:solidFill>
+                <a:latin typeface="Noto Sans SC" panose="020B0200000000000000" charset="-122"/>
+                <a:ea typeface="Noto Sans SC" panose="020B0200000000000000" charset="-122"/>
+                <a:cs typeface="Noto Sans SC" panose="020B0200000000000000" charset="-122"/>
+                <a:sym typeface="Noto Sans SC" panose="020B0200000000000000" charset="-122"/>
+              </a:rPr>
+              <a:t>单轮40s</a:t>
+            </a:r>
+            <a:r>
               <a:rPr lang="en-US" sz="1200" b="0" i="0" u="none" strike="noStrike">
                 <a:solidFill>
                   <a:srgbClr val="666666"/>
@@ -23953,9 +24101,9 @@
                 <a:cs typeface="Noto Sans SC" panose="020B0200000000000000" charset="-122"/>
                 <a:sym typeface="Noto Sans SC" panose="020B0200000000000000" charset="-122"/>
               </a:rPr>
-              <a:t>单轮40s，总计约8.5分钟</a:t>
+              <a:t>，总计约13分钟</a:t>
             </a:r>
-            <a:endParaRPr lang="en-US" sz="1100"/>
+            <a:endParaRPr lang="en-US" sz="1100" dirty="0"/>
           </a:p>
         </p:txBody>
       </p:sp>
@@ -23997,6 +24145,7 @@
             <a:pPr algn="ctr">
               <a:defRPr/>
             </a:pPr>
+            <a:endParaRPr/>
           </a:p>
         </p:txBody>
       </p:sp>
@@ -24056,13 +24205,13 @@
           <p:nvPr/>
         </p:nvPicPr>
         <p:blipFill>
-          <a:blip r:embed="rId10">
+          <a:blip r:embed="rId12">
             <a:extLst>
               <a:ext uri="{28A0092B-C50C-407E-A947-70E740481C1C}">
                 <a14:useLocalDpi xmlns:a14="http://schemas.microsoft.com/office/drawing/2010/main" val="0"/>
               </a:ext>
               <a:ext uri="{96DAC541-7B7A-43D3-8B79-37D633B846F1}">
-                <asvg:svgBlip xmlns:asvg="http://schemas.microsoft.com/office/drawing/2016/SVG/main" r:embed="rId11"/>
+                <asvg:svgBlip xmlns:asvg="http://schemas.microsoft.com/office/drawing/2016/SVG/main" r:embed="rId13"/>
               </a:ext>
             </a:extLst>
           </a:blip>
@@ -24159,13 +24308,13 @@
           <p:nvPr/>
         </p:nvPicPr>
         <p:blipFill>
-          <a:blip r:embed="rId12">
+          <a:blip r:embed="rId14">
             <a:extLst>
               <a:ext uri="{28A0092B-C50C-407E-A947-70E740481C1C}">
                 <a14:useLocalDpi xmlns:a14="http://schemas.microsoft.com/office/drawing/2010/main" val="0"/>
               </a:ext>
               <a:ext uri="{96DAC541-7B7A-43D3-8B79-37D633B846F1}">
-                <asvg:svgBlip xmlns:asvg="http://schemas.microsoft.com/office/drawing/2016/SVG/main" r:embed="rId13"/>
+                <asvg:svgBlip xmlns:asvg="http://schemas.microsoft.com/office/drawing/2016/SVG/main" r:embed="rId15"/>
               </a:ext>
             </a:extLst>
           </a:blip>
@@ -24291,6 +24440,7 @@
             <a:pPr algn="ctr">
               <a:defRPr/>
             </a:pPr>
+            <a:endParaRPr/>
           </a:p>
         </p:txBody>
       </p:sp>
@@ -24328,6 +24478,7 @@
             <a:pPr algn="ctr">
               <a:defRPr/>
             </a:pPr>
+            <a:endParaRPr/>
           </a:p>
         </p:txBody>
       </p:sp>
@@ -24387,7 +24538,7 @@
           <p:nvPr/>
         </p:nvPicPr>
         <p:blipFill>
-          <a:blip r:embed="rId14"/>
+          <a:blip r:embed="rId16"/>
           <a:stretch>
             <a:fillRect/>
           </a:stretch>
@@ -24416,7 +24567,7 @@
     <p:bg>
       <p:bgPr>
         <a:blipFill dpi="0" rotWithShape="1">
-          <a:blip r:embed="rId1"/>
+          <a:blip r:embed="rId3"/>
           <a:srcRect/>
           <a:stretch>
             <a:fillRect/>
@@ -24473,6 +24624,7 @@
             <a:pPr algn="ctr">
               <a:defRPr/>
             </a:pPr>
+            <a:endParaRPr/>
           </a:p>
         </p:txBody>
       </p:sp>
@@ -24561,6 +24713,7 @@
             <a:pPr algn="ctr">
               <a:defRPr/>
             </a:pPr>
+            <a:endParaRPr/>
           </a:p>
         </p:txBody>
       </p:sp>
@@ -24598,6 +24751,7 @@
             <a:pPr algn="ctr">
               <a:defRPr/>
             </a:pPr>
+            <a:endParaRPr/>
           </a:p>
         </p:txBody>
       </p:sp>
@@ -24723,15 +24877,6 @@
               </a:rPr>
               <a:t>模型学习效率符合预期</a:t>
             </a:r>
-            <a:endParaRPr lang="en-US" sz="1400" b="0" i="0" u="none" strike="noStrike">
-              <a:solidFill>
-                <a:srgbClr val="4B5563"/>
-              </a:solidFill>
-              <a:latin typeface="Noto Sans SC" panose="020B0200000000000000" charset="-122"/>
-              <a:ea typeface="Noto Sans SC" panose="020B0200000000000000" charset="-122"/>
-              <a:cs typeface="Noto Sans SC" panose="020B0200000000000000" charset="-122"/>
-              <a:sym typeface="Noto Sans SC" panose="020B0200000000000000" charset="-122"/>
-            </a:endParaRPr>
           </a:p>
         </p:txBody>
       </p:sp>
@@ -24769,6 +24914,7 @@
             <a:pPr algn="ctr">
               <a:defRPr/>
             </a:pPr>
+            <a:endParaRPr/>
           </a:p>
         </p:txBody>
       </p:sp>
@@ -24894,15 +25040,6 @@
               </a:rPr>
               <a:t>模型泛化能力逐步增强</a:t>
             </a:r>
-            <a:endParaRPr lang="en-US" sz="1400" b="0" i="0" u="none" strike="noStrike">
-              <a:solidFill>
-                <a:srgbClr val="4B5563"/>
-              </a:solidFill>
-              <a:latin typeface="Noto Sans SC" panose="020B0200000000000000" charset="-122"/>
-              <a:ea typeface="Noto Sans SC" panose="020B0200000000000000" charset="-122"/>
-              <a:cs typeface="Noto Sans SC" panose="020B0200000000000000" charset="-122"/>
-              <a:sym typeface="Noto Sans SC" panose="020B0200000000000000" charset="-122"/>
-            </a:endParaRPr>
           </a:p>
         </p:txBody>
       </p:sp>
@@ -24944,6 +25081,7 @@
             <a:pPr algn="ctr">
               <a:defRPr/>
             </a:pPr>
+            <a:endParaRPr/>
           </a:p>
         </p:txBody>
       </p:sp>
@@ -24956,13 +25094,13 @@
           <p:nvPr/>
         </p:nvPicPr>
         <p:blipFill>
-          <a:blip r:embed="rId2">
+          <a:blip r:embed="rId4">
             <a:extLst>
               <a:ext uri="{28A0092B-C50C-407E-A947-70E740481C1C}">
                 <a14:useLocalDpi xmlns:a14="http://schemas.microsoft.com/office/drawing/2010/main" val="0"/>
               </a:ext>
               <a:ext uri="{96DAC541-7B7A-43D3-8B79-37D633B846F1}">
-                <asvg:svgBlip xmlns:asvg="http://schemas.microsoft.com/office/drawing/2016/SVG/main" r:embed="rId3"/>
+                <asvg:svgBlip xmlns:asvg="http://schemas.microsoft.com/office/drawing/2016/SVG/main" r:embed="rId5"/>
               </a:ext>
             </a:extLst>
           </a:blip>
@@ -25055,15 +25193,6 @@
               </a:rPr>
               <a:t>(样本数: 1692 / 2007)</a:t>
             </a:r>
-            <a:endParaRPr lang="en-US" sz="1300" b="0" i="0" u="none" strike="noStrike">
-              <a:solidFill>
-                <a:srgbClr val="6B7280"/>
-              </a:solidFill>
-              <a:latin typeface="Noto Sans SC" panose="020B0200000000000000" charset="-122"/>
-              <a:ea typeface="Noto Sans SC" panose="020B0200000000000000" charset="-122"/>
-              <a:cs typeface="Noto Sans SC" panose="020B0200000000000000" charset="-122"/>
-              <a:sym typeface="Noto Sans SC" panose="020B0200000000000000" charset="-122"/>
-            </a:endParaRPr>
           </a:p>
         </p:txBody>
       </p:sp>
@@ -25105,6 +25234,7 @@
             <a:pPr algn="ctr">
               <a:defRPr/>
             </a:pPr>
+            <a:endParaRPr/>
           </a:p>
         </p:txBody>
       </p:sp>
@@ -25117,13 +25247,13 @@
           <p:nvPr/>
         </p:nvPicPr>
         <p:blipFill>
-          <a:blip r:embed="rId4">
+          <a:blip r:embed="rId6">
             <a:extLst>
               <a:ext uri="{28A0092B-C50C-407E-A947-70E740481C1C}">
                 <a14:useLocalDpi xmlns:a14="http://schemas.microsoft.com/office/drawing/2010/main" val="0"/>
               </a:ext>
               <a:ext uri="{96DAC541-7B7A-43D3-8B79-37D633B846F1}">
-                <asvg:svgBlip xmlns:asvg="http://schemas.microsoft.com/office/drawing/2016/SVG/main" r:embed="rId5"/>
+                <asvg:svgBlip xmlns:asvg="http://schemas.microsoft.com/office/drawing/2016/SVG/main" r:embed="rId7"/>
               </a:ext>
             </a:extLst>
           </a:blip>
@@ -25216,15 +25346,6 @@
               </a:rPr>
               <a:t>(样本数: 948 / 1003)</a:t>
             </a:r>
-            <a:endParaRPr lang="en-US" sz="1300" b="0" i="0" u="none" strike="noStrike">
-              <a:solidFill>
-                <a:srgbClr val="6B7280"/>
-              </a:solidFill>
-              <a:latin typeface="Noto Sans SC" panose="020B0200000000000000" charset="-122"/>
-              <a:ea typeface="Noto Sans SC" panose="020B0200000000000000" charset="-122"/>
-              <a:cs typeface="Noto Sans SC" panose="020B0200000000000000" charset="-122"/>
-              <a:sym typeface="Noto Sans SC" panose="020B0200000000000000" charset="-122"/>
-            </a:endParaRPr>
           </a:p>
         </p:txBody>
       </p:sp>
@@ -25266,6 +25387,7 @@
             <a:pPr algn="ctr">
               <a:defRPr/>
             </a:pPr>
+            <a:endParaRPr/>
           </a:p>
         </p:txBody>
       </p:sp>
@@ -25278,13 +25400,13 @@
           <p:nvPr/>
         </p:nvPicPr>
         <p:blipFill>
-          <a:blip r:embed="rId6">
+          <a:blip r:embed="rId8">
             <a:extLst>
               <a:ext uri="{28A0092B-C50C-407E-A947-70E740481C1C}">
                 <a14:useLocalDpi xmlns:a14="http://schemas.microsoft.com/office/drawing/2010/main" val="0"/>
               </a:ext>
               <a:ext uri="{96DAC541-7B7A-43D3-8B79-37D633B846F1}">
-                <asvg:svgBlip xmlns:asvg="http://schemas.microsoft.com/office/drawing/2016/SVG/main" r:embed="rId7"/>
+                <asvg:svgBlip xmlns:asvg="http://schemas.microsoft.com/office/drawing/2016/SVG/main" r:embed="rId9"/>
               </a:ext>
             </a:extLst>
           </a:blip>
@@ -25377,15 +25499,6 @@
               </a:rPr>
               <a:t>(样本数: 744 / 1004)</a:t>
             </a:r>
-            <a:endParaRPr lang="en-US" sz="1300" b="0" i="0" u="none" strike="noStrike">
-              <a:solidFill>
-                <a:srgbClr val="6B7280"/>
-              </a:solidFill>
-              <a:latin typeface="Noto Sans SC" panose="020B0200000000000000" charset="-122"/>
-              <a:ea typeface="Noto Sans SC" panose="020B0200000000000000" charset="-122"/>
-              <a:cs typeface="Noto Sans SC" panose="020B0200000000000000" charset="-122"/>
-              <a:sym typeface="Noto Sans SC" panose="020B0200000000000000" charset="-122"/>
-            </a:endParaRPr>
           </a:p>
         </p:txBody>
       </p:sp>
@@ -25398,7 +25511,7 @@
           <p:nvPr/>
         </p:nvPicPr>
         <p:blipFill>
-          <a:blip r:embed="rId8"/>
+          <a:blip r:embed="rId10"/>
           <a:stretch>
             <a:fillRect/>
           </a:stretch>
@@ -25427,7 +25540,7 @@
     <p:bg>
       <p:bgPr>
         <a:blipFill dpi="0" rotWithShape="1">
-          <a:blip r:embed="rId1"/>
+          <a:blip r:embed="rId15"/>
           <a:srcRect/>
           <a:stretch>
             <a:fillRect/>
@@ -25484,6 +25597,7 @@
             <a:pPr algn="ctr">
               <a:defRPr/>
             </a:pPr>
+            <a:endParaRPr/>
           </a:p>
         </p:txBody>
       </p:sp>
@@ -25572,6 +25686,7 @@
             <a:pPr algn="ctr">
               <a:defRPr/>
             </a:pPr>
+            <a:endParaRPr/>
           </a:p>
         </p:txBody>
       </p:sp>
@@ -25609,6 +25724,7 @@
             <a:pPr algn="ctr">
               <a:defRPr/>
             </a:pPr>
+            <a:endParaRPr/>
           </a:p>
         </p:txBody>
       </p:sp>
@@ -25744,6 +25860,7 @@
             <a:pPr algn="ctr">
               <a:defRPr/>
             </a:pPr>
+            <a:endParaRPr/>
           </a:p>
         </p:txBody>
       </p:sp>
@@ -25781,6 +25898,7 @@
             <a:pPr algn="ctr">
               <a:defRPr/>
             </a:pPr>
+            <a:endParaRPr/>
           </a:p>
         </p:txBody>
       </p:sp>
@@ -25916,6 +26034,7 @@
             <a:pPr algn="ctr">
               <a:defRPr/>
             </a:pPr>
+            <a:endParaRPr/>
           </a:p>
         </p:txBody>
       </p:sp>
@@ -25928,13 +26047,13 @@
           <p:nvPr/>
         </p:nvPicPr>
         <p:blipFill>
-          <a:blip r:embed="rId2">
+          <a:blip r:embed="rId16">
             <a:extLst>
               <a:ext uri="{28A0092B-C50C-407E-A947-70E740481C1C}">
                 <a14:useLocalDpi xmlns:a14="http://schemas.microsoft.com/office/drawing/2010/main" val="0"/>
               </a:ext>
               <a:ext uri="{96DAC541-7B7A-43D3-8B79-37D633B846F1}">
-                <asvg:svgBlip xmlns:asvg="http://schemas.microsoft.com/office/drawing/2016/SVG/main" r:embed="rId3"/>
+                <asvg:svgBlip xmlns:asvg="http://schemas.microsoft.com/office/drawing/2016/SVG/main" r:embed="rId17"/>
               </a:ext>
             </a:extLst>
           </a:blip>
@@ -26052,7 +26171,7 @@
           <p:cNvSpPr/>
           <p:nvPr>
             <p:custDataLst>
-              <p:tags r:id="rId4"/>
+              <p:tags r:id="rId1"/>
             </p:custDataLst>
           </p:nvPr>
         </p:nvSpPr>
@@ -26084,6 +26203,7 @@
             <a:pPr algn="ctr">
               <a:defRPr/>
             </a:pPr>
+            <a:endParaRPr/>
           </a:p>
         </p:txBody>
       </p:sp>
@@ -26095,367 +26215,7 @@
           </p:cNvPicPr>
           <p:nvPr>
             <p:custDataLst>
-              <p:tags r:id="rId5"/>
-            </p:custDataLst>
-          </p:nvPr>
-        </p:nvPicPr>
-        <p:blipFill>
-          <a:blip r:embed="rId6">
-            <a:extLst>
-              <a:ext uri="{28A0092B-C50C-407E-A947-70E740481C1C}">
-                <a14:useLocalDpi xmlns:a14="http://schemas.microsoft.com/office/drawing/2010/main" val="0"/>
-              </a:ext>
-              <a:ext uri="{96DAC541-7B7A-43D3-8B79-37D633B846F1}">
-                <asvg:svgBlip xmlns:asvg="http://schemas.microsoft.com/office/drawing/2016/SVG/main" r:embed="rId7"/>
-              </a:ext>
-            </a:extLst>
-          </a:blip>
-          <a:stretch>
-            <a:fillRect/>
-          </a:stretch>
-        </p:blipFill>
-        <p:spPr>
-          <a:xfrm>
-            <a:off x="6502400" y="4254500"/>
-            <a:ext cx="304800" cy="304800"/>
-          </a:xfrm>
-          <a:prstGeom prst="rect">
-            <a:avLst/>
-          </a:prstGeom>
-        </p:spPr>
-      </p:pic>
-      <p:sp>
-        <p:nvSpPr>
-          <p:cNvPr id="18" name="AutoShape 18"/>
-          <p:cNvSpPr/>
-          <p:nvPr>
-            <p:custDataLst>
-              <p:tags r:id="rId8"/>
-            </p:custDataLst>
-          </p:nvPr>
-        </p:nvSpPr>
-        <p:spPr>
-          <a:xfrm>
-            <a:off x="6502400" y="4699000"/>
-            <a:ext cx="1397000" cy="317500"/>
-          </a:xfrm>
-          <a:prstGeom prst="rect">
-            <a:avLst/>
-          </a:prstGeom>
-          <a:noFill/>
-          <a:ln w="12700" cap="flat" cmpd="sng">
-            <a:noFill/>
-            <a:prstDash val="solid"/>
-            <a:round/>
-          </a:ln>
-        </p:spPr>
-        <p:txBody>
-          <a:bodyPr vert="horz" wrap="square" lIns="0" tIns="0" rIns="0" bIns="0" rtlCol="0" anchor="ctr" anchorCtr="0"/>
-          <a:lstStyle/>
-          <a:p>
-            <a:pPr marL="0" indent="0" algn="l">
-              <a:lnSpc>
-                <a:spcPct val="125000"/>
-              </a:lnSpc>
-              <a:defRPr/>
-            </a:pPr>
-            <a:r>
-              <a:rPr lang="en-US" sz="1500" b="1" i="0" u="none" strike="noStrike">
-                <a:solidFill>
-                  <a:srgbClr val="333333"/>
-                </a:solidFill>
-                <a:latin typeface="Noto Sans SC" panose="020B0200000000000000" charset="-122"/>
-                <a:ea typeface="Noto Sans SC" panose="020B0200000000000000" charset="-122"/>
-                <a:cs typeface="Noto Sans SC" panose="020B0200000000000000" charset="-122"/>
-                <a:sym typeface="Noto Sans SC" panose="020B0200000000000000" charset="-122"/>
-              </a:rPr>
-              <a:t>增加训练轮数</a:t>
-            </a:r>
-            <a:endParaRPr lang="en-US" sz="1100"/>
-          </a:p>
-        </p:txBody>
-      </p:sp>
-      <p:sp>
-        <p:nvSpPr>
-          <p:cNvPr id="19" name="AutoShape 19"/>
-          <p:cNvSpPr/>
-          <p:nvPr>
-            <p:custDataLst>
-              <p:tags r:id="rId9"/>
-            </p:custDataLst>
-          </p:nvPr>
-        </p:nvSpPr>
-        <p:spPr>
-          <a:xfrm>
-            <a:off x="6502400" y="5143500"/>
-            <a:ext cx="1397000" cy="762000"/>
-          </a:xfrm>
-          <a:prstGeom prst="rect">
-            <a:avLst/>
-          </a:prstGeom>
-          <a:noFill/>
-          <a:ln w="12700" cap="flat" cmpd="sng">
-            <a:noFill/>
-            <a:prstDash val="solid"/>
-            <a:round/>
-          </a:ln>
-        </p:spPr>
-        <p:txBody>
-          <a:bodyPr vert="horz" wrap="square" lIns="0" tIns="0" rIns="0" bIns="0" rtlCol="0" anchor="ctr" anchorCtr="0"/>
-          <a:lstStyle/>
-          <a:p>
-            <a:pPr marL="0" indent="0" algn="l">
-              <a:lnSpc>
-                <a:spcPct val="108000"/>
-              </a:lnSpc>
-              <a:defRPr/>
-            </a:pPr>
-            <a:r>
-              <a:rPr lang="en-US" sz="1200" b="0" i="0" u="none" strike="noStrike">
-                <a:solidFill>
-                  <a:srgbClr val="666666"/>
-                </a:solidFill>
-                <a:latin typeface="Noto Sans SC" panose="020B0200000000000000" charset="-122"/>
-                <a:ea typeface="Noto Sans SC" panose="020B0200000000000000" charset="-122"/>
-                <a:cs typeface="Noto Sans SC" panose="020B0200000000000000" charset="-122"/>
-                <a:sym typeface="Noto Sans SC" panose="020B0200000000000000" charset="-122"/>
-              </a:rPr>
-              <a:t>延长训练周期，确保模型特征提取充分，减少因过早停止导致的欠拟合风险。</a:t>
-            </a:r>
-            <a:endParaRPr lang="en-US" sz="1100"/>
-          </a:p>
-        </p:txBody>
-      </p:sp>
-      <p:sp>
-        <p:nvSpPr>
-          <p:cNvPr id="20" name="AutoShape 20"/>
-          <p:cNvSpPr/>
-          <p:nvPr>
-            <p:custDataLst>
-              <p:tags r:id="rId10"/>
-            </p:custDataLst>
-          </p:nvPr>
-        </p:nvSpPr>
-        <p:spPr>
-          <a:xfrm>
-            <a:off x="8089900" y="4064000"/>
-            <a:ext cx="1600200" cy="2150745"/>
-          </a:xfrm>
-          <a:prstGeom prst="roundRect">
-            <a:avLst>
-              <a:gd name="adj" fmla="val 0"/>
-            </a:avLst>
-          </a:prstGeom>
-          <a:solidFill>
-            <a:srgbClr val="FF8C00">
-              <a:alpha val="8000"/>
-            </a:srgbClr>
-          </a:solidFill>
-          <a:ln w="25400" cap="flat" cmpd="sng">
-            <a:noFill/>
-            <a:prstDash val="solid"/>
-            <a:round/>
-          </a:ln>
-        </p:spPr>
-        <p:txBody>
-          <a:bodyPr vert="horz" wrap="square" lIns="63500" tIns="63500" rIns="63500" bIns="63500" rtlCol="0" anchor="ctr"/>
-          <a:lstStyle/>
-          <a:p>
-            <a:pPr algn="ctr">
-              <a:defRPr/>
-            </a:pPr>
-          </a:p>
-        </p:txBody>
-      </p:sp>
-      <p:pic>
-        <p:nvPicPr>
-          <p:cNvPr id="21" name="Picture 21"/>
-          <p:cNvPicPr>
-            <a:picLocks noChangeAspect="1"/>
-          </p:cNvPicPr>
-          <p:nvPr>
-            <p:custDataLst>
-              <p:tags r:id="rId11"/>
-            </p:custDataLst>
-          </p:nvPr>
-        </p:nvPicPr>
-        <p:blipFill>
-          <a:blip r:embed="rId12">
-            <a:extLst>
-              <a:ext uri="{28A0092B-C50C-407E-A947-70E740481C1C}">
-                <a14:useLocalDpi xmlns:a14="http://schemas.microsoft.com/office/drawing/2010/main" val="0"/>
-              </a:ext>
-              <a:ext uri="{96DAC541-7B7A-43D3-8B79-37D633B846F1}">
-                <asvg:svgBlip xmlns:asvg="http://schemas.microsoft.com/office/drawing/2016/SVG/main" r:embed="rId13"/>
-              </a:ext>
-            </a:extLst>
-          </a:blip>
-          <a:stretch>
-            <a:fillRect/>
-          </a:stretch>
-        </p:blipFill>
-        <p:spPr>
-          <a:xfrm>
-            <a:off x="8242300" y="4254500"/>
-            <a:ext cx="304800" cy="304800"/>
-          </a:xfrm>
-          <a:prstGeom prst="rect">
-            <a:avLst/>
-          </a:prstGeom>
-        </p:spPr>
-      </p:pic>
-      <p:sp>
-        <p:nvSpPr>
-          <p:cNvPr id="22" name="AutoShape 22"/>
-          <p:cNvSpPr/>
-          <p:nvPr>
-            <p:custDataLst>
-              <p:tags r:id="rId14"/>
-            </p:custDataLst>
-          </p:nvPr>
-        </p:nvSpPr>
-        <p:spPr>
-          <a:xfrm>
-            <a:off x="8242300" y="4699000"/>
-            <a:ext cx="1397000" cy="317500"/>
-          </a:xfrm>
-          <a:prstGeom prst="rect">
-            <a:avLst/>
-          </a:prstGeom>
-          <a:noFill/>
-          <a:ln w="12700" cap="flat" cmpd="sng">
-            <a:noFill/>
-            <a:prstDash val="solid"/>
-            <a:round/>
-          </a:ln>
-        </p:spPr>
-        <p:txBody>
-          <a:bodyPr vert="horz" wrap="square" lIns="0" tIns="0" rIns="0" bIns="0" rtlCol="0" anchor="ctr" anchorCtr="0"/>
-          <a:lstStyle/>
-          <a:p>
-            <a:pPr marL="0" indent="0" algn="l">
-              <a:lnSpc>
-                <a:spcPct val="125000"/>
-              </a:lnSpc>
-              <a:defRPr/>
-            </a:pPr>
-            <a:r>
-              <a:rPr lang="en-US" sz="1500" b="1" i="0" u="none" strike="noStrike">
-                <a:solidFill>
-                  <a:srgbClr val="333333"/>
-                </a:solidFill>
-                <a:latin typeface="Noto Sans SC" panose="020B0200000000000000" charset="-122"/>
-                <a:ea typeface="Noto Sans SC" panose="020B0200000000000000" charset="-122"/>
-                <a:cs typeface="Noto Sans SC" panose="020B0200000000000000" charset="-122"/>
-                <a:sym typeface="Noto Sans SC" panose="020B0200000000000000" charset="-122"/>
-              </a:rPr>
-              <a:t>升级网络架构</a:t>
-            </a:r>
-            <a:endParaRPr lang="en-US" sz="1100"/>
-          </a:p>
-        </p:txBody>
-      </p:sp>
-      <p:sp>
-        <p:nvSpPr>
-          <p:cNvPr id="23" name="AutoShape 23"/>
-          <p:cNvSpPr/>
-          <p:nvPr>
-            <p:custDataLst>
-              <p:tags r:id="rId15"/>
-            </p:custDataLst>
-          </p:nvPr>
-        </p:nvSpPr>
-        <p:spPr>
-          <a:xfrm>
-            <a:off x="8242300" y="5143500"/>
-            <a:ext cx="1397000" cy="762000"/>
-          </a:xfrm>
-          <a:prstGeom prst="rect">
-            <a:avLst/>
-          </a:prstGeom>
-          <a:noFill/>
-          <a:ln w="12700" cap="flat" cmpd="sng">
-            <a:noFill/>
-            <a:prstDash val="solid"/>
-            <a:round/>
-          </a:ln>
-        </p:spPr>
-        <p:txBody>
-          <a:bodyPr vert="horz" wrap="square" lIns="0" tIns="0" rIns="0" bIns="0" rtlCol="0" anchor="ctr" anchorCtr="0"/>
-          <a:lstStyle/>
-          <a:p>
-            <a:pPr marL="0" indent="0" algn="l">
-              <a:lnSpc>
-                <a:spcPct val="108000"/>
-              </a:lnSpc>
-              <a:defRPr/>
-            </a:pPr>
-            <a:r>
-              <a:rPr lang="en-US" sz="1200" b="0" i="0" u="none" strike="noStrike">
-                <a:solidFill>
-                  <a:srgbClr val="666666"/>
-                </a:solidFill>
-                <a:latin typeface="Noto Sans SC" panose="020B0200000000000000" charset="-122"/>
-                <a:ea typeface="Noto Sans SC" panose="020B0200000000000000" charset="-122"/>
-                <a:cs typeface="Noto Sans SC" panose="020B0200000000000000" charset="-122"/>
-                <a:sym typeface="Noto Sans SC" panose="020B0200000000000000" charset="-122"/>
-              </a:rPr>
-              <a:t>引入ResNet等深层网络或迁移学习，提升模型对复杂特征的捕捉能力。</a:t>
-            </a:r>
-            <a:endParaRPr lang="en-US" sz="1100"/>
-          </a:p>
-        </p:txBody>
-      </p:sp>
-      <p:sp>
-        <p:nvSpPr>
-          <p:cNvPr id="24" name="AutoShape 24"/>
-          <p:cNvSpPr/>
-          <p:nvPr>
-            <p:custDataLst>
-              <p:tags r:id="rId16"/>
-            </p:custDataLst>
-          </p:nvPr>
-        </p:nvSpPr>
-        <p:spPr>
-          <a:xfrm>
-            <a:off x="9779000" y="4063365"/>
-            <a:ext cx="1600200" cy="2151380"/>
-          </a:xfrm>
-          <a:prstGeom prst="roundRect">
-            <a:avLst>
-              <a:gd name="adj" fmla="val 0"/>
-            </a:avLst>
-          </a:prstGeom>
-          <a:solidFill>
-            <a:srgbClr val="FF8C00">
-              <a:alpha val="8000"/>
-            </a:srgbClr>
-          </a:solidFill>
-          <a:ln w="25400" cap="flat" cmpd="sng">
-            <a:noFill/>
-            <a:prstDash val="solid"/>
-            <a:round/>
-          </a:ln>
-        </p:spPr>
-        <p:txBody>
-          <a:bodyPr vert="horz" wrap="square" lIns="63500" tIns="63500" rIns="63500" bIns="63500" rtlCol="0" anchor="ctr"/>
-          <a:lstStyle/>
-          <a:p>
-            <a:pPr algn="ctr">
-              <a:defRPr/>
-            </a:pPr>
-          </a:p>
-        </p:txBody>
-      </p:sp>
-      <p:pic>
-        <p:nvPicPr>
-          <p:cNvPr id="25" name="Picture 25"/>
-          <p:cNvPicPr>
-            <a:picLocks noChangeAspect="1"/>
-          </p:cNvPicPr>
-          <p:nvPr>
-            <p:custDataLst>
-              <p:tags r:id="rId17"/>
+              <p:tags r:id="rId2"/>
             </p:custDataLst>
           </p:nvPr>
         </p:nvPicPr>
@@ -26476,6 +26236,368 @@
         </p:blipFill>
         <p:spPr>
           <a:xfrm>
+            <a:off x="6502400" y="4254500"/>
+            <a:ext cx="304800" cy="304800"/>
+          </a:xfrm>
+          <a:prstGeom prst="rect">
+            <a:avLst/>
+          </a:prstGeom>
+        </p:spPr>
+      </p:pic>
+      <p:sp>
+        <p:nvSpPr>
+          <p:cNvPr id="18" name="AutoShape 18"/>
+          <p:cNvSpPr/>
+          <p:nvPr>
+            <p:custDataLst>
+              <p:tags r:id="rId3"/>
+            </p:custDataLst>
+          </p:nvPr>
+        </p:nvSpPr>
+        <p:spPr>
+          <a:xfrm>
+            <a:off x="6502400" y="4699000"/>
+            <a:ext cx="1397000" cy="317500"/>
+          </a:xfrm>
+          <a:prstGeom prst="rect">
+            <a:avLst/>
+          </a:prstGeom>
+          <a:noFill/>
+          <a:ln w="12700" cap="flat" cmpd="sng">
+            <a:noFill/>
+            <a:prstDash val="solid"/>
+            <a:round/>
+          </a:ln>
+        </p:spPr>
+        <p:txBody>
+          <a:bodyPr vert="horz" wrap="square" lIns="0" tIns="0" rIns="0" bIns="0" rtlCol="0" anchor="ctr" anchorCtr="0"/>
+          <a:lstStyle/>
+          <a:p>
+            <a:pPr marL="0" indent="0" algn="l">
+              <a:lnSpc>
+                <a:spcPct val="125000"/>
+              </a:lnSpc>
+              <a:defRPr/>
+            </a:pPr>
+            <a:r>
+              <a:rPr lang="en-US" sz="1500" b="1" i="0" u="none" strike="noStrike">
+                <a:solidFill>
+                  <a:srgbClr val="333333"/>
+                </a:solidFill>
+                <a:latin typeface="Noto Sans SC" panose="020B0200000000000000" charset="-122"/>
+                <a:ea typeface="Noto Sans SC" panose="020B0200000000000000" charset="-122"/>
+                <a:cs typeface="Noto Sans SC" panose="020B0200000000000000" charset="-122"/>
+                <a:sym typeface="Noto Sans SC" panose="020B0200000000000000" charset="-122"/>
+              </a:rPr>
+              <a:t>增加训练轮数</a:t>
+            </a:r>
+            <a:endParaRPr lang="en-US" sz="1100"/>
+          </a:p>
+        </p:txBody>
+      </p:sp>
+      <p:sp>
+        <p:nvSpPr>
+          <p:cNvPr id="19" name="AutoShape 19"/>
+          <p:cNvSpPr/>
+          <p:nvPr>
+            <p:custDataLst>
+              <p:tags r:id="rId4"/>
+            </p:custDataLst>
+          </p:nvPr>
+        </p:nvSpPr>
+        <p:spPr>
+          <a:xfrm>
+            <a:off x="6502400" y="5143500"/>
+            <a:ext cx="1397000" cy="762000"/>
+          </a:xfrm>
+          <a:prstGeom prst="rect">
+            <a:avLst/>
+          </a:prstGeom>
+          <a:noFill/>
+          <a:ln w="12700" cap="flat" cmpd="sng">
+            <a:noFill/>
+            <a:prstDash val="solid"/>
+            <a:round/>
+          </a:ln>
+        </p:spPr>
+        <p:txBody>
+          <a:bodyPr vert="horz" wrap="square" lIns="0" tIns="0" rIns="0" bIns="0" rtlCol="0" anchor="ctr" anchorCtr="0"/>
+          <a:lstStyle/>
+          <a:p>
+            <a:pPr marL="0" indent="0" algn="l">
+              <a:lnSpc>
+                <a:spcPct val="108000"/>
+              </a:lnSpc>
+              <a:defRPr/>
+            </a:pPr>
+            <a:r>
+              <a:rPr lang="en-US" sz="1200" b="0" i="0" u="none" strike="noStrike">
+                <a:solidFill>
+                  <a:srgbClr val="666666"/>
+                </a:solidFill>
+                <a:latin typeface="Noto Sans SC" panose="020B0200000000000000" charset="-122"/>
+                <a:ea typeface="Noto Sans SC" panose="020B0200000000000000" charset="-122"/>
+                <a:cs typeface="Noto Sans SC" panose="020B0200000000000000" charset="-122"/>
+                <a:sym typeface="Noto Sans SC" panose="020B0200000000000000" charset="-122"/>
+              </a:rPr>
+              <a:t>延长训练周期，确保模型特征提取充分，减少因过早停止导致的欠拟合风险。</a:t>
+            </a:r>
+            <a:endParaRPr lang="en-US" sz="1100"/>
+          </a:p>
+        </p:txBody>
+      </p:sp>
+      <p:sp>
+        <p:nvSpPr>
+          <p:cNvPr id="20" name="AutoShape 20"/>
+          <p:cNvSpPr/>
+          <p:nvPr>
+            <p:custDataLst>
+              <p:tags r:id="rId5"/>
+            </p:custDataLst>
+          </p:nvPr>
+        </p:nvSpPr>
+        <p:spPr>
+          <a:xfrm>
+            <a:off x="8089900" y="4064000"/>
+            <a:ext cx="1600200" cy="2150745"/>
+          </a:xfrm>
+          <a:prstGeom prst="roundRect">
+            <a:avLst>
+              <a:gd name="adj" fmla="val 0"/>
+            </a:avLst>
+          </a:prstGeom>
+          <a:solidFill>
+            <a:srgbClr val="FF8C00">
+              <a:alpha val="8000"/>
+            </a:srgbClr>
+          </a:solidFill>
+          <a:ln w="25400" cap="flat" cmpd="sng">
+            <a:noFill/>
+            <a:prstDash val="solid"/>
+            <a:round/>
+          </a:ln>
+        </p:spPr>
+        <p:txBody>
+          <a:bodyPr vert="horz" wrap="square" lIns="63500" tIns="63500" rIns="63500" bIns="63500" rtlCol="0" anchor="ctr"/>
+          <a:lstStyle/>
+          <a:p>
+            <a:pPr algn="ctr">
+              <a:defRPr/>
+            </a:pPr>
+            <a:endParaRPr/>
+          </a:p>
+        </p:txBody>
+      </p:sp>
+      <p:pic>
+        <p:nvPicPr>
+          <p:cNvPr id="21" name="Picture 21"/>
+          <p:cNvPicPr>
+            <a:picLocks noChangeAspect="1"/>
+          </p:cNvPicPr>
+          <p:nvPr>
+            <p:custDataLst>
+              <p:tags r:id="rId6"/>
+            </p:custDataLst>
+          </p:nvPr>
+        </p:nvPicPr>
+        <p:blipFill>
+          <a:blip r:embed="rId20">
+            <a:extLst>
+              <a:ext uri="{28A0092B-C50C-407E-A947-70E740481C1C}">
+                <a14:useLocalDpi xmlns:a14="http://schemas.microsoft.com/office/drawing/2010/main" val="0"/>
+              </a:ext>
+              <a:ext uri="{96DAC541-7B7A-43D3-8B79-37D633B846F1}">
+                <asvg:svgBlip xmlns:asvg="http://schemas.microsoft.com/office/drawing/2016/SVG/main" r:embed="rId21"/>
+              </a:ext>
+            </a:extLst>
+          </a:blip>
+          <a:stretch>
+            <a:fillRect/>
+          </a:stretch>
+        </p:blipFill>
+        <p:spPr>
+          <a:xfrm>
+            <a:off x="8242300" y="4254500"/>
+            <a:ext cx="304800" cy="304800"/>
+          </a:xfrm>
+          <a:prstGeom prst="rect">
+            <a:avLst/>
+          </a:prstGeom>
+        </p:spPr>
+      </p:pic>
+      <p:sp>
+        <p:nvSpPr>
+          <p:cNvPr id="22" name="AutoShape 22"/>
+          <p:cNvSpPr/>
+          <p:nvPr>
+            <p:custDataLst>
+              <p:tags r:id="rId7"/>
+            </p:custDataLst>
+          </p:nvPr>
+        </p:nvSpPr>
+        <p:spPr>
+          <a:xfrm>
+            <a:off x="8242300" y="4699000"/>
+            <a:ext cx="1397000" cy="317500"/>
+          </a:xfrm>
+          <a:prstGeom prst="rect">
+            <a:avLst/>
+          </a:prstGeom>
+          <a:noFill/>
+          <a:ln w="12700" cap="flat" cmpd="sng">
+            <a:noFill/>
+            <a:prstDash val="solid"/>
+            <a:round/>
+          </a:ln>
+        </p:spPr>
+        <p:txBody>
+          <a:bodyPr vert="horz" wrap="square" lIns="0" tIns="0" rIns="0" bIns="0" rtlCol="0" anchor="ctr" anchorCtr="0"/>
+          <a:lstStyle/>
+          <a:p>
+            <a:pPr marL="0" indent="0" algn="l">
+              <a:lnSpc>
+                <a:spcPct val="125000"/>
+              </a:lnSpc>
+              <a:defRPr/>
+            </a:pPr>
+            <a:r>
+              <a:rPr lang="en-US" sz="1500" b="1" i="0" u="none" strike="noStrike">
+                <a:solidFill>
+                  <a:srgbClr val="333333"/>
+                </a:solidFill>
+                <a:latin typeface="Noto Sans SC" panose="020B0200000000000000" charset="-122"/>
+                <a:ea typeface="Noto Sans SC" panose="020B0200000000000000" charset="-122"/>
+                <a:cs typeface="Noto Sans SC" panose="020B0200000000000000" charset="-122"/>
+                <a:sym typeface="Noto Sans SC" panose="020B0200000000000000" charset="-122"/>
+              </a:rPr>
+              <a:t>升级网络架构</a:t>
+            </a:r>
+            <a:endParaRPr lang="en-US" sz="1100"/>
+          </a:p>
+        </p:txBody>
+      </p:sp>
+      <p:sp>
+        <p:nvSpPr>
+          <p:cNvPr id="23" name="AutoShape 23"/>
+          <p:cNvSpPr/>
+          <p:nvPr>
+            <p:custDataLst>
+              <p:tags r:id="rId8"/>
+            </p:custDataLst>
+          </p:nvPr>
+        </p:nvSpPr>
+        <p:spPr>
+          <a:xfrm>
+            <a:off x="8242300" y="5143500"/>
+            <a:ext cx="1397000" cy="762000"/>
+          </a:xfrm>
+          <a:prstGeom prst="rect">
+            <a:avLst/>
+          </a:prstGeom>
+          <a:noFill/>
+          <a:ln w="12700" cap="flat" cmpd="sng">
+            <a:noFill/>
+            <a:prstDash val="solid"/>
+            <a:round/>
+          </a:ln>
+        </p:spPr>
+        <p:txBody>
+          <a:bodyPr vert="horz" wrap="square" lIns="0" tIns="0" rIns="0" bIns="0" rtlCol="0" anchor="ctr" anchorCtr="0"/>
+          <a:lstStyle/>
+          <a:p>
+            <a:pPr marL="0" indent="0" algn="l">
+              <a:lnSpc>
+                <a:spcPct val="108000"/>
+              </a:lnSpc>
+              <a:defRPr/>
+            </a:pPr>
+            <a:r>
+              <a:rPr lang="en-US" sz="1200" b="0" i="0" u="none" strike="noStrike">
+                <a:solidFill>
+                  <a:srgbClr val="666666"/>
+                </a:solidFill>
+                <a:latin typeface="Noto Sans SC" panose="020B0200000000000000" charset="-122"/>
+                <a:ea typeface="Noto Sans SC" panose="020B0200000000000000" charset="-122"/>
+                <a:cs typeface="Noto Sans SC" panose="020B0200000000000000" charset="-122"/>
+                <a:sym typeface="Noto Sans SC" panose="020B0200000000000000" charset="-122"/>
+              </a:rPr>
+              <a:t>引入ResNet等深层网络或迁移学习，提升模型对复杂特征的捕捉能力。</a:t>
+            </a:r>
+            <a:endParaRPr lang="en-US" sz="1100"/>
+          </a:p>
+        </p:txBody>
+      </p:sp>
+      <p:sp>
+        <p:nvSpPr>
+          <p:cNvPr id="24" name="AutoShape 24"/>
+          <p:cNvSpPr/>
+          <p:nvPr>
+            <p:custDataLst>
+              <p:tags r:id="rId9"/>
+            </p:custDataLst>
+          </p:nvPr>
+        </p:nvSpPr>
+        <p:spPr>
+          <a:xfrm>
+            <a:off x="9779000" y="4063365"/>
+            <a:ext cx="1600200" cy="2151380"/>
+          </a:xfrm>
+          <a:prstGeom prst="roundRect">
+            <a:avLst>
+              <a:gd name="adj" fmla="val 0"/>
+            </a:avLst>
+          </a:prstGeom>
+          <a:solidFill>
+            <a:srgbClr val="FF8C00">
+              <a:alpha val="8000"/>
+            </a:srgbClr>
+          </a:solidFill>
+          <a:ln w="25400" cap="flat" cmpd="sng">
+            <a:noFill/>
+            <a:prstDash val="solid"/>
+            <a:round/>
+          </a:ln>
+        </p:spPr>
+        <p:txBody>
+          <a:bodyPr vert="horz" wrap="square" lIns="63500" tIns="63500" rIns="63500" bIns="63500" rtlCol="0" anchor="ctr"/>
+          <a:lstStyle/>
+          <a:p>
+            <a:pPr algn="ctr">
+              <a:defRPr/>
+            </a:pPr>
+            <a:endParaRPr/>
+          </a:p>
+        </p:txBody>
+      </p:sp>
+      <p:pic>
+        <p:nvPicPr>
+          <p:cNvPr id="25" name="Picture 25"/>
+          <p:cNvPicPr>
+            <a:picLocks noChangeAspect="1"/>
+          </p:cNvPicPr>
+          <p:nvPr>
+            <p:custDataLst>
+              <p:tags r:id="rId10"/>
+            </p:custDataLst>
+          </p:nvPr>
+        </p:nvPicPr>
+        <p:blipFill>
+          <a:blip r:embed="rId22">
+            <a:extLst>
+              <a:ext uri="{28A0092B-C50C-407E-A947-70E740481C1C}">
+                <a14:useLocalDpi xmlns:a14="http://schemas.microsoft.com/office/drawing/2010/main" val="0"/>
+              </a:ext>
+              <a:ext uri="{96DAC541-7B7A-43D3-8B79-37D633B846F1}">
+                <asvg:svgBlip xmlns:asvg="http://schemas.microsoft.com/office/drawing/2016/SVG/main" r:embed="rId23"/>
+              </a:ext>
+            </a:extLst>
+          </a:blip>
+          <a:stretch>
+            <a:fillRect/>
+          </a:stretch>
+        </p:blipFill>
+        <p:spPr>
+          <a:xfrm>
             <a:off x="9982200" y="4254500"/>
             <a:ext cx="304800" cy="304800"/>
           </a:xfrm>
@@ -26490,7 +26612,7 @@
           <p:cNvSpPr/>
           <p:nvPr>
             <p:custDataLst>
-              <p:tags r:id="rId20"/>
+              <p:tags r:id="rId11"/>
             </p:custDataLst>
           </p:nvPr>
         </p:nvSpPr>
@@ -26541,7 +26663,7 @@
           <p:cNvSpPr/>
           <p:nvPr>
             <p:custDataLst>
-              <p:tags r:id="rId21"/>
+              <p:tags r:id="rId12"/>
             </p:custDataLst>
           </p:nvPr>
         </p:nvSpPr>
@@ -26600,7 +26722,7 @@
     <p:bg>
       <p:bgPr>
         <a:blipFill dpi="0" rotWithShape="1">
-          <a:blip r:embed="rId1"/>
+          <a:blip r:embed="rId11"/>
           <a:srcRect/>
           <a:stretch>
             <a:fillRect/>
@@ -26657,6 +26779,7 @@
             <a:pPr algn="ctr">
               <a:defRPr/>
             </a:pPr>
+            <a:endParaRPr/>
           </a:p>
         </p:txBody>
       </p:sp>
@@ -26713,7 +26836,7 @@
           <p:cNvSpPr/>
           <p:nvPr>
             <p:custDataLst>
-              <p:tags r:id="rId2"/>
+              <p:tags r:id="rId1"/>
             </p:custDataLst>
           </p:nvPr>
         </p:nvSpPr>
@@ -26749,6 +26872,7 @@
             <a:pPr algn="ctr">
               <a:defRPr/>
             </a:pPr>
+            <a:endParaRPr/>
           </a:p>
         </p:txBody>
       </p:sp>
@@ -26758,7 +26882,7 @@
           <p:cNvSpPr/>
           <p:nvPr>
             <p:custDataLst>
-              <p:tags r:id="rId3"/>
+              <p:tags r:id="rId2"/>
             </p:custDataLst>
           </p:nvPr>
         </p:nvSpPr>
@@ -26790,6 +26914,7 @@
             <a:pPr algn="ctr">
               <a:defRPr/>
             </a:pPr>
+            <a:endParaRPr/>
           </a:p>
         </p:txBody>
       </p:sp>
@@ -26799,7 +26924,7 @@
           <p:cNvSpPr/>
           <p:nvPr>
             <p:custDataLst>
-              <p:tags r:id="rId4"/>
+              <p:tags r:id="rId3"/>
             </p:custDataLst>
           </p:nvPr>
         </p:nvSpPr>
@@ -26850,7 +26975,7 @@
           <p:cNvSpPr/>
           <p:nvPr>
             <p:custDataLst>
-              <p:tags r:id="rId5"/>
+              <p:tags r:id="rId4"/>
             </p:custDataLst>
           </p:nvPr>
         </p:nvSpPr>
@@ -26959,15 +27084,6 @@
               </a:rPr>
               <a:t>纯手写网络结构，拒绝黑盒调用，每一层逻辑清晰可解释。</a:t>
             </a:r>
-            <a:endParaRPr lang="en-US" sz="1400" b="0" i="0" u="none" strike="noStrike">
-              <a:solidFill>
-                <a:srgbClr val="555555"/>
-              </a:solidFill>
-              <a:latin typeface="Noto Sans SC" panose="020B0200000000000000" charset="-122"/>
-              <a:ea typeface="Noto Sans SC" panose="020B0200000000000000" charset="-122"/>
-              <a:cs typeface="Noto Sans SC" panose="020B0200000000000000" charset="-122"/>
-              <a:sym typeface="Noto Sans SC" panose="020B0200000000000000" charset="-122"/>
-            </a:endParaRPr>
           </a:p>
           <a:p>
             <a:pPr marL="0" indent="0" algn="l">
@@ -27011,15 +27127,6 @@
               </a:rPr>
               <a:t>完善随机种子、结果可视化等细节；严格遵循Git Flow协作规范。</a:t>
             </a:r>
-            <a:endParaRPr lang="en-US" sz="1400" b="0" i="0" u="none" strike="noStrike">
-              <a:solidFill>
-                <a:srgbClr val="555555"/>
-              </a:solidFill>
-              <a:latin typeface="Noto Sans SC" panose="020B0200000000000000" charset="-122"/>
-              <a:ea typeface="Noto Sans SC" panose="020B0200000000000000" charset="-122"/>
-              <a:cs typeface="Noto Sans SC" panose="020B0200000000000000" charset="-122"/>
-              <a:sym typeface="Noto Sans SC" panose="020B0200000000000000" charset="-122"/>
-            </a:endParaRPr>
           </a:p>
         </p:txBody>
       </p:sp>
@@ -27029,7 +27136,7 @@
           <p:cNvSpPr/>
           <p:nvPr>
             <p:custDataLst>
-              <p:tags r:id="rId6"/>
+              <p:tags r:id="rId5"/>
             </p:custDataLst>
           </p:nvPr>
         </p:nvSpPr>
@@ -27065,6 +27172,7 @@
             <a:pPr algn="ctr">
               <a:defRPr/>
             </a:pPr>
+            <a:endParaRPr/>
           </a:p>
         </p:txBody>
       </p:sp>
@@ -27074,7 +27182,7 @@
           <p:cNvSpPr/>
           <p:nvPr>
             <p:custDataLst>
-              <p:tags r:id="rId7"/>
+              <p:tags r:id="rId6"/>
             </p:custDataLst>
           </p:nvPr>
         </p:nvSpPr>
@@ -27106,6 +27214,7 @@
             <a:pPr algn="ctr">
               <a:defRPr/>
             </a:pPr>
+            <a:endParaRPr/>
           </a:p>
         </p:txBody>
       </p:sp>
@@ -27115,7 +27224,7 @@
           <p:cNvSpPr/>
           <p:nvPr>
             <p:custDataLst>
-              <p:tags r:id="rId8"/>
+              <p:tags r:id="rId7"/>
             </p:custDataLst>
           </p:nvPr>
         </p:nvSpPr>
@@ -27166,7 +27275,7 @@
           <p:cNvSpPr/>
           <p:nvPr>
             <p:custDataLst>
-              <p:tags r:id="rId9"/>
+              <p:tags r:id="rId8"/>
             </p:custDataLst>
           </p:nvPr>
         </p:nvSpPr>
@@ -27275,15 +27384,6 @@
               </a:rPr>
               <a:t>跳出单一指标陷阱，学会关注类别差异与模型的实际鲁棒性。</a:t>
             </a:r>
-            <a:endParaRPr lang="en-US" sz="1400" b="0" i="0" u="none" strike="noStrike">
-              <a:solidFill>
-                <a:srgbClr val="555555"/>
-              </a:solidFill>
-              <a:latin typeface="Noto Sans SC" panose="020B0200000000000000" charset="-122"/>
-              <a:ea typeface="Noto Sans SC" panose="020B0200000000000000" charset="-122"/>
-              <a:cs typeface="Noto Sans SC" panose="020B0200000000000000" charset="-122"/>
-              <a:sym typeface="Noto Sans SC" panose="020B0200000000000000" charset="-122"/>
-            </a:endParaRPr>
           </a:p>
           <a:p>
             <a:pPr marL="0" indent="0" algn="l">
@@ -27327,15 +27427,6 @@
               </a:rPr>
               <a:t>深刻体会到规范的版本管理与沟通是高效团队研发的关键保障。</a:t>
             </a:r>
-            <a:endParaRPr lang="en-US" sz="1400" b="0" i="0" u="none" strike="noStrike">
-              <a:solidFill>
-                <a:srgbClr val="555555"/>
-              </a:solidFill>
-              <a:latin typeface="Noto Sans SC" panose="020B0200000000000000" charset="-122"/>
-              <a:ea typeface="Noto Sans SC" panose="020B0200000000000000" charset="-122"/>
-              <a:cs typeface="Noto Sans SC" panose="020B0200000000000000" charset="-122"/>
-              <a:sym typeface="Noto Sans SC" panose="020B0200000000000000" charset="-122"/>
-            </a:endParaRPr>
           </a:p>
         </p:txBody>
       </p:sp>
@@ -27348,7 +27439,7 @@
           <p:nvPr/>
         </p:nvPicPr>
         <p:blipFill>
-          <a:blip r:embed="rId10"/>
+          <a:blip r:embed="rId12"/>
           <a:srcRect l="104" r="104"/>
           <a:stretch>
             <a:fillRect/>
@@ -27413,6 +27504,7 @@
             <a:pPr algn="ctr">
               <a:defRPr/>
             </a:pPr>
+            <a:endParaRPr/>
           </a:p>
         </p:txBody>
       </p:sp>
@@ -27477,7 +27569,7 @@
     <p:bg>
       <p:bgPr>
         <a:blipFill dpi="0" rotWithShape="1">
-          <a:blip r:embed="rId1"/>
+          <a:blip r:embed="rId12"/>
           <a:srcRect/>
           <a:stretch>
             <a:fillRect/>
@@ -27534,6 +27626,7 @@
             <a:pPr algn="ctr">
               <a:defRPr/>
             </a:pPr>
+            <a:endParaRPr/>
           </a:p>
         </p:txBody>
       </p:sp>
@@ -27652,15 +27745,6 @@
               </a:rPr>
               <a:t>听</a:t>
             </a:r>
-            <a:endParaRPr lang="zh-CN" altLang="en-US" sz="4800" b="1" i="0" u="none" strike="noStrike">
-              <a:solidFill>
-                <a:schemeClr val="tx1"/>
-              </a:solidFill>
-              <a:latin typeface="Noto Sans SC" panose="020B0200000000000000" charset="-122"/>
-              <a:ea typeface="Noto Sans SC" panose="020B0200000000000000" charset="-122"/>
-              <a:cs typeface="Noto Sans SC" panose="020B0200000000000000" charset="-122"/>
-              <a:sym typeface="Noto Sans SC" panose="020B0200000000000000" charset="-122"/>
-            </a:endParaRPr>
           </a:p>
         </p:txBody>
       </p:sp>
@@ -27670,7 +27754,7 @@
           <p:cNvSpPr/>
           <p:nvPr>
             <p:custDataLst>
-              <p:tags r:id="rId2"/>
+              <p:tags r:id="rId1"/>
             </p:custDataLst>
           </p:nvPr>
         </p:nvSpPr>
@@ -27706,6 +27790,7 @@
             <a:pPr algn="ctr">
               <a:defRPr/>
             </a:pPr>
+            <a:endParaRPr/>
           </a:p>
         </p:txBody>
       </p:sp>
@@ -27715,7 +27800,7 @@
           <p:cNvSpPr/>
           <p:nvPr>
             <p:custDataLst>
-              <p:tags r:id="rId3"/>
+              <p:tags r:id="rId2"/>
             </p:custDataLst>
           </p:nvPr>
         </p:nvSpPr>
@@ -27756,15 +27841,6 @@
               </a:rPr>
               <a:t>✦ 汇报小组</a:t>
             </a:r>
-            <a:endParaRPr lang="en-US" sz="2000" b="1" i="0" u="none" strike="noStrike">
-              <a:solidFill>
-                <a:srgbClr val="FF8C00"/>
-              </a:solidFill>
-              <a:latin typeface="Noto Sans SC" panose="020B0200000000000000" charset="-122"/>
-              <a:ea typeface="Noto Sans SC" panose="020B0200000000000000" charset="-122"/>
-              <a:cs typeface="Noto Sans SC" panose="020B0200000000000000" charset="-122"/>
-              <a:sym typeface="Noto Sans SC" panose="020B0200000000000000" charset="-122"/>
-            </a:endParaRPr>
           </a:p>
         </p:txBody>
       </p:sp>
@@ -27774,7 +27850,7 @@
           <p:cNvSpPr/>
           <p:nvPr>
             <p:custDataLst>
-              <p:tags r:id="rId4"/>
+              <p:tags r:id="rId3"/>
             </p:custDataLst>
           </p:nvPr>
         </p:nvSpPr>
@@ -27817,17 +27893,6 @@
               </a:rPr>
               <a:t>苏致远 / 吴多迅 / 魏龙飞</a:t>
             </a:r>
-            <a:endParaRPr lang="en-US" sz="1800" b="1" i="0" u="none" strike="noStrike">
-              <a:solidFill>
-                <a:schemeClr val="tx1">
-                  <a:alpha val="85098"/>
-                </a:schemeClr>
-              </a:solidFill>
-              <a:latin typeface="Noto Sans SC" panose="020B0200000000000000" charset="-122"/>
-              <a:ea typeface="Noto Sans SC" panose="020B0200000000000000" charset="-122"/>
-              <a:cs typeface="Noto Sans SC" panose="020B0200000000000000" charset="-122"/>
-              <a:sym typeface="Noto Sans SC" panose="020B0200000000000000" charset="-122"/>
-            </a:endParaRPr>
           </a:p>
         </p:txBody>
       </p:sp>
@@ -27837,7 +27902,7 @@
           <p:cNvSpPr/>
           <p:nvPr>
             <p:custDataLst>
-              <p:tags r:id="rId5"/>
+              <p:tags r:id="rId4"/>
             </p:custDataLst>
           </p:nvPr>
         </p:nvSpPr>
@@ -27873,6 +27938,7 @@
             <a:pPr algn="ctr">
               <a:defRPr/>
             </a:pPr>
+            <a:endParaRPr/>
           </a:p>
         </p:txBody>
       </p:sp>
@@ -27882,7 +27948,7 @@
           <p:cNvSpPr/>
           <p:nvPr>
             <p:custDataLst>
-              <p:tags r:id="rId6"/>
+              <p:tags r:id="rId5"/>
             </p:custDataLst>
           </p:nvPr>
         </p:nvSpPr>
@@ -27923,15 +27989,6 @@
               </a:rPr>
               <a:t>✦ 报告日期</a:t>
             </a:r>
-            <a:endParaRPr lang="en-US" sz="2000" b="1" i="0" u="none" strike="noStrike">
-              <a:solidFill>
-                <a:srgbClr val="FF8C00"/>
-              </a:solidFill>
-              <a:latin typeface="Noto Sans SC" panose="020B0200000000000000" charset="-122"/>
-              <a:ea typeface="Noto Sans SC" panose="020B0200000000000000" charset="-122"/>
-              <a:cs typeface="Noto Sans SC" panose="020B0200000000000000" charset="-122"/>
-              <a:sym typeface="Noto Sans SC" panose="020B0200000000000000" charset="-122"/>
-            </a:endParaRPr>
           </a:p>
         </p:txBody>
       </p:sp>
@@ -27941,7 +27998,7 @@
           <p:cNvSpPr/>
           <p:nvPr>
             <p:custDataLst>
-              <p:tags r:id="rId7"/>
+              <p:tags r:id="rId6"/>
             </p:custDataLst>
           </p:nvPr>
         </p:nvSpPr>
@@ -27984,17 +28041,6 @@
               </a:rPr>
               <a:t>2026年8月15日</a:t>
             </a:r>
-            <a:endParaRPr lang="en-US" sz="1800" b="1" i="0" u="none" strike="noStrike">
-              <a:solidFill>
-                <a:schemeClr val="tx1">
-                  <a:alpha val="85098"/>
-                </a:schemeClr>
-              </a:solidFill>
-              <a:latin typeface="Noto Sans SC" panose="020B0200000000000000" charset="-122"/>
-              <a:ea typeface="Noto Sans SC" panose="020B0200000000000000" charset="-122"/>
-              <a:cs typeface="Noto Sans SC" panose="020B0200000000000000" charset="-122"/>
-              <a:sym typeface="Noto Sans SC" panose="020B0200000000000000" charset="-122"/>
-            </a:endParaRPr>
           </a:p>
         </p:txBody>
       </p:sp>
@@ -28004,7 +28050,7 @@
           <p:cNvSpPr/>
           <p:nvPr>
             <p:custDataLst>
-              <p:tags r:id="rId8"/>
+              <p:tags r:id="rId7"/>
             </p:custDataLst>
           </p:nvPr>
         </p:nvSpPr>
@@ -28040,6 +28086,7 @@
             <a:pPr algn="ctr">
               <a:defRPr/>
             </a:pPr>
+            <a:endParaRPr/>
           </a:p>
         </p:txBody>
       </p:sp>
@@ -28049,7 +28096,7 @@
           <p:cNvSpPr/>
           <p:nvPr>
             <p:custDataLst>
-              <p:tags r:id="rId9"/>
+              <p:tags r:id="rId8"/>
             </p:custDataLst>
           </p:nvPr>
         </p:nvSpPr>
@@ -28100,29 +28147,8 @@
                 <a:cs typeface="Noto Sans SC" panose="020B0200000000000000" charset="-122"/>
                 <a:sym typeface="Noto Sans SC" panose="020B0200000000000000" charset="-122"/>
               </a:rPr>
-              <a:t>项目</a:t>
+              <a:t>项目代码</a:t>
             </a:r>
-            <a:r>
-              <a:rPr lang="zh-CN" altLang="en-US" sz="2000" b="1" i="0" u="none" strike="noStrike">
-                <a:solidFill>
-                  <a:srgbClr val="FF8C00"/>
-                </a:solidFill>
-                <a:latin typeface="Noto Sans SC" panose="020B0200000000000000" charset="-122"/>
-                <a:ea typeface="Noto Sans SC" panose="020B0200000000000000" charset="-122"/>
-                <a:cs typeface="Noto Sans SC" panose="020B0200000000000000" charset="-122"/>
-                <a:sym typeface="Noto Sans SC" panose="020B0200000000000000" charset="-122"/>
-              </a:rPr>
-              <a:t>代码</a:t>
-            </a:r>
-            <a:endParaRPr lang="zh-CN" altLang="en-US" sz="2000" b="1" i="0" u="none" strike="noStrike">
-              <a:solidFill>
-                <a:srgbClr val="FF8C00"/>
-              </a:solidFill>
-              <a:latin typeface="Noto Sans SC" panose="020B0200000000000000" charset="-122"/>
-              <a:ea typeface="Noto Sans SC" panose="020B0200000000000000" charset="-122"/>
-              <a:cs typeface="Noto Sans SC" panose="020B0200000000000000" charset="-122"/>
-              <a:sym typeface="Noto Sans SC" panose="020B0200000000000000" charset="-122"/>
-            </a:endParaRPr>
           </a:p>
         </p:txBody>
       </p:sp>
@@ -28132,7 +28158,7 @@
           <p:cNvSpPr/>
           <p:nvPr>
             <p:custDataLst>
-              <p:tags r:id="rId10"/>
+              <p:tags r:id="rId9"/>
             </p:custDataLst>
           </p:nvPr>
         </p:nvSpPr>
@@ -28175,17 +28201,6 @@
               </a:rPr>
               <a:t>https://github.com/Stevelikesfruits/Cat-dog-visual-recognization.git</a:t>
             </a:r>
-            <a:endParaRPr lang="en-US" altLang="zh-CN" sz="1800" b="1" i="0" u="none" strike="noStrike">
-              <a:solidFill>
-                <a:schemeClr val="tx1">
-                  <a:alpha val="85098"/>
-                </a:schemeClr>
-              </a:solidFill>
-              <a:latin typeface="Noto Sans SC" panose="020B0200000000000000" charset="-122"/>
-              <a:ea typeface="Noto Sans SC" panose="020B0200000000000000" charset="-122"/>
-              <a:cs typeface="Noto Sans SC" panose="020B0200000000000000" charset="-122"/>
-              <a:sym typeface="Noto Sans SC" panose="020B0200000000000000" charset="-122"/>
-            </a:endParaRPr>
           </a:p>
         </p:txBody>
       </p:sp>
@@ -28203,7 +28218,7 @@
     <p:bg>
       <p:bgPr>
         <a:blipFill dpi="0" rotWithShape="1">
-          <a:blip r:embed="rId1"/>
+          <a:blip r:embed="rId12"/>
           <a:srcRect/>
           <a:stretch>
             <a:fillRect/>
@@ -28260,6 +28275,7 @@
             <a:pPr algn="ctr">
               <a:defRPr/>
             </a:pPr>
+            <a:endParaRPr/>
           </a:p>
         </p:txBody>
       </p:sp>
@@ -28324,7 +28340,7 @@
           <p:cNvSpPr/>
           <p:nvPr>
             <p:custDataLst>
-              <p:tags r:id="rId2"/>
+              <p:tags r:id="rId1"/>
             </p:custDataLst>
           </p:nvPr>
         </p:nvSpPr>
@@ -28356,6 +28372,7 @@
             <a:pPr algn="ctr">
               <a:defRPr/>
             </a:pPr>
+            <a:endParaRPr/>
           </a:p>
         </p:txBody>
       </p:sp>
@@ -28365,7 +28382,7 @@
           <p:cNvSpPr/>
           <p:nvPr>
             <p:custDataLst>
-              <p:tags r:id="rId3"/>
+              <p:tags r:id="rId2"/>
             </p:custDataLst>
           </p:nvPr>
         </p:nvSpPr>
@@ -28397,6 +28414,7 @@
             <a:pPr algn="ctr">
               <a:defRPr/>
             </a:pPr>
+            <a:endParaRPr/>
           </a:p>
         </p:txBody>
       </p:sp>
@@ -28406,7 +28424,7 @@
           <p:cNvSpPr/>
           <p:nvPr>
             <p:custDataLst>
-              <p:tags r:id="rId4"/>
+              <p:tags r:id="rId3"/>
             </p:custDataLst>
           </p:nvPr>
         </p:nvSpPr>
@@ -28491,15 +28509,6 @@
               </a:rPr>
               <a:t>独立编写项目核心算法代码，主导技术架构设计；负责最终的代码逻辑讲解与复盘，确保技术方案的严谨性与可落地性。</a:t>
             </a:r>
-            <a:endParaRPr lang="en-US" b="0" i="0" u="none" strike="noStrike">
-              <a:solidFill>
-                <a:srgbClr val="555555"/>
-              </a:solidFill>
-              <a:latin typeface="Noto Sans SC" panose="020B0200000000000000" charset="-122"/>
-              <a:ea typeface="Noto Sans SC" panose="020B0200000000000000" charset="-122"/>
-              <a:cs typeface="Noto Sans SC" panose="020B0200000000000000" charset="-122"/>
-              <a:sym typeface="Noto Sans SC" panose="020B0200000000000000" charset="-122"/>
-            </a:endParaRPr>
           </a:p>
         </p:txBody>
       </p:sp>
@@ -28509,7 +28518,7 @@
           <p:cNvSpPr/>
           <p:nvPr>
             <p:custDataLst>
-              <p:tags r:id="rId5"/>
+              <p:tags r:id="rId4"/>
             </p:custDataLst>
           </p:nvPr>
         </p:nvSpPr>
@@ -28541,6 +28550,7 @@
             <a:pPr algn="ctr">
               <a:defRPr/>
             </a:pPr>
+            <a:endParaRPr/>
           </a:p>
         </p:txBody>
       </p:sp>
@@ -28550,7 +28560,7 @@
           <p:cNvSpPr/>
           <p:nvPr>
             <p:custDataLst>
-              <p:tags r:id="rId6"/>
+              <p:tags r:id="rId5"/>
             </p:custDataLst>
           </p:nvPr>
         </p:nvSpPr>
@@ -28582,6 +28592,7 @@
             <a:pPr algn="ctr">
               <a:defRPr/>
             </a:pPr>
+            <a:endParaRPr/>
           </a:p>
         </p:txBody>
       </p:sp>
@@ -28591,7 +28602,7 @@
           <p:cNvSpPr/>
           <p:nvPr>
             <p:custDataLst>
-              <p:tags r:id="rId7"/>
+              <p:tags r:id="rId6"/>
             </p:custDataLst>
           </p:nvPr>
         </p:nvSpPr>
@@ -28652,15 +28663,6 @@
               </a:rPr>
               <a:t>撰写详细的理论推导与实践学习摘要，梳理技术文档体系；与苏致远深度协同开发模型训练全流程，保障实验的可复现性。</a:t>
             </a:r>
-            <a:endParaRPr lang="en-US" b="0" i="0" u="none" strike="noStrike">
-              <a:solidFill>
-                <a:srgbClr val="555555"/>
-              </a:solidFill>
-              <a:latin typeface="Noto Sans SC" panose="020B0200000000000000" charset="-122"/>
-              <a:ea typeface="Noto Sans SC" panose="020B0200000000000000" charset="-122"/>
-              <a:cs typeface="Noto Sans SC" panose="020B0200000000000000" charset="-122"/>
-              <a:sym typeface="Noto Sans SC" panose="020B0200000000000000" charset="-122"/>
-            </a:endParaRPr>
           </a:p>
         </p:txBody>
       </p:sp>
@@ -28670,7 +28672,7 @@
           <p:cNvSpPr/>
           <p:nvPr>
             <p:custDataLst>
-              <p:tags r:id="rId8"/>
+              <p:tags r:id="rId7"/>
             </p:custDataLst>
           </p:nvPr>
         </p:nvSpPr>
@@ -28712,7 +28714,7 @@
           <p:cNvSpPr/>
           <p:nvPr>
             <p:custDataLst>
-              <p:tags r:id="rId9"/>
+              <p:tags r:id="rId8"/>
             </p:custDataLst>
           </p:nvPr>
         </p:nvSpPr>
@@ -28744,6 +28746,7 @@
             <a:pPr algn="ctr">
               <a:defRPr/>
             </a:pPr>
+            <a:endParaRPr/>
           </a:p>
         </p:txBody>
       </p:sp>
@@ -28753,7 +28756,7 @@
           <p:cNvSpPr/>
           <p:nvPr>
             <p:custDataLst>
-              <p:tags r:id="rId10"/>
+              <p:tags r:id="rId9"/>
             </p:custDataLst>
           </p:nvPr>
         </p:nvSpPr>
@@ -28814,15 +28817,6 @@
               </a:rPr>
               <a:t>负责前期神经网络基础预备知识的梳理与分享；深度参与模型训练的调参优化环节，协助完成项目摘要的补充与校对。</a:t>
             </a:r>
-            <a:endParaRPr lang="en-US" b="0" i="0" u="none" strike="noStrike">
-              <a:solidFill>
-                <a:srgbClr val="555555"/>
-              </a:solidFill>
-              <a:latin typeface="Noto Sans SC" panose="020B0200000000000000" charset="-122"/>
-              <a:ea typeface="Noto Sans SC" panose="020B0200000000000000" charset="-122"/>
-              <a:cs typeface="Noto Sans SC" panose="020B0200000000000000" charset="-122"/>
-              <a:sym typeface="Noto Sans SC" panose="020B0200000000000000" charset="-122"/>
-            </a:endParaRPr>
           </a:p>
         </p:txBody>
       </p:sp>
@@ -28835,7 +28829,7 @@
           <p:nvPr/>
         </p:nvPicPr>
         <p:blipFill>
-          <a:blip r:embed="rId11"/>
+          <a:blip r:embed="rId13"/>
           <a:stretch>
             <a:fillRect/>
           </a:stretch>
@@ -28864,7 +28858,7 @@
     <p:bg>
       <p:bgPr>
         <a:blipFill dpi="0" rotWithShape="1">
-          <a:blip r:embed="rId1"/>
+          <a:blip r:embed="rId3"/>
           <a:srcRect/>
           <a:stretch>
             <a:fillRect/>
@@ -28921,6 +28915,7 @@
             <a:pPr algn="ctr">
               <a:defRPr/>
             </a:pPr>
+            <a:endParaRPr/>
           </a:p>
         </p:txBody>
       </p:sp>
@@ -29009,6 +29004,7 @@
             <a:pPr algn="ctr">
               <a:defRPr/>
             </a:pPr>
+            <a:endParaRPr/>
           </a:p>
         </p:txBody>
       </p:sp>
@@ -29021,13 +29017,13 @@
           <p:nvPr/>
         </p:nvPicPr>
         <p:blipFill>
-          <a:blip r:embed="rId2">
+          <a:blip r:embed="rId4">
             <a:extLst>
               <a:ext uri="{28A0092B-C50C-407E-A947-70E740481C1C}">
                 <a14:useLocalDpi xmlns:a14="http://schemas.microsoft.com/office/drawing/2010/main" val="0"/>
               </a:ext>
               <a:ext uri="{96DAC541-7B7A-43D3-8B79-37D633B846F1}">
-                <asvg:svgBlip xmlns:asvg="http://schemas.microsoft.com/office/drawing/2016/SVG/main" r:embed="rId3"/>
+                <asvg:svgBlip xmlns:asvg="http://schemas.microsoft.com/office/drawing/2016/SVG/main" r:embed="rId5"/>
               </a:ext>
             </a:extLst>
           </a:blip>
@@ -29177,6 +29173,7 @@
             <a:pPr algn="ctr">
               <a:defRPr/>
             </a:pPr>
+            <a:endParaRPr/>
           </a:p>
         </p:txBody>
       </p:sp>
@@ -29189,13 +29186,13 @@
           <p:nvPr/>
         </p:nvPicPr>
         <p:blipFill>
-          <a:blip r:embed="rId4">
+          <a:blip r:embed="rId6">
             <a:extLst>
               <a:ext uri="{28A0092B-C50C-407E-A947-70E740481C1C}">
                 <a14:useLocalDpi xmlns:a14="http://schemas.microsoft.com/office/drawing/2010/main" val="0"/>
               </a:ext>
               <a:ext uri="{96DAC541-7B7A-43D3-8B79-37D633B846F1}">
-                <asvg:svgBlip xmlns:asvg="http://schemas.microsoft.com/office/drawing/2016/SVG/main" r:embed="rId5"/>
+                <asvg:svgBlip xmlns:asvg="http://schemas.microsoft.com/office/drawing/2016/SVG/main" r:embed="rId7"/>
               </a:ext>
             </a:extLst>
           </a:blip>
@@ -29417,6 +29414,7 @@
             <a:pPr algn="ctr">
               <a:defRPr/>
             </a:pPr>
+            <a:endParaRPr/>
           </a:p>
         </p:txBody>
       </p:sp>
@@ -29429,13 +29427,13 @@
           <p:nvPr/>
         </p:nvPicPr>
         <p:blipFill>
-          <a:blip r:embed="rId6">
+          <a:blip r:embed="rId8">
             <a:extLst>
               <a:ext uri="{28A0092B-C50C-407E-A947-70E740481C1C}">
                 <a14:useLocalDpi xmlns:a14="http://schemas.microsoft.com/office/drawing/2010/main" val="0"/>
               </a:ext>
               <a:ext uri="{96DAC541-7B7A-43D3-8B79-37D633B846F1}">
-                <asvg:svgBlip xmlns:asvg="http://schemas.microsoft.com/office/drawing/2016/SVG/main" r:embed="rId7"/>
+                <asvg:svgBlip xmlns:asvg="http://schemas.microsoft.com/office/drawing/2016/SVG/main" r:embed="rId9"/>
               </a:ext>
             </a:extLst>
           </a:blip>
@@ -29563,15 +29561,6 @@
               </a:rPr>
               <a:t>验证集总准确率</a:t>
             </a:r>
-            <a:endParaRPr lang="en-US" sz="1200" b="0" i="0" u="none" strike="noStrike">
-              <a:solidFill>
-                <a:srgbClr val="6B7280"/>
-              </a:solidFill>
-              <a:latin typeface="Noto Sans SC" panose="020B0200000000000000" charset="-122"/>
-              <a:ea typeface="Noto Sans SC" panose="020B0200000000000000" charset="-122"/>
-              <a:cs typeface="Noto Sans SC" panose="020B0200000000000000" charset="-122"/>
-              <a:sym typeface="Noto Sans SC" panose="020B0200000000000000" charset="-122"/>
-            </a:endParaRPr>
           </a:p>
         </p:txBody>
       </p:sp>
@@ -29670,15 +29659,6 @@
               </a:rPr>
               <a:t>猫类别识别率</a:t>
             </a:r>
-            <a:endParaRPr lang="en-US" sz="1200" b="0" i="0" u="none" strike="noStrike">
-              <a:solidFill>
-                <a:srgbClr val="6B7280"/>
-              </a:solidFill>
-              <a:latin typeface="Noto Sans SC" panose="020B0200000000000000" charset="-122"/>
-              <a:ea typeface="Noto Sans SC" panose="020B0200000000000000" charset="-122"/>
-              <a:cs typeface="Noto Sans SC" panose="020B0200000000000000" charset="-122"/>
-              <a:sym typeface="Noto Sans SC" panose="020B0200000000000000" charset="-122"/>
-            </a:endParaRPr>
           </a:p>
         </p:txBody>
       </p:sp>
@@ -29777,15 +29757,6 @@
               </a:rPr>
               <a:t>狗类别识别率</a:t>
             </a:r>
-            <a:endParaRPr lang="en-US" sz="1200" b="0" i="0" u="none" strike="noStrike">
-              <a:solidFill>
-                <a:srgbClr val="6B7280"/>
-              </a:solidFill>
-              <a:latin typeface="Noto Sans SC" panose="020B0200000000000000" charset="-122"/>
-              <a:ea typeface="Noto Sans SC" panose="020B0200000000000000" charset="-122"/>
-              <a:cs typeface="Noto Sans SC" panose="020B0200000000000000" charset="-122"/>
-              <a:sym typeface="Noto Sans SC" panose="020B0200000000000000" charset="-122"/>
-            </a:endParaRPr>
           </a:p>
         </p:txBody>
       </p:sp>
@@ -29798,7 +29769,7 @@
           <p:nvPr/>
         </p:nvPicPr>
         <p:blipFill>
-          <a:blip r:embed="rId8"/>
+          <a:blip r:embed="rId10"/>
           <a:stretch>
             <a:fillRect/>
           </a:stretch>
@@ -29827,7 +29798,7 @@
     <p:bg>
       <p:bgPr>
         <a:blipFill dpi="0" rotWithShape="1">
-          <a:blip r:embed="rId1"/>
+          <a:blip r:embed="rId15"/>
           <a:srcRect/>
           <a:stretch>
             <a:fillRect/>
@@ -29884,6 +29855,7 @@
             <a:pPr algn="ctr">
               <a:defRPr/>
             </a:pPr>
+            <a:endParaRPr/>
           </a:p>
         </p:txBody>
       </p:sp>
@@ -29968,6 +29940,7 @@
             <a:pPr algn="ctr">
               <a:defRPr/>
             </a:pPr>
+            <a:endParaRPr/>
           </a:p>
         </p:txBody>
       </p:sp>
@@ -30024,7 +29997,7 @@
           <p:cNvSpPr/>
           <p:nvPr>
             <p:custDataLst>
-              <p:tags r:id="rId2"/>
+              <p:tags r:id="rId1"/>
             </p:custDataLst>
           </p:nvPr>
         </p:nvSpPr>
@@ -30060,6 +30033,7 @@
             <a:pPr algn="ctr">
               <a:defRPr/>
             </a:pPr>
+            <a:endParaRPr/>
           </a:p>
         </p:txBody>
       </p:sp>
@@ -30071,375 +30045,7 @@
           </p:cNvPicPr>
           <p:nvPr>
             <p:custDataLst>
-              <p:tags r:id="rId3"/>
-            </p:custDataLst>
-          </p:nvPr>
-        </p:nvPicPr>
-        <p:blipFill>
-          <a:blip r:embed="rId4">
-            <a:extLst>
-              <a:ext uri="{28A0092B-C50C-407E-A947-70E740481C1C}">
-                <a14:useLocalDpi xmlns:a14="http://schemas.microsoft.com/office/drawing/2010/main" val="0"/>
-              </a:ext>
-              <a:ext uri="{96DAC541-7B7A-43D3-8B79-37D633B846F1}">
-                <asvg:svgBlip xmlns:asvg="http://schemas.microsoft.com/office/drawing/2016/SVG/main" r:embed="rId5"/>
-              </a:ext>
-            </a:extLst>
-          </a:blip>
-          <a:stretch>
-            <a:fillRect/>
-          </a:stretch>
-        </p:blipFill>
-        <p:spPr>
-          <a:xfrm>
-            <a:off x="952500" y="4791710"/>
-            <a:ext cx="304800" cy="304800"/>
-          </a:xfrm>
-          <a:prstGeom prst="rect">
-            <a:avLst/>
-          </a:prstGeom>
-        </p:spPr>
-      </p:pic>
-      <p:sp>
-        <p:nvSpPr>
-          <p:cNvPr id="8" name="AutoShape 8"/>
-          <p:cNvSpPr/>
-          <p:nvPr>
-            <p:custDataLst>
-              <p:tags r:id="rId6"/>
-            </p:custDataLst>
-          </p:nvPr>
-        </p:nvSpPr>
-        <p:spPr>
-          <a:xfrm>
-            <a:off x="1333500" y="4766310"/>
-            <a:ext cx="2730500" cy="355600"/>
-          </a:xfrm>
-          <a:prstGeom prst="rect">
-            <a:avLst/>
-          </a:prstGeom>
-          <a:noFill/>
-          <a:ln w="12700" cap="flat" cmpd="sng">
-            <a:noFill/>
-            <a:prstDash val="solid"/>
-            <a:round/>
-          </a:ln>
-        </p:spPr>
-        <p:txBody>
-          <a:bodyPr vert="horz" wrap="square" lIns="0" tIns="0" rIns="0" bIns="0" rtlCol="0" anchor="ctr" anchorCtr="0"/>
-          <a:lstStyle/>
-          <a:p>
-            <a:pPr marL="0" indent="0" algn="l">
-              <a:lnSpc>
-                <a:spcPct val="125000"/>
-              </a:lnSpc>
-              <a:defRPr/>
-            </a:pPr>
-            <a:r>
-              <a:rPr lang="en-US" sz="1600" b="1" i="0" u="none" strike="noStrike">
-                <a:solidFill>
-                  <a:srgbClr val="FF8C00"/>
-                </a:solidFill>
-                <a:latin typeface="Noto Sans SC" panose="020B0200000000000000" charset="-122"/>
-                <a:ea typeface="Noto Sans SC" panose="020B0200000000000000" charset="-122"/>
-                <a:cs typeface="Noto Sans SC" panose="020B0200000000000000" charset="-122"/>
-                <a:sym typeface="Noto Sans SC" panose="020B0200000000000000" charset="-122"/>
-              </a:rPr>
-              <a:t>01 理论落地实践</a:t>
-            </a:r>
-            <a:endParaRPr lang="en-US" sz="1100"/>
-          </a:p>
-        </p:txBody>
-      </p:sp>
-      <p:sp>
-        <p:nvSpPr>
-          <p:cNvPr id="9" name="AutoShape 9"/>
-          <p:cNvSpPr/>
-          <p:nvPr>
-            <p:custDataLst>
-              <p:tags r:id="rId7"/>
-            </p:custDataLst>
-          </p:nvPr>
-        </p:nvSpPr>
-        <p:spPr>
-          <a:xfrm>
-            <a:off x="952500" y="5236210"/>
-            <a:ext cx="2997200" cy="1016000"/>
-          </a:xfrm>
-          <a:prstGeom prst="rect">
-            <a:avLst/>
-          </a:prstGeom>
-          <a:noFill/>
-          <a:ln w="12700" cap="flat" cmpd="sng">
-            <a:noFill/>
-            <a:prstDash val="solid"/>
-            <a:round/>
-          </a:ln>
-        </p:spPr>
-        <p:txBody>
-          <a:bodyPr vert="horz" wrap="square" lIns="0" tIns="0" rIns="0" bIns="0" rtlCol="0" anchor="ctr" anchorCtr="0"/>
-          <a:lstStyle/>
-          <a:p>
-            <a:pPr marL="0" indent="0" algn="l">
-              <a:lnSpc>
-                <a:spcPct val="108000"/>
-              </a:lnSpc>
-              <a:defRPr/>
-            </a:pPr>
-            <a:r>
-              <a:rPr lang="en-US" sz="1300" b="0" i="0" u="none" strike="noStrike">
-                <a:solidFill>
-                  <a:srgbClr val="374151"/>
-                </a:solidFill>
-                <a:latin typeface="Noto Sans SC" panose="020B0200000000000000" charset="-122"/>
-                <a:ea typeface="Noto Sans SC" panose="020B0200000000000000" charset="-122"/>
-                <a:cs typeface="Noto Sans SC" panose="020B0200000000000000" charset="-122"/>
-                <a:sym typeface="Noto Sans SC" panose="020B0200000000000000" charset="-122"/>
-              </a:rPr>
-              <a:t>告别纸上谈兵，亲手搭建卷积神经网络结构，将CNN的核心理论转化为可运行的代码，实现从公式到模型的跨越。</a:t>
-            </a:r>
-            <a:endParaRPr lang="en-US" sz="1100"/>
-          </a:p>
-        </p:txBody>
-      </p:sp>
-      <p:sp>
-        <p:nvSpPr>
-          <p:cNvPr id="10" name="AutoShape 10"/>
-          <p:cNvSpPr/>
-          <p:nvPr>
-            <p:custDataLst>
-              <p:tags r:id="rId8"/>
-            </p:custDataLst>
-          </p:nvPr>
-        </p:nvSpPr>
-        <p:spPr>
-          <a:xfrm>
-            <a:off x="4394200" y="4601210"/>
-            <a:ext cx="3378200" cy="1714500"/>
-          </a:xfrm>
-          <a:prstGeom prst="roundRect">
-            <a:avLst>
-              <a:gd name="adj" fmla="val 0"/>
-            </a:avLst>
-          </a:prstGeom>
-          <a:solidFill>
-            <a:srgbClr val="FF8C00">
-              <a:alpha val="8000"/>
-            </a:srgbClr>
-          </a:solidFill>
-          <a:ln w="12700" cap="flat" cmpd="sng">
-            <a:solidFill>
-              <a:srgbClr val="FF8C00">
-                <a:alpha val="20000"/>
-              </a:srgbClr>
-            </a:solidFill>
-            <a:prstDash val="solid"/>
-            <a:round/>
-          </a:ln>
-        </p:spPr>
-        <p:txBody>
-          <a:bodyPr vert="horz" wrap="square" lIns="63500" tIns="63500" rIns="63500" bIns="63500" rtlCol="0" anchor="ctr"/>
-          <a:lstStyle/>
-          <a:p>
-            <a:pPr algn="ctr">
-              <a:defRPr/>
-            </a:pPr>
-          </a:p>
-        </p:txBody>
-      </p:sp>
-      <p:pic>
-        <p:nvPicPr>
-          <p:cNvPr id="11" name="Picture 11"/>
-          <p:cNvPicPr>
-            <a:picLocks noChangeAspect="1"/>
-          </p:cNvPicPr>
-          <p:nvPr>
-            <p:custDataLst>
-              <p:tags r:id="rId9"/>
-            </p:custDataLst>
-          </p:nvPr>
-        </p:nvPicPr>
-        <p:blipFill>
-          <a:blip r:embed="rId10">
-            <a:extLst>
-              <a:ext uri="{28A0092B-C50C-407E-A947-70E740481C1C}">
-                <a14:useLocalDpi xmlns:a14="http://schemas.microsoft.com/office/drawing/2010/main" val="0"/>
-              </a:ext>
-              <a:ext uri="{96DAC541-7B7A-43D3-8B79-37D633B846F1}">
-                <asvg:svgBlip xmlns:asvg="http://schemas.microsoft.com/office/drawing/2016/SVG/main" r:embed="rId11"/>
-              </a:ext>
-            </a:extLst>
-          </a:blip>
-          <a:stretch>
-            <a:fillRect/>
-          </a:stretch>
-        </p:blipFill>
-        <p:spPr>
-          <a:xfrm>
-            <a:off x="4584700" y="4791710"/>
-            <a:ext cx="304800" cy="304800"/>
-          </a:xfrm>
-          <a:prstGeom prst="rect">
-            <a:avLst/>
-          </a:prstGeom>
-        </p:spPr>
-      </p:pic>
-      <p:sp>
-        <p:nvSpPr>
-          <p:cNvPr id="12" name="AutoShape 12"/>
-          <p:cNvSpPr/>
-          <p:nvPr>
-            <p:custDataLst>
-              <p:tags r:id="rId12"/>
-            </p:custDataLst>
-          </p:nvPr>
-        </p:nvSpPr>
-        <p:spPr>
-          <a:xfrm>
-            <a:off x="4965700" y="4766310"/>
-            <a:ext cx="2730500" cy="355600"/>
-          </a:xfrm>
-          <a:prstGeom prst="rect">
-            <a:avLst/>
-          </a:prstGeom>
-          <a:noFill/>
-          <a:ln w="12700" cap="flat" cmpd="sng">
-            <a:noFill/>
-            <a:prstDash val="solid"/>
-            <a:round/>
-          </a:ln>
-        </p:spPr>
-        <p:txBody>
-          <a:bodyPr vert="horz" wrap="square" lIns="0" tIns="0" rIns="0" bIns="0" rtlCol="0" anchor="ctr" anchorCtr="0"/>
-          <a:lstStyle/>
-          <a:p>
-            <a:pPr marL="0" indent="0" algn="l">
-              <a:lnSpc>
-                <a:spcPct val="125000"/>
-              </a:lnSpc>
-              <a:defRPr/>
-            </a:pPr>
-            <a:r>
-              <a:rPr lang="en-US" sz="1600" b="1" i="0" u="none" strike="noStrike">
-                <a:solidFill>
-                  <a:srgbClr val="FF8C00"/>
-                </a:solidFill>
-                <a:latin typeface="Noto Sans SC" panose="020B0200000000000000" charset="-122"/>
-                <a:ea typeface="Noto Sans SC" panose="020B0200000000000000" charset="-122"/>
-                <a:cs typeface="Noto Sans SC" panose="020B0200000000000000" charset="-122"/>
-                <a:sym typeface="Noto Sans SC" panose="020B0200000000000000" charset="-122"/>
-              </a:rPr>
-              <a:t>02 掌握全流程闭环</a:t>
-            </a:r>
-            <a:endParaRPr lang="en-US" sz="1100"/>
-          </a:p>
-        </p:txBody>
-      </p:sp>
-      <p:sp>
-        <p:nvSpPr>
-          <p:cNvPr id="13" name="AutoShape 13"/>
-          <p:cNvSpPr/>
-          <p:nvPr>
-            <p:custDataLst>
-              <p:tags r:id="rId13"/>
-            </p:custDataLst>
-          </p:nvPr>
-        </p:nvSpPr>
-        <p:spPr>
-          <a:xfrm>
-            <a:off x="4584700" y="5236210"/>
-            <a:ext cx="2997200" cy="1016000"/>
-          </a:xfrm>
-          <a:prstGeom prst="rect">
-            <a:avLst/>
-          </a:prstGeom>
-          <a:noFill/>
-          <a:ln w="12700" cap="flat" cmpd="sng">
-            <a:noFill/>
-            <a:prstDash val="solid"/>
-            <a:round/>
-          </a:ln>
-        </p:spPr>
-        <p:txBody>
-          <a:bodyPr vert="horz" wrap="square" lIns="0" tIns="0" rIns="0" bIns="0" rtlCol="0" anchor="ctr" anchorCtr="0"/>
-          <a:lstStyle/>
-          <a:p>
-            <a:pPr marL="0" indent="0" algn="l">
-              <a:lnSpc>
-                <a:spcPct val="108000"/>
-              </a:lnSpc>
-              <a:defRPr/>
-            </a:pPr>
-            <a:r>
-              <a:rPr lang="en-US" sz="1300" b="0" i="0" u="none" strike="noStrike">
-                <a:solidFill>
-                  <a:srgbClr val="374151"/>
-                </a:solidFill>
-                <a:latin typeface="Noto Sans SC" panose="020B0200000000000000" charset="-122"/>
-                <a:ea typeface="Noto Sans SC" panose="020B0200000000000000" charset="-122"/>
-                <a:cs typeface="Noto Sans SC" panose="020B0200000000000000" charset="-122"/>
-                <a:sym typeface="Noto Sans SC" panose="020B0200000000000000" charset="-122"/>
-              </a:rPr>
-              <a:t>完整经历“数据采集清洗→模型架构设计→训练调优→评估预测”的AI项目全生命周期，积累真实的工程经验。</a:t>
-            </a:r>
-            <a:endParaRPr lang="en-US" sz="1100"/>
-          </a:p>
-        </p:txBody>
-      </p:sp>
-      <p:sp>
-        <p:nvSpPr>
-          <p:cNvPr id="14" name="AutoShape 14"/>
-          <p:cNvSpPr/>
-          <p:nvPr>
-            <p:custDataLst>
-              <p:tags r:id="rId14"/>
-            </p:custDataLst>
-          </p:nvPr>
-        </p:nvSpPr>
-        <p:spPr>
-          <a:xfrm>
-            <a:off x="8026400" y="4601210"/>
-            <a:ext cx="3378200" cy="1714500"/>
-          </a:xfrm>
-          <a:prstGeom prst="roundRect">
-            <a:avLst>
-              <a:gd name="adj" fmla="val 0"/>
-            </a:avLst>
-          </a:prstGeom>
-          <a:solidFill>
-            <a:srgbClr val="FF8C00">
-              <a:alpha val="8000"/>
-            </a:srgbClr>
-          </a:solidFill>
-          <a:ln w="12700" cap="flat" cmpd="sng">
-            <a:solidFill>
-              <a:srgbClr val="FF8C00">
-                <a:alpha val="20000"/>
-              </a:srgbClr>
-            </a:solidFill>
-            <a:prstDash val="solid"/>
-            <a:round/>
-          </a:ln>
-        </p:spPr>
-        <p:txBody>
-          <a:bodyPr vert="horz" wrap="square" lIns="63500" tIns="63500" rIns="63500" bIns="63500" rtlCol="0" anchor="ctr"/>
-          <a:lstStyle/>
-          <a:p>
-            <a:pPr algn="ctr">
-              <a:defRPr/>
-            </a:pPr>
-          </a:p>
-        </p:txBody>
-      </p:sp>
-      <p:pic>
-        <p:nvPicPr>
-          <p:cNvPr id="15" name="Picture 15"/>
-          <p:cNvPicPr>
-            <a:picLocks noChangeAspect="1"/>
-          </p:cNvPicPr>
-          <p:nvPr>
-            <p:custDataLst>
-              <p:tags r:id="rId15"/>
+              <p:tags r:id="rId2"/>
             </p:custDataLst>
           </p:nvPr>
         </p:nvPicPr>
@@ -30460,6 +30066,376 @@
         </p:blipFill>
         <p:spPr>
           <a:xfrm>
+            <a:off x="952500" y="4791710"/>
+            <a:ext cx="304800" cy="304800"/>
+          </a:xfrm>
+          <a:prstGeom prst="rect">
+            <a:avLst/>
+          </a:prstGeom>
+        </p:spPr>
+      </p:pic>
+      <p:sp>
+        <p:nvSpPr>
+          <p:cNvPr id="8" name="AutoShape 8"/>
+          <p:cNvSpPr/>
+          <p:nvPr>
+            <p:custDataLst>
+              <p:tags r:id="rId3"/>
+            </p:custDataLst>
+          </p:nvPr>
+        </p:nvSpPr>
+        <p:spPr>
+          <a:xfrm>
+            <a:off x="1333500" y="4766310"/>
+            <a:ext cx="2730500" cy="355600"/>
+          </a:xfrm>
+          <a:prstGeom prst="rect">
+            <a:avLst/>
+          </a:prstGeom>
+          <a:noFill/>
+          <a:ln w="12700" cap="flat" cmpd="sng">
+            <a:noFill/>
+            <a:prstDash val="solid"/>
+            <a:round/>
+          </a:ln>
+        </p:spPr>
+        <p:txBody>
+          <a:bodyPr vert="horz" wrap="square" lIns="0" tIns="0" rIns="0" bIns="0" rtlCol="0" anchor="ctr" anchorCtr="0"/>
+          <a:lstStyle/>
+          <a:p>
+            <a:pPr marL="0" indent="0" algn="l">
+              <a:lnSpc>
+                <a:spcPct val="125000"/>
+              </a:lnSpc>
+              <a:defRPr/>
+            </a:pPr>
+            <a:r>
+              <a:rPr lang="en-US" sz="1600" b="1" i="0" u="none" strike="noStrike">
+                <a:solidFill>
+                  <a:srgbClr val="FF8C00"/>
+                </a:solidFill>
+                <a:latin typeface="Noto Sans SC" panose="020B0200000000000000" charset="-122"/>
+                <a:ea typeface="Noto Sans SC" panose="020B0200000000000000" charset="-122"/>
+                <a:cs typeface="Noto Sans SC" panose="020B0200000000000000" charset="-122"/>
+                <a:sym typeface="Noto Sans SC" panose="020B0200000000000000" charset="-122"/>
+              </a:rPr>
+              <a:t>01 理论落地实践</a:t>
+            </a:r>
+            <a:endParaRPr lang="en-US" sz="1100"/>
+          </a:p>
+        </p:txBody>
+      </p:sp>
+      <p:sp>
+        <p:nvSpPr>
+          <p:cNvPr id="9" name="AutoShape 9"/>
+          <p:cNvSpPr/>
+          <p:nvPr>
+            <p:custDataLst>
+              <p:tags r:id="rId4"/>
+            </p:custDataLst>
+          </p:nvPr>
+        </p:nvSpPr>
+        <p:spPr>
+          <a:xfrm>
+            <a:off x="952500" y="5236210"/>
+            <a:ext cx="2997200" cy="1016000"/>
+          </a:xfrm>
+          <a:prstGeom prst="rect">
+            <a:avLst/>
+          </a:prstGeom>
+          <a:noFill/>
+          <a:ln w="12700" cap="flat" cmpd="sng">
+            <a:noFill/>
+            <a:prstDash val="solid"/>
+            <a:round/>
+          </a:ln>
+        </p:spPr>
+        <p:txBody>
+          <a:bodyPr vert="horz" wrap="square" lIns="0" tIns="0" rIns="0" bIns="0" rtlCol="0" anchor="ctr" anchorCtr="0"/>
+          <a:lstStyle/>
+          <a:p>
+            <a:pPr marL="0" indent="0" algn="l">
+              <a:lnSpc>
+                <a:spcPct val="108000"/>
+              </a:lnSpc>
+              <a:defRPr/>
+            </a:pPr>
+            <a:r>
+              <a:rPr lang="en-US" sz="1300" b="0" i="0" u="none" strike="noStrike">
+                <a:solidFill>
+                  <a:srgbClr val="374151"/>
+                </a:solidFill>
+                <a:latin typeface="Noto Sans SC" panose="020B0200000000000000" charset="-122"/>
+                <a:ea typeface="Noto Sans SC" panose="020B0200000000000000" charset="-122"/>
+                <a:cs typeface="Noto Sans SC" panose="020B0200000000000000" charset="-122"/>
+                <a:sym typeface="Noto Sans SC" panose="020B0200000000000000" charset="-122"/>
+              </a:rPr>
+              <a:t>告别纸上谈兵，亲手搭建卷积神经网络结构，将CNN的核心理论转化为可运行的代码，实现从公式到模型的跨越。</a:t>
+            </a:r>
+            <a:endParaRPr lang="en-US" sz="1100"/>
+          </a:p>
+        </p:txBody>
+      </p:sp>
+      <p:sp>
+        <p:nvSpPr>
+          <p:cNvPr id="10" name="AutoShape 10"/>
+          <p:cNvSpPr/>
+          <p:nvPr>
+            <p:custDataLst>
+              <p:tags r:id="rId5"/>
+            </p:custDataLst>
+          </p:nvPr>
+        </p:nvSpPr>
+        <p:spPr>
+          <a:xfrm>
+            <a:off x="4394200" y="4601210"/>
+            <a:ext cx="3378200" cy="1714500"/>
+          </a:xfrm>
+          <a:prstGeom prst="roundRect">
+            <a:avLst>
+              <a:gd name="adj" fmla="val 0"/>
+            </a:avLst>
+          </a:prstGeom>
+          <a:solidFill>
+            <a:srgbClr val="FF8C00">
+              <a:alpha val="8000"/>
+            </a:srgbClr>
+          </a:solidFill>
+          <a:ln w="12700" cap="flat" cmpd="sng">
+            <a:solidFill>
+              <a:srgbClr val="FF8C00">
+                <a:alpha val="20000"/>
+              </a:srgbClr>
+            </a:solidFill>
+            <a:prstDash val="solid"/>
+            <a:round/>
+          </a:ln>
+        </p:spPr>
+        <p:txBody>
+          <a:bodyPr vert="horz" wrap="square" lIns="63500" tIns="63500" rIns="63500" bIns="63500" rtlCol="0" anchor="ctr"/>
+          <a:lstStyle/>
+          <a:p>
+            <a:pPr algn="ctr">
+              <a:defRPr/>
+            </a:pPr>
+            <a:endParaRPr/>
+          </a:p>
+        </p:txBody>
+      </p:sp>
+      <p:pic>
+        <p:nvPicPr>
+          <p:cNvPr id="11" name="Picture 11"/>
+          <p:cNvPicPr>
+            <a:picLocks noChangeAspect="1"/>
+          </p:cNvPicPr>
+          <p:nvPr>
+            <p:custDataLst>
+              <p:tags r:id="rId6"/>
+            </p:custDataLst>
+          </p:nvPr>
+        </p:nvPicPr>
+        <p:blipFill>
+          <a:blip r:embed="rId18">
+            <a:extLst>
+              <a:ext uri="{28A0092B-C50C-407E-A947-70E740481C1C}">
+                <a14:useLocalDpi xmlns:a14="http://schemas.microsoft.com/office/drawing/2010/main" val="0"/>
+              </a:ext>
+              <a:ext uri="{96DAC541-7B7A-43D3-8B79-37D633B846F1}">
+                <asvg:svgBlip xmlns:asvg="http://schemas.microsoft.com/office/drawing/2016/SVG/main" r:embed="rId19"/>
+              </a:ext>
+            </a:extLst>
+          </a:blip>
+          <a:stretch>
+            <a:fillRect/>
+          </a:stretch>
+        </p:blipFill>
+        <p:spPr>
+          <a:xfrm>
+            <a:off x="4584700" y="4791710"/>
+            <a:ext cx="304800" cy="304800"/>
+          </a:xfrm>
+          <a:prstGeom prst="rect">
+            <a:avLst/>
+          </a:prstGeom>
+        </p:spPr>
+      </p:pic>
+      <p:sp>
+        <p:nvSpPr>
+          <p:cNvPr id="12" name="AutoShape 12"/>
+          <p:cNvSpPr/>
+          <p:nvPr>
+            <p:custDataLst>
+              <p:tags r:id="rId7"/>
+            </p:custDataLst>
+          </p:nvPr>
+        </p:nvSpPr>
+        <p:spPr>
+          <a:xfrm>
+            <a:off x="4965700" y="4766310"/>
+            <a:ext cx="2730500" cy="355600"/>
+          </a:xfrm>
+          <a:prstGeom prst="rect">
+            <a:avLst/>
+          </a:prstGeom>
+          <a:noFill/>
+          <a:ln w="12700" cap="flat" cmpd="sng">
+            <a:noFill/>
+            <a:prstDash val="solid"/>
+            <a:round/>
+          </a:ln>
+        </p:spPr>
+        <p:txBody>
+          <a:bodyPr vert="horz" wrap="square" lIns="0" tIns="0" rIns="0" bIns="0" rtlCol="0" anchor="ctr" anchorCtr="0"/>
+          <a:lstStyle/>
+          <a:p>
+            <a:pPr marL="0" indent="0" algn="l">
+              <a:lnSpc>
+                <a:spcPct val="125000"/>
+              </a:lnSpc>
+              <a:defRPr/>
+            </a:pPr>
+            <a:r>
+              <a:rPr lang="en-US" sz="1600" b="1" i="0" u="none" strike="noStrike">
+                <a:solidFill>
+                  <a:srgbClr val="FF8C00"/>
+                </a:solidFill>
+                <a:latin typeface="Noto Sans SC" panose="020B0200000000000000" charset="-122"/>
+                <a:ea typeface="Noto Sans SC" panose="020B0200000000000000" charset="-122"/>
+                <a:cs typeface="Noto Sans SC" panose="020B0200000000000000" charset="-122"/>
+                <a:sym typeface="Noto Sans SC" panose="020B0200000000000000" charset="-122"/>
+              </a:rPr>
+              <a:t>02 掌握全流程闭环</a:t>
+            </a:r>
+            <a:endParaRPr lang="en-US" sz="1100"/>
+          </a:p>
+        </p:txBody>
+      </p:sp>
+      <p:sp>
+        <p:nvSpPr>
+          <p:cNvPr id="13" name="AutoShape 13"/>
+          <p:cNvSpPr/>
+          <p:nvPr>
+            <p:custDataLst>
+              <p:tags r:id="rId8"/>
+            </p:custDataLst>
+          </p:nvPr>
+        </p:nvSpPr>
+        <p:spPr>
+          <a:xfrm>
+            <a:off x="4584700" y="5236210"/>
+            <a:ext cx="2997200" cy="1016000"/>
+          </a:xfrm>
+          <a:prstGeom prst="rect">
+            <a:avLst/>
+          </a:prstGeom>
+          <a:noFill/>
+          <a:ln w="12700" cap="flat" cmpd="sng">
+            <a:noFill/>
+            <a:prstDash val="solid"/>
+            <a:round/>
+          </a:ln>
+        </p:spPr>
+        <p:txBody>
+          <a:bodyPr vert="horz" wrap="square" lIns="0" tIns="0" rIns="0" bIns="0" rtlCol="0" anchor="ctr" anchorCtr="0"/>
+          <a:lstStyle/>
+          <a:p>
+            <a:pPr marL="0" indent="0" algn="l">
+              <a:lnSpc>
+                <a:spcPct val="108000"/>
+              </a:lnSpc>
+              <a:defRPr/>
+            </a:pPr>
+            <a:r>
+              <a:rPr lang="en-US" sz="1300" b="0" i="0" u="none" strike="noStrike">
+                <a:solidFill>
+                  <a:srgbClr val="374151"/>
+                </a:solidFill>
+                <a:latin typeface="Noto Sans SC" panose="020B0200000000000000" charset="-122"/>
+                <a:ea typeface="Noto Sans SC" panose="020B0200000000000000" charset="-122"/>
+                <a:cs typeface="Noto Sans SC" panose="020B0200000000000000" charset="-122"/>
+                <a:sym typeface="Noto Sans SC" panose="020B0200000000000000" charset="-122"/>
+              </a:rPr>
+              <a:t>完整经历“数据采集清洗→模型架构设计→训练调优→评估预测”的AI项目全生命周期，积累真实的工程经验。</a:t>
+            </a:r>
+            <a:endParaRPr lang="en-US" sz="1100"/>
+          </a:p>
+        </p:txBody>
+      </p:sp>
+      <p:sp>
+        <p:nvSpPr>
+          <p:cNvPr id="14" name="AutoShape 14"/>
+          <p:cNvSpPr/>
+          <p:nvPr>
+            <p:custDataLst>
+              <p:tags r:id="rId9"/>
+            </p:custDataLst>
+          </p:nvPr>
+        </p:nvSpPr>
+        <p:spPr>
+          <a:xfrm>
+            <a:off x="8026400" y="4601210"/>
+            <a:ext cx="3378200" cy="1714500"/>
+          </a:xfrm>
+          <a:prstGeom prst="roundRect">
+            <a:avLst>
+              <a:gd name="adj" fmla="val 0"/>
+            </a:avLst>
+          </a:prstGeom>
+          <a:solidFill>
+            <a:srgbClr val="FF8C00">
+              <a:alpha val="8000"/>
+            </a:srgbClr>
+          </a:solidFill>
+          <a:ln w="12700" cap="flat" cmpd="sng">
+            <a:solidFill>
+              <a:srgbClr val="FF8C00">
+                <a:alpha val="20000"/>
+              </a:srgbClr>
+            </a:solidFill>
+            <a:prstDash val="solid"/>
+            <a:round/>
+          </a:ln>
+        </p:spPr>
+        <p:txBody>
+          <a:bodyPr vert="horz" wrap="square" lIns="63500" tIns="63500" rIns="63500" bIns="63500" rtlCol="0" anchor="ctr"/>
+          <a:lstStyle/>
+          <a:p>
+            <a:pPr algn="ctr">
+              <a:defRPr/>
+            </a:pPr>
+            <a:endParaRPr/>
+          </a:p>
+        </p:txBody>
+      </p:sp>
+      <p:pic>
+        <p:nvPicPr>
+          <p:cNvPr id="15" name="Picture 15"/>
+          <p:cNvPicPr>
+            <a:picLocks noChangeAspect="1"/>
+          </p:cNvPicPr>
+          <p:nvPr>
+            <p:custDataLst>
+              <p:tags r:id="rId10"/>
+            </p:custDataLst>
+          </p:nvPr>
+        </p:nvPicPr>
+        <p:blipFill>
+          <a:blip r:embed="rId20">
+            <a:extLst>
+              <a:ext uri="{28A0092B-C50C-407E-A947-70E740481C1C}">
+                <a14:useLocalDpi xmlns:a14="http://schemas.microsoft.com/office/drawing/2010/main" val="0"/>
+              </a:ext>
+              <a:ext uri="{96DAC541-7B7A-43D3-8B79-37D633B846F1}">
+                <asvg:svgBlip xmlns:asvg="http://schemas.microsoft.com/office/drawing/2016/SVG/main" r:embed="rId21"/>
+              </a:ext>
+            </a:extLst>
+          </a:blip>
+          <a:stretch>
+            <a:fillRect/>
+          </a:stretch>
+        </p:blipFill>
+        <p:spPr>
+          <a:xfrm>
             <a:off x="8216900" y="4791710"/>
             <a:ext cx="304800" cy="304800"/>
           </a:xfrm>
@@ -30474,7 +30450,7 @@
           <p:cNvSpPr/>
           <p:nvPr>
             <p:custDataLst>
-              <p:tags r:id="rId18"/>
+              <p:tags r:id="rId11"/>
             </p:custDataLst>
           </p:nvPr>
         </p:nvSpPr>
@@ -30525,7 +30501,7 @@
           <p:cNvSpPr/>
           <p:nvPr>
             <p:custDataLst>
-              <p:tags r:id="rId19"/>
+              <p:tags r:id="rId12"/>
             </p:custDataLst>
           </p:nvPr>
         </p:nvSpPr>
@@ -30579,7 +30555,7 @@
           <p:nvPr/>
         </p:nvPicPr>
         <p:blipFill>
-          <a:blip r:embed="rId20"/>
+          <a:blip r:embed="rId22"/>
           <a:srcRect l="5" r="5"/>
           <a:stretch>
             <a:fillRect/>
@@ -30619,7 +30595,7 @@
     <p:bg>
       <p:bgPr>
         <a:blipFill dpi="0" rotWithShape="1">
-          <a:blip r:embed="rId1"/>
+          <a:blip r:embed="rId3"/>
           <a:srcRect/>
           <a:stretch>
             <a:fillRect/>
@@ -30676,6 +30652,7 @@
             <a:pPr algn="ctr">
               <a:defRPr/>
             </a:pPr>
+            <a:endParaRPr/>
           </a:p>
         </p:txBody>
       </p:sp>
@@ -30764,180 +30741,13 @@
             <a:pPr algn="ctr">
               <a:defRPr/>
             </a:pPr>
+            <a:endParaRPr/>
           </a:p>
         </p:txBody>
       </p:sp>
       <p:pic>
         <p:nvPicPr>
           <p:cNvPr id="5" name="Picture 5"/>
-          <p:cNvPicPr>
-            <a:picLocks noChangeAspect="1"/>
-          </p:cNvPicPr>
-          <p:nvPr/>
-        </p:nvPicPr>
-        <p:blipFill>
-          <a:blip r:embed="rId2">
-            <a:extLst>
-              <a:ext uri="{28A0092B-C50C-407E-A947-70E740481C1C}">
-                <a14:useLocalDpi xmlns:a14="http://schemas.microsoft.com/office/drawing/2010/main" val="0"/>
-              </a:ext>
-              <a:ext uri="{96DAC541-7B7A-43D3-8B79-37D633B846F1}">
-                <asvg:svgBlip xmlns:asvg="http://schemas.microsoft.com/office/drawing/2016/SVG/main" r:embed="rId3"/>
-              </a:ext>
-            </a:extLst>
-          </a:blip>
-          <a:stretch>
-            <a:fillRect/>
-          </a:stretch>
-        </p:blipFill>
-        <p:spPr>
-          <a:xfrm>
-            <a:off x="952500" y="1841500"/>
-            <a:ext cx="304800" cy="304800"/>
-          </a:xfrm>
-          <a:prstGeom prst="rect">
-            <a:avLst/>
-          </a:prstGeom>
-        </p:spPr>
-      </p:pic>
-      <p:sp>
-        <p:nvSpPr>
-          <p:cNvPr id="6" name="AutoShape 6"/>
-          <p:cNvSpPr/>
-          <p:nvPr/>
-        </p:nvSpPr>
-        <p:spPr>
-          <a:xfrm>
-            <a:off x="1333500" y="1803400"/>
-            <a:ext cx="1905000" cy="381000"/>
-          </a:xfrm>
-          <a:prstGeom prst="rect">
-            <a:avLst/>
-          </a:prstGeom>
-          <a:noFill/>
-          <a:ln w="12700" cap="flat" cmpd="sng">
-            <a:noFill/>
-            <a:prstDash val="solid"/>
-            <a:round/>
-          </a:ln>
-        </p:spPr>
-        <p:txBody>
-          <a:bodyPr vert="horz" wrap="square" lIns="0" tIns="0" rIns="0" bIns="0" rtlCol="0" anchor="ctr" anchorCtr="0"/>
-          <a:lstStyle/>
-          <a:p>
-            <a:pPr marL="0" indent="0" algn="l">
-              <a:lnSpc>
-                <a:spcPct val="125000"/>
-              </a:lnSpc>
-              <a:defRPr/>
-            </a:pPr>
-            <a:r>
-              <a:rPr lang="en-US" sz="1800" b="1" i="0" u="none" strike="noStrike">
-                <a:solidFill>
-                  <a:srgbClr val="FF8C00"/>
-                </a:solidFill>
-                <a:latin typeface="Noto Sans SC" panose="020B0200000000000000" charset="-122"/>
-                <a:ea typeface="Noto Sans SC" panose="020B0200000000000000" charset="-122"/>
-                <a:cs typeface="Noto Sans SC" panose="020B0200000000000000" charset="-122"/>
-                <a:sym typeface="Noto Sans SC" panose="020B0200000000000000" charset="-122"/>
-              </a:rPr>
-              <a:t>01 理论学习</a:t>
-            </a:r>
-            <a:endParaRPr lang="en-US" sz="1100"/>
-          </a:p>
-        </p:txBody>
-      </p:sp>
-      <p:sp>
-        <p:nvSpPr>
-          <p:cNvPr id="7" name="AutoShape 7"/>
-          <p:cNvSpPr/>
-          <p:nvPr/>
-        </p:nvSpPr>
-        <p:spPr>
-          <a:xfrm>
-            <a:off x="952500" y="2349500"/>
-            <a:ext cx="2159000" cy="1270000"/>
-          </a:xfrm>
-          <a:prstGeom prst="rect">
-            <a:avLst/>
-          </a:prstGeom>
-          <a:noFill/>
-          <a:ln w="12700" cap="flat" cmpd="sng">
-            <a:noFill/>
-            <a:prstDash val="solid"/>
-            <a:round/>
-          </a:ln>
-        </p:spPr>
-        <p:txBody>
-          <a:bodyPr vert="horz" wrap="square" lIns="0" tIns="0" rIns="0" bIns="0" rtlCol="0" anchor="ctr" anchorCtr="0"/>
-          <a:lstStyle/>
-          <a:p>
-            <a:pPr marL="0" indent="0" algn="l">
-              <a:lnSpc>
-                <a:spcPct val="108000"/>
-              </a:lnSpc>
-              <a:defRPr/>
-            </a:pPr>
-            <a:r>
-              <a:rPr lang="en-US" sz="1300" b="0" i="0" u="none" strike="noStrike">
-                <a:solidFill>
-                  <a:srgbClr val="525252"/>
-                </a:solidFill>
-                <a:latin typeface="Noto Sans SC" panose="020B0200000000000000" charset="-122"/>
-                <a:ea typeface="Noto Sans SC" panose="020B0200000000000000" charset="-122"/>
-                <a:cs typeface="Noto Sans SC" panose="020B0200000000000000" charset="-122"/>
-                <a:sym typeface="Noto Sans SC" panose="020B0200000000000000" charset="-122"/>
-              </a:rPr>
-              <a:t>夯实深度学习理论基础，掌握CNN特征提取原理、BN层正则化机制，深入理解SGD等优化器的参数更新策略，为模型构建提供理论支撑。</a:t>
-            </a:r>
-            <a:endParaRPr lang="en-US" sz="1100"/>
-          </a:p>
-        </p:txBody>
-      </p:sp>
-      <p:sp>
-        <p:nvSpPr>
-          <p:cNvPr id="8" name="AutoShape 8"/>
-          <p:cNvSpPr/>
-          <p:nvPr/>
-        </p:nvSpPr>
-        <p:spPr>
-          <a:xfrm>
-            <a:off x="3467100" y="1651000"/>
-            <a:ext cx="2540000" cy="2159000"/>
-          </a:xfrm>
-          <a:prstGeom prst="roundRect">
-            <a:avLst>
-              <a:gd name="adj" fmla="val 0"/>
-            </a:avLst>
-          </a:prstGeom>
-          <a:solidFill>
-            <a:srgbClr val="FFFFFF">
-              <a:alpha val="60000"/>
-            </a:srgbClr>
-          </a:solidFill>
-          <a:ln w="12700" cap="flat" cmpd="sng">
-            <a:solidFill>
-              <a:srgbClr val="FF8C00">
-                <a:alpha val="20000"/>
-              </a:srgbClr>
-            </a:solidFill>
-            <a:prstDash val="solid"/>
-            <a:round/>
-          </a:ln>
-        </p:spPr>
-        <p:txBody>
-          <a:bodyPr vert="horz" wrap="square" lIns="63500" tIns="63500" rIns="63500" bIns="63500" rtlCol="0" anchor="ctr"/>
-          <a:lstStyle/>
-          <a:p>
-            <a:pPr algn="ctr">
-              <a:defRPr/>
-            </a:pPr>
-          </a:p>
-        </p:txBody>
-      </p:sp>
-      <p:pic>
-        <p:nvPicPr>
-          <p:cNvPr id="9" name="Picture 9"/>
           <p:cNvPicPr>
             <a:picLocks noChangeAspect="1"/>
           </p:cNvPicPr>
@@ -30960,7 +30770,7 @@
         </p:blipFill>
         <p:spPr>
           <a:xfrm>
-            <a:off x="3657600" y="1841500"/>
+            <a:off x="952500" y="1841500"/>
             <a:ext cx="304800" cy="304800"/>
           </a:xfrm>
           <a:prstGeom prst="rect">
@@ -30970,13 +30780,13 @@
       </p:pic>
       <p:sp>
         <p:nvSpPr>
-          <p:cNvPr id="10" name="AutoShape 10"/>
+          <p:cNvPr id="6" name="AutoShape 6"/>
           <p:cNvSpPr/>
           <p:nvPr/>
         </p:nvSpPr>
         <p:spPr>
           <a:xfrm>
-            <a:off x="4038600" y="1803400"/>
+            <a:off x="1333500" y="1803400"/>
             <a:ext cx="1905000" cy="381000"/>
           </a:xfrm>
           <a:prstGeom prst="rect">
@@ -31009,7 +30819,7 @@
                 <a:cs typeface="Noto Sans SC" panose="020B0200000000000000" charset="-122"/>
                 <a:sym typeface="Noto Sans SC" panose="020B0200000000000000" charset="-122"/>
               </a:rPr>
-              <a:t>02 数据准备</a:t>
+              <a:t>01 理论学习</a:t>
             </a:r>
             <a:endParaRPr lang="en-US" sz="1100"/>
           </a:p>
@@ -31017,13 +30827,13 @@
       </p:sp>
       <p:sp>
         <p:nvSpPr>
-          <p:cNvPr id="11" name="AutoShape 11"/>
+          <p:cNvPr id="7" name="AutoShape 7"/>
           <p:cNvSpPr/>
           <p:nvPr/>
         </p:nvSpPr>
         <p:spPr>
           <a:xfrm>
-            <a:off x="3657600" y="2349500"/>
+            <a:off x="952500" y="2349500"/>
             <a:ext cx="2159000" cy="1270000"/>
           </a:xfrm>
           <a:prstGeom prst="rect">
@@ -31056,7 +30866,7 @@
                 <a:cs typeface="Noto Sans SC" panose="020B0200000000000000" charset="-122"/>
                 <a:sym typeface="Noto Sans SC" panose="020B0200000000000000" charset="-122"/>
               </a:rPr>
-              <a:t>自动化完成Kaggle数据集下载与解压，执行数据清洗与标签整理；通过随机裁剪、翻转等数据增强手段扩充样本，提升模型鲁棒性。</a:t>
+              <a:t>夯实深度学习理论基础，掌握CNN特征提取原理、BN层正则化机制，深入理解SGD等优化器的参数更新策略，为模型构建提供理论支撑。</a:t>
             </a:r>
             <a:endParaRPr lang="en-US" sz="1100"/>
           </a:p>
@@ -31064,13 +30874,13 @@
       </p:sp>
       <p:sp>
         <p:nvSpPr>
-          <p:cNvPr id="12" name="AutoShape 12"/>
+          <p:cNvPr id="8" name="AutoShape 8"/>
           <p:cNvSpPr/>
           <p:nvPr/>
         </p:nvSpPr>
         <p:spPr>
           <a:xfrm>
-            <a:off x="6172200" y="1651000"/>
+            <a:off x="3467100" y="1651000"/>
             <a:ext cx="2540000" cy="2159000"/>
           </a:xfrm>
           <a:prstGeom prst="roundRect">
@@ -31100,12 +30910,13 @@
             <a:pPr algn="ctr">
               <a:defRPr/>
             </a:pPr>
+            <a:endParaRPr/>
           </a:p>
         </p:txBody>
       </p:sp>
       <p:pic>
         <p:nvPicPr>
-          <p:cNvPr id="13" name="Picture 13"/>
+          <p:cNvPr id="9" name="Picture 9"/>
           <p:cNvPicPr>
             <a:picLocks noChangeAspect="1"/>
           </p:cNvPicPr>
@@ -31128,7 +30939,7 @@
         </p:blipFill>
         <p:spPr>
           <a:xfrm>
-            <a:off x="6362700" y="1841500"/>
+            <a:off x="3657600" y="1841500"/>
             <a:ext cx="304800" cy="304800"/>
           </a:xfrm>
           <a:prstGeom prst="rect">
@@ -31138,13 +30949,13 @@
       </p:pic>
       <p:sp>
         <p:nvSpPr>
-          <p:cNvPr id="14" name="AutoShape 14"/>
+          <p:cNvPr id="10" name="AutoShape 10"/>
           <p:cNvSpPr/>
           <p:nvPr/>
         </p:nvSpPr>
         <p:spPr>
           <a:xfrm>
-            <a:off x="6743700" y="1803400"/>
+            <a:off x="4038600" y="1803400"/>
             <a:ext cx="1905000" cy="381000"/>
           </a:xfrm>
           <a:prstGeom prst="rect">
@@ -31177,7 +30988,7 @@
                 <a:cs typeface="Noto Sans SC" panose="020B0200000000000000" charset="-122"/>
                 <a:sym typeface="Noto Sans SC" panose="020B0200000000000000" charset="-122"/>
               </a:rPr>
-              <a:t>03 模型训练</a:t>
+              <a:t>02 数据准备</a:t>
             </a:r>
             <a:endParaRPr lang="en-US" sz="1100"/>
           </a:p>
@@ -31185,13 +30996,13 @@
       </p:sp>
       <p:sp>
         <p:nvSpPr>
-          <p:cNvPr id="15" name="AutoShape 15"/>
+          <p:cNvPr id="11" name="AutoShape 11"/>
           <p:cNvSpPr/>
           <p:nvPr/>
         </p:nvSpPr>
         <p:spPr>
           <a:xfrm>
-            <a:off x="6362700" y="2349500"/>
+            <a:off x="3657600" y="2349500"/>
             <a:ext cx="2159000" cy="1270000"/>
           </a:xfrm>
           <a:prstGeom prst="rect">
@@ -31224,7 +31035,7 @@
                 <a:cs typeface="Noto Sans SC" panose="020B0200000000000000" charset="-122"/>
                 <a:sym typeface="Noto Sans SC" panose="020B0200000000000000" charset="-122"/>
               </a:rPr>
-              <a:t>构建轻量化CNN网络结构，配置交叉熵损失函数与Adam优化器；在训练集迭代优化，利用验证集监控过拟合，动态保存最优模型权重。</a:t>
+              <a:t>自动化完成Kaggle数据集下载与解压，执行数据清洗与标签整理；通过随机裁剪、翻转等数据增强手段扩充样本，提升模型鲁棒性。</a:t>
             </a:r>
             <a:endParaRPr lang="en-US" sz="1100"/>
           </a:p>
@@ -31232,13 +31043,13 @@
       </p:sp>
       <p:sp>
         <p:nvSpPr>
-          <p:cNvPr id="16" name="AutoShape 16"/>
+          <p:cNvPr id="12" name="AutoShape 12"/>
           <p:cNvSpPr/>
           <p:nvPr/>
         </p:nvSpPr>
         <p:spPr>
           <a:xfrm>
-            <a:off x="8877300" y="1651000"/>
+            <a:off x="6172200" y="1651000"/>
             <a:ext cx="2540000" cy="2159000"/>
           </a:xfrm>
           <a:prstGeom prst="roundRect">
@@ -31268,12 +31079,13 @@
             <a:pPr algn="ctr">
               <a:defRPr/>
             </a:pPr>
+            <a:endParaRPr/>
           </a:p>
         </p:txBody>
       </p:sp>
       <p:pic>
         <p:nvPicPr>
-          <p:cNvPr id="17" name="Picture 17"/>
+          <p:cNvPr id="13" name="Picture 13"/>
           <p:cNvPicPr>
             <a:picLocks noChangeAspect="1"/>
           </p:cNvPicPr>
@@ -31296,7 +31108,7 @@
         </p:blipFill>
         <p:spPr>
           <a:xfrm>
-            <a:off x="9067800" y="1841500"/>
+            <a:off x="6362700" y="1841500"/>
             <a:ext cx="304800" cy="304800"/>
           </a:xfrm>
           <a:prstGeom prst="rect">
@@ -31306,13 +31118,13 @@
       </p:pic>
       <p:sp>
         <p:nvSpPr>
-          <p:cNvPr id="18" name="AutoShape 18"/>
+          <p:cNvPr id="14" name="AutoShape 14"/>
           <p:cNvSpPr/>
           <p:nvPr/>
         </p:nvSpPr>
         <p:spPr>
           <a:xfrm>
-            <a:off x="9448800" y="1803400"/>
+            <a:off x="6743700" y="1803400"/>
             <a:ext cx="1905000" cy="381000"/>
           </a:xfrm>
           <a:prstGeom prst="rect">
@@ -31345,7 +31157,7 @@
                 <a:cs typeface="Noto Sans SC" panose="020B0200000000000000" charset="-122"/>
                 <a:sym typeface="Noto Sans SC" panose="020B0200000000000000" charset="-122"/>
               </a:rPr>
-              <a:t>04 评估预测</a:t>
+              <a:t>03 模型训练</a:t>
             </a:r>
             <a:endParaRPr lang="en-US" sz="1100"/>
           </a:p>
@@ -31353,13 +31165,13 @@
       </p:sp>
       <p:sp>
         <p:nvSpPr>
-          <p:cNvPr id="19" name="AutoShape 19"/>
+          <p:cNvPr id="15" name="AutoShape 15"/>
           <p:cNvSpPr/>
           <p:nvPr/>
         </p:nvSpPr>
         <p:spPr>
           <a:xfrm>
-            <a:off x="9067800" y="2349500"/>
+            <a:off x="6362700" y="2349500"/>
             <a:ext cx="2159000" cy="1270000"/>
           </a:xfrm>
           <a:prstGeom prst="rect">
@@ -31392,7 +31204,7 @@
                 <a:cs typeface="Noto Sans SC" panose="020B0200000000000000" charset="-122"/>
                 <a:sym typeface="Noto Sans SC" panose="020B0200000000000000" charset="-122"/>
               </a:rPr>
-              <a:t>基于测试集计算准确率、混淆矩阵等关键指标；加载最优模型权重，实现对单张或批量图像的快速推理，输出分类结果与置信度。</a:t>
+              <a:t>构建轻量化CNN网络结构，配置交叉熵损失函数与Adam优化器；在训练集迭代优化，利用验证集监控过拟合，动态保存最优模型权重。</a:t>
             </a:r>
             <a:endParaRPr lang="en-US" sz="1100"/>
           </a:p>
@@ -31400,61 +31212,14 @@
       </p:sp>
       <p:sp>
         <p:nvSpPr>
-          <p:cNvPr id="20" name="AutoShape 20"/>
+          <p:cNvPr id="16" name="AutoShape 16"/>
           <p:cNvSpPr/>
           <p:nvPr/>
         </p:nvSpPr>
         <p:spPr>
           <a:xfrm>
-            <a:off x="762000" y="4191000"/>
-            <a:ext cx="10668000" cy="381000"/>
-          </a:xfrm>
-          <a:prstGeom prst="rect">
-            <a:avLst/>
-          </a:prstGeom>
-          <a:noFill/>
-          <a:ln w="12700" cap="flat" cmpd="sng">
-            <a:noFill/>
-            <a:prstDash val="solid"/>
-            <a:round/>
-          </a:ln>
-        </p:spPr>
-        <p:txBody>
-          <a:bodyPr vert="horz" wrap="square" lIns="0" tIns="0" rIns="0" bIns="0" rtlCol="0" anchor="ctr" anchorCtr="0"/>
-          <a:lstStyle/>
-          <a:p>
-            <a:pPr marL="0" indent="0" algn="l">
-              <a:lnSpc>
-                <a:spcPct val="125000"/>
-              </a:lnSpc>
-              <a:defRPr/>
-            </a:pPr>
-            <a:r>
-              <a:rPr lang="en-US" sz="2000" b="1" i="0" u="none" strike="noStrike">
-                <a:solidFill>
-                  <a:srgbClr val="333333"/>
-                </a:solidFill>
-                <a:latin typeface="Noto Sans SC" panose="020B0200000000000000" charset="-122"/>
-                <a:ea typeface="Noto Sans SC" panose="020B0200000000000000" charset="-122"/>
-                <a:cs typeface="Noto Sans SC" panose="020B0200000000000000" charset="-122"/>
-                <a:sym typeface="Noto Sans SC" panose="020B0200000000000000" charset="-122"/>
-              </a:rPr>
-              <a:t>核心代码脚本映射体系</a:t>
-            </a:r>
-            <a:endParaRPr lang="en-US" sz="1100"/>
-          </a:p>
-        </p:txBody>
-      </p:sp>
-      <p:sp>
-        <p:nvSpPr>
-          <p:cNvPr id="21" name="AutoShape 21"/>
-          <p:cNvSpPr/>
-          <p:nvPr/>
-        </p:nvSpPr>
-        <p:spPr>
-          <a:xfrm>
-            <a:off x="762000" y="4826000"/>
-            <a:ext cx="3429000" cy="1524000"/>
+            <a:off x="8877300" y="1651000"/>
+            <a:ext cx="2540000" cy="2159000"/>
           </a:xfrm>
           <a:prstGeom prst="roundRect">
             <a:avLst>
@@ -31462,14 +31227,14 @@
             </a:avLst>
           </a:prstGeom>
           <a:solidFill>
-            <a:srgbClr val="FF8C00">
-              <a:alpha val="8000"/>
+            <a:srgbClr val="FFFFFF">
+              <a:alpha val="60000"/>
             </a:srgbClr>
           </a:solidFill>
           <a:ln w="12700" cap="flat" cmpd="sng">
             <a:solidFill>
               <a:srgbClr val="FF8C00">
-                <a:alpha val="30000"/>
+                <a:alpha val="20000"/>
               </a:srgbClr>
             </a:solidFill>
             <a:prstDash val="solid"/>
@@ -31483,12 +31248,13 @@
             <a:pPr algn="ctr">
               <a:defRPr/>
             </a:pPr>
+            <a:endParaRPr/>
           </a:p>
         </p:txBody>
       </p:sp>
       <p:pic>
         <p:nvPicPr>
-          <p:cNvPr id="22" name="Picture 22"/>
+          <p:cNvPr id="17" name="Picture 17"/>
           <p:cNvPicPr>
             <a:picLocks noChangeAspect="1"/>
           </p:cNvPicPr>
@@ -31511,8 +31277,8 @@
         </p:blipFill>
         <p:spPr>
           <a:xfrm>
-            <a:off x="952500" y="5016500"/>
-            <a:ext cx="355600" cy="355600"/>
+            <a:off x="9067800" y="1841500"/>
+            <a:ext cx="304800" cy="304800"/>
           </a:xfrm>
           <a:prstGeom prst="rect">
             <a:avLst/>
@@ -31521,14 +31287,14 @@
       </p:pic>
       <p:sp>
         <p:nvSpPr>
-          <p:cNvPr id="23" name="AutoShape 23"/>
+          <p:cNvPr id="18" name="AutoShape 18"/>
           <p:cNvSpPr/>
           <p:nvPr/>
         </p:nvSpPr>
         <p:spPr>
           <a:xfrm>
-            <a:off x="1397000" y="5016500"/>
-            <a:ext cx="2794000" cy="355600"/>
+            <a:off x="9448800" y="1803400"/>
+            <a:ext cx="1905000" cy="381000"/>
           </a:xfrm>
           <a:prstGeom prst="rect">
             <a:avLst/>
@@ -31551,7 +31317,7 @@
               <a:defRPr/>
             </a:pPr>
             <a:r>
-              <a:rPr lang="en-US" sz="1600" b="1" i="0" u="none" strike="noStrike">
+              <a:rPr lang="en-US" sz="1800" b="1" i="0" u="none" strike="noStrike">
                 <a:solidFill>
                   <a:srgbClr val="FF8C00"/>
                 </a:solidFill>
@@ -31560,7 +31326,7 @@
                 <a:cs typeface="Noto Sans SC" panose="020B0200000000000000" charset="-122"/>
                 <a:sym typeface="Noto Sans SC" panose="020B0200000000000000" charset="-122"/>
               </a:rPr>
-              <a:t>download_data.py</a:t>
+              <a:t>04 评估预测</a:t>
             </a:r>
             <a:endParaRPr lang="en-US" sz="1100"/>
           </a:p>
@@ -31568,14 +31334,14 @@
       </p:sp>
       <p:sp>
         <p:nvSpPr>
-          <p:cNvPr id="24" name="AutoShape 24"/>
+          <p:cNvPr id="19" name="AutoShape 19"/>
           <p:cNvSpPr/>
           <p:nvPr/>
         </p:nvSpPr>
         <p:spPr>
           <a:xfrm>
-            <a:off x="952500" y="5461000"/>
-            <a:ext cx="3048000" cy="762000"/>
+            <a:off x="9067800" y="2349500"/>
+            <a:ext cx="2159000" cy="1270000"/>
           </a:xfrm>
           <a:prstGeom prst="rect">
             <a:avLst/>
@@ -31593,7 +31359,7 @@
           <a:p>
             <a:pPr marL="0" indent="0" algn="l">
               <a:lnSpc>
-                <a:spcPct val="100000"/>
+                <a:spcPct val="108000"/>
               </a:lnSpc>
               <a:defRPr/>
             </a:pPr>
@@ -31607,7 +31373,7 @@
                 <a:cs typeface="Noto Sans SC" panose="020B0200000000000000" charset="-122"/>
                 <a:sym typeface="Noto Sans SC" panose="020B0200000000000000" charset="-122"/>
               </a:rPr>
-              <a:t>实现数据集的自动化拉取与预处理，完成数据清洗、目录规整及格式转换，构建标准化的数据输入管线，为训练提供高质量数据基础。</a:t>
+              <a:t>基于测试集计算准确率、混淆矩阵等关键指标；加载最优模型权重，实现对单张或批量图像的快速推理，输出分类结果与置信度。</a:t>
             </a:r>
             <a:endParaRPr lang="en-US" sz="1100"/>
           </a:p>
@@ -31615,13 +31381,60 @@
       </p:sp>
       <p:sp>
         <p:nvSpPr>
-          <p:cNvPr id="25" name="AutoShape 25"/>
+          <p:cNvPr id="20" name="AutoShape 20"/>
           <p:cNvSpPr/>
           <p:nvPr/>
         </p:nvSpPr>
         <p:spPr>
           <a:xfrm>
-            <a:off x="4381500" y="4826000"/>
+            <a:off x="762000" y="4191000"/>
+            <a:ext cx="10668000" cy="381000"/>
+          </a:xfrm>
+          <a:prstGeom prst="rect">
+            <a:avLst/>
+          </a:prstGeom>
+          <a:noFill/>
+          <a:ln w="12700" cap="flat" cmpd="sng">
+            <a:noFill/>
+            <a:prstDash val="solid"/>
+            <a:round/>
+          </a:ln>
+        </p:spPr>
+        <p:txBody>
+          <a:bodyPr vert="horz" wrap="square" lIns="0" tIns="0" rIns="0" bIns="0" rtlCol="0" anchor="ctr" anchorCtr="0"/>
+          <a:lstStyle/>
+          <a:p>
+            <a:pPr marL="0" indent="0" algn="l">
+              <a:lnSpc>
+                <a:spcPct val="125000"/>
+              </a:lnSpc>
+              <a:defRPr/>
+            </a:pPr>
+            <a:r>
+              <a:rPr lang="en-US" sz="2000" b="1" i="0" u="none" strike="noStrike">
+                <a:solidFill>
+                  <a:srgbClr val="333333"/>
+                </a:solidFill>
+                <a:latin typeface="Noto Sans SC" panose="020B0200000000000000" charset="-122"/>
+                <a:ea typeface="Noto Sans SC" panose="020B0200000000000000" charset="-122"/>
+                <a:cs typeface="Noto Sans SC" panose="020B0200000000000000" charset="-122"/>
+                <a:sym typeface="Noto Sans SC" panose="020B0200000000000000" charset="-122"/>
+              </a:rPr>
+              <a:t>核心代码脚本映射体系</a:t>
+            </a:r>
+            <a:endParaRPr lang="en-US" sz="1100"/>
+          </a:p>
+        </p:txBody>
+      </p:sp>
+      <p:sp>
+        <p:nvSpPr>
+          <p:cNvPr id="21" name="AutoShape 21"/>
+          <p:cNvSpPr/>
+          <p:nvPr/>
+        </p:nvSpPr>
+        <p:spPr>
+          <a:xfrm>
+            <a:off x="762000" y="4826000"/>
             <a:ext cx="3429000" cy="1524000"/>
           </a:xfrm>
           <a:prstGeom prst="roundRect">
@@ -31651,12 +31464,13 @@
             <a:pPr algn="ctr">
               <a:defRPr/>
             </a:pPr>
+            <a:endParaRPr/>
           </a:p>
         </p:txBody>
       </p:sp>
       <p:pic>
         <p:nvPicPr>
-          <p:cNvPr id="26" name="Picture 26"/>
+          <p:cNvPr id="22" name="Picture 22"/>
           <p:cNvPicPr>
             <a:picLocks noChangeAspect="1"/>
           </p:cNvPicPr>
@@ -31679,7 +31493,7 @@
         </p:blipFill>
         <p:spPr>
           <a:xfrm>
-            <a:off x="4572000" y="5016500"/>
+            <a:off x="952500" y="5016500"/>
             <a:ext cx="355600" cy="355600"/>
           </a:xfrm>
           <a:prstGeom prst="rect">
@@ -31689,13 +31503,13 @@
       </p:pic>
       <p:sp>
         <p:nvSpPr>
-          <p:cNvPr id="27" name="AutoShape 27"/>
+          <p:cNvPr id="23" name="AutoShape 23"/>
           <p:cNvSpPr/>
           <p:nvPr/>
         </p:nvSpPr>
         <p:spPr>
           <a:xfrm>
-            <a:off x="5016500" y="5016500"/>
+            <a:off x="1397000" y="5016500"/>
             <a:ext cx="2794000" cy="355600"/>
           </a:xfrm>
           <a:prstGeom prst="rect">
@@ -31728,7 +31542,7 @@
                 <a:cs typeface="Noto Sans SC" panose="020B0200000000000000" charset="-122"/>
                 <a:sym typeface="Noto Sans SC" panose="020B0200000000000000" charset="-122"/>
               </a:rPr>
-              <a:t>train.py</a:t>
+              <a:t>download_data.py</a:t>
             </a:r>
             <a:endParaRPr lang="en-US" sz="1100"/>
           </a:p>
@@ -31736,13 +31550,13 @@
       </p:sp>
       <p:sp>
         <p:nvSpPr>
-          <p:cNvPr id="28" name="AutoShape 28"/>
+          <p:cNvPr id="24" name="AutoShape 24"/>
           <p:cNvSpPr/>
           <p:nvPr/>
         </p:nvSpPr>
         <p:spPr>
           <a:xfrm>
-            <a:off x="4572000" y="5461000"/>
+            <a:off x="952500" y="5461000"/>
             <a:ext cx="3048000" cy="762000"/>
           </a:xfrm>
           <a:prstGeom prst="rect">
@@ -31775,7 +31589,7 @@
                 <a:cs typeface="Noto Sans SC" panose="020B0200000000000000" charset="-122"/>
                 <a:sym typeface="Noto Sans SC" panose="020B0200000000000000" charset="-122"/>
               </a:rPr>
-              <a:t>模型训练的核心入口，封装网络构建、超参数配置、损失计算与优化器更新逻辑，支持断点续训与实时性能监控，自动归档最优模型。</a:t>
+              <a:t>实现数据集的自动化拉取与预处理，完成数据清洗、目录规整及格式转换，构建标准化的数据输入管线，为训练提供高质量数据基础。</a:t>
             </a:r>
             <a:endParaRPr lang="en-US" sz="1100"/>
           </a:p>
@@ -31783,13 +31597,13 @@
       </p:sp>
       <p:sp>
         <p:nvSpPr>
-          <p:cNvPr id="29" name="AutoShape 29"/>
+          <p:cNvPr id="25" name="AutoShape 25"/>
           <p:cNvSpPr/>
           <p:nvPr/>
         </p:nvSpPr>
         <p:spPr>
           <a:xfrm>
-            <a:off x="8001000" y="4826000"/>
+            <a:off x="4381500" y="4826000"/>
             <a:ext cx="3429000" cy="1524000"/>
           </a:xfrm>
           <a:prstGeom prst="roundRect">
@@ -31819,12 +31633,13 @@
             <a:pPr algn="ctr">
               <a:defRPr/>
             </a:pPr>
+            <a:endParaRPr/>
           </a:p>
         </p:txBody>
       </p:sp>
       <p:pic>
         <p:nvPicPr>
-          <p:cNvPr id="30" name="Picture 30"/>
+          <p:cNvPr id="26" name="Picture 26"/>
           <p:cNvPicPr>
             <a:picLocks noChangeAspect="1"/>
           </p:cNvPicPr>
@@ -31847,6 +31662,175 @@
         </p:blipFill>
         <p:spPr>
           <a:xfrm>
+            <a:off x="4572000" y="5016500"/>
+            <a:ext cx="355600" cy="355600"/>
+          </a:xfrm>
+          <a:prstGeom prst="rect">
+            <a:avLst/>
+          </a:prstGeom>
+        </p:spPr>
+      </p:pic>
+      <p:sp>
+        <p:nvSpPr>
+          <p:cNvPr id="27" name="AutoShape 27"/>
+          <p:cNvSpPr/>
+          <p:nvPr/>
+        </p:nvSpPr>
+        <p:spPr>
+          <a:xfrm>
+            <a:off x="5016500" y="5016500"/>
+            <a:ext cx="2794000" cy="355600"/>
+          </a:xfrm>
+          <a:prstGeom prst="rect">
+            <a:avLst/>
+          </a:prstGeom>
+          <a:noFill/>
+          <a:ln w="12700" cap="flat" cmpd="sng">
+            <a:noFill/>
+            <a:prstDash val="solid"/>
+            <a:round/>
+          </a:ln>
+        </p:spPr>
+        <p:txBody>
+          <a:bodyPr vert="horz" wrap="square" lIns="0" tIns="0" rIns="0" bIns="0" rtlCol="0" anchor="ctr" anchorCtr="0"/>
+          <a:lstStyle/>
+          <a:p>
+            <a:pPr marL="0" indent="0" algn="l">
+              <a:lnSpc>
+                <a:spcPct val="125000"/>
+              </a:lnSpc>
+              <a:defRPr/>
+            </a:pPr>
+            <a:r>
+              <a:rPr lang="en-US" sz="1600" b="1" i="0" u="none" strike="noStrike">
+                <a:solidFill>
+                  <a:srgbClr val="FF8C00"/>
+                </a:solidFill>
+                <a:latin typeface="Noto Sans SC" panose="020B0200000000000000" charset="-122"/>
+                <a:ea typeface="Noto Sans SC" panose="020B0200000000000000" charset="-122"/>
+                <a:cs typeface="Noto Sans SC" panose="020B0200000000000000" charset="-122"/>
+                <a:sym typeface="Noto Sans SC" panose="020B0200000000000000" charset="-122"/>
+              </a:rPr>
+              <a:t>train.py</a:t>
+            </a:r>
+            <a:endParaRPr lang="en-US" sz="1100"/>
+          </a:p>
+        </p:txBody>
+      </p:sp>
+      <p:sp>
+        <p:nvSpPr>
+          <p:cNvPr id="28" name="AutoShape 28"/>
+          <p:cNvSpPr/>
+          <p:nvPr/>
+        </p:nvSpPr>
+        <p:spPr>
+          <a:xfrm>
+            <a:off x="4572000" y="5461000"/>
+            <a:ext cx="3048000" cy="762000"/>
+          </a:xfrm>
+          <a:prstGeom prst="rect">
+            <a:avLst/>
+          </a:prstGeom>
+          <a:noFill/>
+          <a:ln w="12700" cap="flat" cmpd="sng">
+            <a:noFill/>
+            <a:prstDash val="solid"/>
+            <a:round/>
+          </a:ln>
+        </p:spPr>
+        <p:txBody>
+          <a:bodyPr vert="horz" wrap="square" lIns="0" tIns="0" rIns="0" bIns="0" rtlCol="0" anchor="ctr" anchorCtr="0"/>
+          <a:lstStyle/>
+          <a:p>
+            <a:pPr marL="0" indent="0" algn="l">
+              <a:lnSpc>
+                <a:spcPct val="100000"/>
+              </a:lnSpc>
+              <a:defRPr/>
+            </a:pPr>
+            <a:r>
+              <a:rPr lang="en-US" sz="1300" b="0" i="0" u="none" strike="noStrike">
+                <a:solidFill>
+                  <a:srgbClr val="525252"/>
+                </a:solidFill>
+                <a:latin typeface="Noto Sans SC" panose="020B0200000000000000" charset="-122"/>
+                <a:ea typeface="Noto Sans SC" panose="020B0200000000000000" charset="-122"/>
+                <a:cs typeface="Noto Sans SC" panose="020B0200000000000000" charset="-122"/>
+                <a:sym typeface="Noto Sans SC" panose="020B0200000000000000" charset="-122"/>
+              </a:rPr>
+              <a:t>模型训练的核心入口，封装网络构建、超参数配置、损失计算与优化器更新逻辑，支持断点续训与实时性能监控，自动归档最优模型。</a:t>
+            </a:r>
+            <a:endParaRPr lang="en-US" sz="1100"/>
+          </a:p>
+        </p:txBody>
+      </p:sp>
+      <p:sp>
+        <p:nvSpPr>
+          <p:cNvPr id="29" name="AutoShape 29"/>
+          <p:cNvSpPr/>
+          <p:nvPr/>
+        </p:nvSpPr>
+        <p:spPr>
+          <a:xfrm>
+            <a:off x="8001000" y="4826000"/>
+            <a:ext cx="3429000" cy="1524000"/>
+          </a:xfrm>
+          <a:prstGeom prst="roundRect">
+            <a:avLst>
+              <a:gd name="adj" fmla="val 0"/>
+            </a:avLst>
+          </a:prstGeom>
+          <a:solidFill>
+            <a:srgbClr val="FF8C00">
+              <a:alpha val="8000"/>
+            </a:srgbClr>
+          </a:solidFill>
+          <a:ln w="12700" cap="flat" cmpd="sng">
+            <a:solidFill>
+              <a:srgbClr val="FF8C00">
+                <a:alpha val="30000"/>
+              </a:srgbClr>
+            </a:solidFill>
+            <a:prstDash val="solid"/>
+            <a:round/>
+          </a:ln>
+        </p:spPr>
+        <p:txBody>
+          <a:bodyPr vert="horz" wrap="square" lIns="63500" tIns="63500" rIns="63500" bIns="63500" rtlCol="0" anchor="ctr"/>
+          <a:lstStyle/>
+          <a:p>
+            <a:pPr algn="ctr">
+              <a:defRPr/>
+            </a:pPr>
+            <a:endParaRPr/>
+          </a:p>
+        </p:txBody>
+      </p:sp>
+      <p:pic>
+        <p:nvPicPr>
+          <p:cNvPr id="30" name="Picture 30"/>
+          <p:cNvPicPr>
+            <a:picLocks noChangeAspect="1"/>
+          </p:cNvPicPr>
+          <p:nvPr/>
+        </p:nvPicPr>
+        <p:blipFill>
+          <a:blip r:embed="rId16">
+            <a:extLst>
+              <a:ext uri="{28A0092B-C50C-407E-A947-70E740481C1C}">
+                <a14:useLocalDpi xmlns:a14="http://schemas.microsoft.com/office/drawing/2010/main" val="0"/>
+              </a:ext>
+              <a:ext uri="{96DAC541-7B7A-43D3-8B79-37D633B846F1}">
+                <asvg:svgBlip xmlns:asvg="http://schemas.microsoft.com/office/drawing/2016/SVG/main" r:embed="rId17"/>
+              </a:ext>
+            </a:extLst>
+          </a:blip>
+          <a:stretch>
+            <a:fillRect/>
+          </a:stretch>
+        </p:blipFill>
+        <p:spPr>
+          <a:xfrm>
             <a:off x="8191500" y="5016500"/>
             <a:ext cx="355600" cy="355600"/>
           </a:xfrm>
@@ -31963,7 +31947,7 @@
     <p:bg>
       <p:bgPr>
         <a:blipFill dpi="0" rotWithShape="1">
-          <a:blip r:embed="rId1"/>
+          <a:blip r:embed="rId3"/>
           <a:srcRect/>
           <a:stretch>
             <a:fillRect/>
@@ -32024,6 +32008,7 @@
             <a:pPr algn="ctr">
               <a:defRPr/>
             </a:pPr>
+            <a:endParaRPr/>
           </a:p>
         </p:txBody>
       </p:sp>
@@ -32141,6 +32126,7 @@
           <a:bodyPr wrap="square" rtlCol="0">
             <a:noAutofit/>
           </a:bodyPr>
+          <a:lstStyle/>
           <a:p>
             <a:r>
               <a:rPr lang="en-US" sz="1800" b="1">
@@ -32153,14 +32139,6 @@
               </a:rPr>
               <a:t>随机初始化的数学本质</a:t>
             </a:r>
-            <a:endParaRPr lang="en-US" sz="1800" b="1">
-              <a:solidFill>
-                <a:srgbClr val="FF8C00"/>
-              </a:solidFill>
-              <a:latin typeface="Noto Sans SC" panose="020B0200000000000000" charset="-122"/>
-              <a:ea typeface="Noto Sans SC" panose="020B0200000000000000" charset="-122"/>
-              <a:cs typeface="Noto Sans SC" panose="020B0200000000000000" charset="-122"/>
-            </a:endParaRPr>
           </a:p>
         </p:txBody>
       </p:sp>
@@ -32173,7 +32151,7 @@
           <p:nvPr/>
         </p:nvPicPr>
         <p:blipFill>
-          <a:blip r:embed="rId2"/>
+          <a:blip r:embed="rId4"/>
           <a:stretch>
             <a:fillRect/>
           </a:stretch>
@@ -32197,7 +32175,7 @@
           <p:nvPr/>
         </p:nvPicPr>
         <p:blipFill>
-          <a:blip r:embed="rId3"/>
+          <a:blip r:embed="rId5"/>
           <a:stretch>
             <a:fillRect/>
           </a:stretch>
@@ -32232,6 +32210,7 @@
           <a:bodyPr wrap="square" rtlCol="0">
             <a:noAutofit/>
           </a:bodyPr>
+          <a:lstStyle/>
           <a:p>
             <a:r>
               <a:rPr lang="zh-CN" altLang="en-US" sz="1800" b="1">
@@ -32242,27 +32221,8 @@
                 <a:ea typeface="Noto Sans SC" panose="020B0200000000000000" charset="-122"/>
                 <a:cs typeface="Noto Sans SC" panose="020B0200000000000000" charset="-122"/>
               </a:rPr>
-              <a:t>优化目标</a:t>
+              <a:t>优化目标函数</a:t>
             </a:r>
-            <a:r>
-              <a:rPr lang="zh-CN" altLang="en-US" sz="1800" b="1">
-                <a:solidFill>
-                  <a:srgbClr val="FF8C00"/>
-                </a:solidFill>
-                <a:latin typeface="Noto Sans SC" panose="020B0200000000000000" charset="-122"/>
-                <a:ea typeface="Noto Sans SC" panose="020B0200000000000000" charset="-122"/>
-                <a:cs typeface="Noto Sans SC" panose="020B0200000000000000" charset="-122"/>
-              </a:rPr>
-              <a:t>函数</a:t>
-            </a:r>
-            <a:endParaRPr lang="zh-CN" altLang="en-US" sz="1800" b="1">
-              <a:solidFill>
-                <a:srgbClr val="FF8C00"/>
-              </a:solidFill>
-              <a:latin typeface="Noto Sans SC" panose="020B0200000000000000" charset="-122"/>
-              <a:ea typeface="Noto Sans SC" panose="020B0200000000000000" charset="-122"/>
-              <a:cs typeface="Noto Sans SC" panose="020B0200000000000000" charset="-122"/>
-            </a:endParaRPr>
           </a:p>
         </p:txBody>
       </p:sp>
@@ -32280,7 +32240,7 @@
     <p:bg>
       <p:bgPr>
         <a:blipFill dpi="0" rotWithShape="1">
-          <a:blip r:embed="rId1"/>
+          <a:blip r:embed="rId3"/>
           <a:srcRect/>
           <a:stretch>
             <a:fillRect/>
@@ -32341,6 +32301,7 @@
             <a:pPr algn="ctr">
               <a:defRPr/>
             </a:pPr>
+            <a:endParaRPr/>
           </a:p>
         </p:txBody>
       </p:sp>
@@ -32458,6 +32419,7 @@
           <a:bodyPr wrap="square" rtlCol="0">
             <a:noAutofit/>
           </a:bodyPr>
+          <a:lstStyle/>
           <a:p>
             <a:r>
               <a:rPr lang="en-US" sz="1800" b="1">
@@ -32481,14 +32443,6 @@
               </a:rPr>
               <a:t>标准化</a:t>
             </a:r>
-            <a:endParaRPr lang="zh-CN" altLang="en-US" sz="1800" b="1">
-              <a:solidFill>
-                <a:srgbClr val="FF8C00"/>
-              </a:solidFill>
-              <a:latin typeface="Noto Sans SC" panose="020B0200000000000000" charset="-122"/>
-              <a:ea typeface="Noto Sans SC" panose="020B0200000000000000" charset="-122"/>
-              <a:cs typeface="Noto Sans SC" panose="020B0200000000000000" charset="-122"/>
-            </a:endParaRPr>
           </a:p>
         </p:txBody>
       </p:sp>
@@ -32512,6 +32466,7 @@
           <a:bodyPr wrap="square" rtlCol="0">
             <a:noAutofit/>
           </a:bodyPr>
+          <a:lstStyle/>
           <a:p>
             <a:r>
               <a:rPr lang="en-US" altLang="zh-CN" sz="1800" b="1">
@@ -32535,14 +32490,6 @@
               </a:rPr>
               <a:t>初始化</a:t>
             </a:r>
-            <a:endParaRPr lang="zh-CN" altLang="en-US" sz="1800" b="1">
-              <a:solidFill>
-                <a:srgbClr val="FF8C00"/>
-              </a:solidFill>
-              <a:latin typeface="Noto Sans SC" panose="020B0200000000000000" charset="-122"/>
-              <a:ea typeface="Noto Sans SC" panose="020B0200000000000000" charset="-122"/>
-              <a:cs typeface="Noto Sans SC" panose="020B0200000000000000" charset="-122"/>
-            </a:endParaRPr>
           </a:p>
         </p:txBody>
       </p:sp>
@@ -32555,7 +32502,7 @@
           <p:nvPr/>
         </p:nvPicPr>
         <p:blipFill>
-          <a:blip r:embed="rId2"/>
+          <a:blip r:embed="rId4"/>
           <a:stretch>
             <a:fillRect/>
           </a:stretch>
@@ -32579,7 +32526,7 @@
           <p:nvPr/>
         </p:nvPicPr>
         <p:blipFill>
-          <a:blip r:embed="rId3"/>
+          <a:blip r:embed="rId5"/>
           <a:stretch>
             <a:fillRect/>
           </a:stretch>
@@ -32603,7 +32550,7 @@
           <p:nvPr/>
         </p:nvPicPr>
         <p:blipFill>
-          <a:blip r:embed="rId4"/>
+          <a:blip r:embed="rId6"/>
           <a:stretch>
             <a:fillRect/>
           </a:stretch>
@@ -32632,7 +32579,7 @@
     <p:bg>
       <p:bgPr>
         <a:blipFill dpi="0" rotWithShape="1">
-          <a:blip r:embed="rId1"/>
+          <a:blip r:embed="rId4"/>
           <a:srcRect/>
           <a:stretch>
             <a:fillRect/>
@@ -32693,6 +32640,7 @@
             <a:pPr algn="ctr">
               <a:defRPr/>
             </a:pPr>
+            <a:endParaRPr/>
           </a:p>
         </p:txBody>
       </p:sp>
@@ -32798,18 +32746,18 @@
           </p:cNvPicPr>
           <p:nvPr>
             <p:custDataLst>
-              <p:tags r:id="rId2"/>
+              <p:tags r:id="rId1"/>
             </p:custDataLst>
           </p:nvPr>
         </p:nvPicPr>
         <p:blipFill>
-          <a:blip r:embed="rId3">
+          <a:blip r:embed="rId5">
             <a:extLst>
               <a:ext uri="{28A0092B-C50C-407E-A947-70E740481C1C}">
                 <a14:useLocalDpi xmlns:a14="http://schemas.microsoft.com/office/drawing/2010/main" val="0"/>
               </a:ext>
               <a:ext uri="{96DAC541-7B7A-43D3-8B79-37D633B846F1}">
-                <asvg:svgBlip xmlns:asvg="http://schemas.microsoft.com/office/drawing/2016/SVG/main" r:embed="rId4"/>
+                <asvg:svgBlip xmlns:asvg="http://schemas.microsoft.com/office/drawing/2016/SVG/main" r:embed="rId6"/>
               </a:ext>
             </a:extLst>
           </a:blip>
@@ -32847,6 +32795,7 @@
           <a:bodyPr wrap="square" rtlCol="0">
             <a:spAutoFit/>
           </a:bodyPr>
+          <a:lstStyle/>
           <a:p>
             <a:r>
               <a:rPr lang="en-US" sz="1800" b="1">
@@ -32892,7 +32841,7 @@
           <p:nvPr/>
         </p:nvPicPr>
         <p:blipFill>
-          <a:blip r:embed="rId5"/>
+          <a:blip r:embed="rId7"/>
           <a:stretch>
             <a:fillRect/>
           </a:stretch>
@@ -32916,7 +32865,7 @@
           <p:nvPr/>
         </p:nvPicPr>
         <p:blipFill>
-          <a:blip r:embed="rId6"/>
+          <a:blip r:embed="rId8"/>
           <a:stretch>
             <a:fillRect/>
           </a:stretch>
@@ -32940,7 +32889,7 @@
           <p:nvPr/>
         </p:nvPicPr>
         <p:blipFill>
-          <a:blip r:embed="rId7"/>
+          <a:blip r:embed="rId9"/>
           <a:stretch>
             <a:fillRect/>
           </a:stretch>
@@ -32969,7 +32918,7 @@
     <p:bg>
       <p:bgPr>
         <a:blipFill dpi="0" rotWithShape="1">
-          <a:blip r:embed="rId1"/>
+          <a:blip r:embed="rId4"/>
           <a:srcRect/>
           <a:stretch>
             <a:fillRect/>
@@ -33030,6 +32979,7 @@
             <a:pPr algn="ctr">
               <a:defRPr/>
             </a:pPr>
+            <a:endParaRPr/>
           </a:p>
         </p:txBody>
       </p:sp>
@@ -33088,18 +33038,18 @@
           </p:cNvPicPr>
           <p:nvPr>
             <p:custDataLst>
-              <p:tags r:id="rId2"/>
+              <p:tags r:id="rId1"/>
             </p:custDataLst>
           </p:nvPr>
         </p:nvPicPr>
         <p:blipFill>
-          <a:blip r:embed="rId3">
+          <a:blip r:embed="rId5">
             <a:extLst>
               <a:ext uri="{28A0092B-C50C-407E-A947-70E740481C1C}">
                 <a14:useLocalDpi xmlns:a14="http://schemas.microsoft.com/office/drawing/2010/main" val="0"/>
               </a:ext>
               <a:ext uri="{96DAC541-7B7A-43D3-8B79-37D633B846F1}">
-                <asvg:svgBlip xmlns:asvg="http://schemas.microsoft.com/office/drawing/2016/SVG/main" r:embed="rId4"/>
+                <asvg:svgBlip xmlns:asvg="http://schemas.microsoft.com/office/drawing/2016/SVG/main" r:embed="rId6"/>
               </a:ext>
             </a:extLst>
           </a:blip>
@@ -33184,6 +33134,7 @@
           <a:bodyPr wrap="square" rtlCol="0">
             <a:spAutoFit/>
           </a:bodyPr>
+          <a:lstStyle/>
           <a:p>
             <a:r>
               <a:rPr lang="en-US" altLang="zh-CN" sz="1800" b="1">
@@ -33218,14 +33169,6 @@
               </a:rPr>
               <a:t>numpy</a:t>
             </a:r>
-            <a:endParaRPr lang="en-US" altLang="zh-CN" sz="1800" b="1">
-              <a:solidFill>
-                <a:srgbClr val="FF8C00"/>
-              </a:solidFill>
-              <a:latin typeface="Noto Sans SC" panose="020B0200000000000000" charset="-122"/>
-              <a:ea typeface="Noto Sans SC" panose="020B0200000000000000" charset="-122"/>
-              <a:cs typeface="Noto Sans SC" panose="020B0200000000000000" charset="-122"/>
-            </a:endParaRPr>
           </a:p>
         </p:txBody>
       </p:sp>
@@ -33238,7 +33181,7 @@
           <p:nvPr/>
         </p:nvPicPr>
         <p:blipFill>
-          <a:blip r:embed="rId5"/>
+          <a:blip r:embed="rId7"/>
           <a:stretch>
             <a:fillRect/>
           </a:stretch>
@@ -33262,7 +33205,7 @@
           <p:nvPr/>
         </p:nvPicPr>
         <p:blipFill>
-          <a:blip r:embed="rId6"/>
+          <a:blip r:embed="rId8"/>
           <a:stretch>
             <a:fillRect/>
           </a:stretch>
@@ -33286,385 +33229,385 @@
 </file>
 
 <file path=ppt/tags/tag1.xml><?xml version="1.0" encoding="utf-8"?>
-<p:tagLst xmlns:p="http://schemas.openxmlformats.org/presentationml/2006/main">
+<p:tagLst xmlns:a="http://schemas.openxmlformats.org/drawingml/2006/main" xmlns:r="http://schemas.openxmlformats.org/officeDocument/2006/relationships" xmlns:p="http://schemas.openxmlformats.org/presentationml/2006/main">
   <p:tag name="KSO_WM_DIAGRAM_VIRTUALLY_FRAME" val="{&quot;height&quot;:100,&quot;left&quot;:80,&quot;top&quot;:335,&quot;width&quot;:800}"/>
 </p:tagLst>
 </file>
 
 <file path=ppt/tags/tag10.xml><?xml version="1.0" encoding="utf-8"?>
-<p:tagLst xmlns:p="http://schemas.openxmlformats.org/presentationml/2006/main">
+<p:tagLst xmlns:a="http://schemas.openxmlformats.org/drawingml/2006/main" xmlns:r="http://schemas.openxmlformats.org/officeDocument/2006/relationships" xmlns:p="http://schemas.openxmlformats.org/presentationml/2006/main">
   <p:tag name="KSO_WM_DIAGRAM_VIRTUALLY_FRAME" val="{&quot;height&quot;:355.7,&quot;left&quot;:49.6,&quot;top&quot;:126,&quot;width&quot;:420}"/>
 </p:tagLst>
 </file>
 
 <file path=ppt/tags/tag11.xml><?xml version="1.0" encoding="utf-8"?>
-<p:tagLst xmlns:p="http://schemas.openxmlformats.org/presentationml/2006/main">
+<p:tagLst xmlns:a="http://schemas.openxmlformats.org/drawingml/2006/main" xmlns:r="http://schemas.openxmlformats.org/officeDocument/2006/relationships" xmlns:p="http://schemas.openxmlformats.org/presentationml/2006/main">
   <p:tag name="KSO_WM_DIAGRAM_VIRTUALLY_FRAME" val="{&quot;height&quot;:355.7,&quot;left&quot;:49.6,&quot;top&quot;:126,&quot;width&quot;:420}"/>
 </p:tagLst>
 </file>
 
 <file path=ppt/tags/tag12.xml><?xml version="1.0" encoding="utf-8"?>
-<p:tagLst xmlns:p="http://schemas.openxmlformats.org/presentationml/2006/main">
+<p:tagLst xmlns:a="http://schemas.openxmlformats.org/drawingml/2006/main" xmlns:r="http://schemas.openxmlformats.org/officeDocument/2006/relationships" xmlns:p="http://schemas.openxmlformats.org/presentationml/2006/main">
   <p:tag name="KSO_WM_DIAGRAM_VIRTUALLY_FRAME" val="{&quot;height&quot;:355.7,&quot;left&quot;:49.6,&quot;top&quot;:126,&quot;width&quot;:420}"/>
 </p:tagLst>
 </file>
 
 <file path=ppt/tags/tag13.xml><?xml version="1.0" encoding="utf-8"?>
-<p:tagLst xmlns:p="http://schemas.openxmlformats.org/presentationml/2006/main">
+<p:tagLst xmlns:a="http://schemas.openxmlformats.org/drawingml/2006/main" xmlns:r="http://schemas.openxmlformats.org/officeDocument/2006/relationships" xmlns:p="http://schemas.openxmlformats.org/presentationml/2006/main">
   <p:tag name="KSO_WM_DIAGRAM_VIRTUALLY_FRAME" val="{&quot;height&quot;:355.7,&quot;left&quot;:49.6,&quot;top&quot;:126,&quot;width&quot;:420}"/>
 </p:tagLst>
 </file>
 
 <file path=ppt/tags/tag14.xml><?xml version="1.0" encoding="utf-8"?>
-<p:tagLst xmlns:p="http://schemas.openxmlformats.org/presentationml/2006/main">
+<p:tagLst xmlns:a="http://schemas.openxmlformats.org/drawingml/2006/main" xmlns:r="http://schemas.openxmlformats.org/officeDocument/2006/relationships" xmlns:p="http://schemas.openxmlformats.org/presentationml/2006/main">
   <p:tag name="KSO_WM_DIAGRAM_VIRTUALLY_FRAME" val="{&quot;height&quot;:355.7,&quot;left&quot;:49.6,&quot;top&quot;:126,&quot;width&quot;:420}"/>
 </p:tagLst>
 </file>
 
 <file path=ppt/tags/tag15.xml><?xml version="1.0" encoding="utf-8"?>
-<p:tagLst xmlns:p="http://schemas.openxmlformats.org/presentationml/2006/main">
+<p:tagLst xmlns:a="http://schemas.openxmlformats.org/drawingml/2006/main" xmlns:r="http://schemas.openxmlformats.org/officeDocument/2006/relationships" xmlns:p="http://schemas.openxmlformats.org/presentationml/2006/main">
   <p:tag name="KSO_WM_DIAGRAM_VIRTUALLY_FRAME" val="{&quot;height&quot;:355.7,&quot;left&quot;:49.6,&quot;top&quot;:126,&quot;width&quot;:420}"/>
 </p:tagLst>
 </file>
 
 <file path=ppt/tags/tag16.xml><?xml version="1.0" encoding="utf-8"?>
-<p:tagLst xmlns:p="http://schemas.openxmlformats.org/presentationml/2006/main">
+<p:tagLst xmlns:a="http://schemas.openxmlformats.org/drawingml/2006/main" xmlns:r="http://schemas.openxmlformats.org/officeDocument/2006/relationships" xmlns:p="http://schemas.openxmlformats.org/presentationml/2006/main">
   <p:tag name="KSO_WM_DIAGRAM_VIRTUALLY_FRAME" val="{&quot;height&quot;:355.7,&quot;left&quot;:49.6,&quot;top&quot;:126,&quot;width&quot;:420}"/>
 </p:tagLst>
 </file>
 
 <file path=ppt/tags/tag17.xml><?xml version="1.0" encoding="utf-8"?>
-<p:tagLst xmlns:p="http://schemas.openxmlformats.org/presentationml/2006/main">
+<p:tagLst xmlns:a="http://schemas.openxmlformats.org/drawingml/2006/main" xmlns:r="http://schemas.openxmlformats.org/officeDocument/2006/relationships" xmlns:p="http://schemas.openxmlformats.org/presentationml/2006/main">
   <p:tag name="KSO_WM_DIAGRAM_VIRTUALLY_FRAME" val="{&quot;height&quot;:355.7,&quot;left&quot;:49.6,&quot;top&quot;:126,&quot;width&quot;:420}"/>
 </p:tagLst>
 </file>
 
 <file path=ppt/tags/tag18.xml><?xml version="1.0" encoding="utf-8"?>
-<p:tagLst xmlns:p="http://schemas.openxmlformats.org/presentationml/2006/main">
+<p:tagLst xmlns:a="http://schemas.openxmlformats.org/drawingml/2006/main" xmlns:r="http://schemas.openxmlformats.org/officeDocument/2006/relationships" xmlns:p="http://schemas.openxmlformats.org/presentationml/2006/main">
   <p:tag name="KSO_WM_DIAGRAM_VIRTUALLY_FRAME" val="{&quot;height&quot;:355.7,&quot;left&quot;:49.6,&quot;top&quot;:126,&quot;width&quot;:420}"/>
 </p:tagLst>
 </file>
 
 <file path=ppt/tags/tag19.xml><?xml version="1.0" encoding="utf-8"?>
-<p:tagLst xmlns:p="http://schemas.openxmlformats.org/presentationml/2006/main">
+<p:tagLst xmlns:a="http://schemas.openxmlformats.org/drawingml/2006/main" xmlns:r="http://schemas.openxmlformats.org/officeDocument/2006/relationships" xmlns:p="http://schemas.openxmlformats.org/presentationml/2006/main">
   <p:tag name="KSO_WM_DIAGRAM_VIRTUALLY_FRAME" val="{&quot;height&quot;:289.4,&quot;left&quot;:60,&quot;top&quot;:210,&quot;width&quot;:838}"/>
 </p:tagLst>
 </file>
 
 <file path=ppt/tags/tag2.xml><?xml version="1.0" encoding="utf-8"?>
-<p:tagLst xmlns:p="http://schemas.openxmlformats.org/presentationml/2006/main">
+<p:tagLst xmlns:a="http://schemas.openxmlformats.org/drawingml/2006/main" xmlns:r="http://schemas.openxmlformats.org/officeDocument/2006/relationships" xmlns:p="http://schemas.openxmlformats.org/presentationml/2006/main">
   <p:tag name="KSO_WM_DIAGRAM_VIRTUALLY_FRAME" val="{&quot;height&quot;:100,&quot;left&quot;:80,&quot;top&quot;:335,&quot;width&quot;:800}"/>
 </p:tagLst>
 </file>
 
 <file path=ppt/tags/tag20.xml><?xml version="1.0" encoding="utf-8"?>
-<p:tagLst xmlns:p="http://schemas.openxmlformats.org/presentationml/2006/main">
+<p:tagLst xmlns:a="http://schemas.openxmlformats.org/drawingml/2006/main" xmlns:r="http://schemas.openxmlformats.org/officeDocument/2006/relationships" xmlns:p="http://schemas.openxmlformats.org/presentationml/2006/main">
   <p:tag name="KSO_WM_DIAGRAM_VIRTUALLY_FRAME" val="{&quot;height&quot;:289.4,&quot;left&quot;:60,&quot;top&quot;:210,&quot;width&quot;:838}"/>
 </p:tagLst>
 </file>
 
 <file path=ppt/tags/tag21.xml><?xml version="1.0" encoding="utf-8"?>
-<p:tagLst xmlns:p="http://schemas.openxmlformats.org/presentationml/2006/main">
+<p:tagLst xmlns:a="http://schemas.openxmlformats.org/drawingml/2006/main" xmlns:r="http://schemas.openxmlformats.org/officeDocument/2006/relationships" xmlns:p="http://schemas.openxmlformats.org/presentationml/2006/main">
   <p:tag name="KSO_WM_DIAGRAM_VIRTUALLY_FRAME" val="{&quot;height&quot;:289.4,&quot;left&quot;:60,&quot;top&quot;:210,&quot;width&quot;:838}"/>
 </p:tagLst>
 </file>
 
 <file path=ppt/tags/tag22.xml><?xml version="1.0" encoding="utf-8"?>
-<p:tagLst xmlns:p="http://schemas.openxmlformats.org/presentationml/2006/main">
+<p:tagLst xmlns:a="http://schemas.openxmlformats.org/drawingml/2006/main" xmlns:r="http://schemas.openxmlformats.org/officeDocument/2006/relationships" xmlns:p="http://schemas.openxmlformats.org/presentationml/2006/main">
   <p:tag name="KSO_WM_DIAGRAM_VIRTUALLY_FRAME" val="{&quot;height&quot;:289.4,&quot;left&quot;:60,&quot;top&quot;:210,&quot;width&quot;:838}"/>
 </p:tagLst>
 </file>
 
 <file path=ppt/tags/tag23.xml><?xml version="1.0" encoding="utf-8"?>
-<p:tagLst xmlns:p="http://schemas.openxmlformats.org/presentationml/2006/main">
+<p:tagLst xmlns:a="http://schemas.openxmlformats.org/drawingml/2006/main" xmlns:r="http://schemas.openxmlformats.org/officeDocument/2006/relationships" xmlns:p="http://schemas.openxmlformats.org/presentationml/2006/main">
   <p:tag name="KSO_WM_DIAGRAM_VIRTUALLY_FRAME" val="{&quot;height&quot;:289.4,&quot;left&quot;:60,&quot;top&quot;:210,&quot;width&quot;:838}"/>
 </p:tagLst>
 </file>
 
 <file path=ppt/tags/tag24.xml><?xml version="1.0" encoding="utf-8"?>
-<p:tagLst xmlns:p="http://schemas.openxmlformats.org/presentationml/2006/main">
+<p:tagLst xmlns:a="http://schemas.openxmlformats.org/drawingml/2006/main" xmlns:r="http://schemas.openxmlformats.org/officeDocument/2006/relationships" xmlns:p="http://schemas.openxmlformats.org/presentationml/2006/main">
   <p:tag name="KSO_WM_DIAGRAM_VIRTUALLY_FRAME" val="{&quot;height&quot;:289.4,&quot;left&quot;:60,&quot;top&quot;:210,&quot;width&quot;:838}"/>
 </p:tagLst>
 </file>
 
 <file path=ppt/tags/tag25.xml><?xml version="1.0" encoding="utf-8"?>
-<p:tagLst xmlns:p="http://schemas.openxmlformats.org/presentationml/2006/main">
+<p:tagLst xmlns:a="http://schemas.openxmlformats.org/drawingml/2006/main" xmlns:r="http://schemas.openxmlformats.org/officeDocument/2006/relationships" xmlns:p="http://schemas.openxmlformats.org/presentationml/2006/main">
   <p:tag name="KSO_WM_DIAGRAM_VIRTUALLY_FRAME" val="{&quot;height&quot;:289.4,&quot;left&quot;:60,&quot;top&quot;:210,&quot;width&quot;:838}"/>
 </p:tagLst>
 </file>
 
 <file path=ppt/tags/tag26.xml><?xml version="1.0" encoding="utf-8"?>
-<p:tagLst xmlns:p="http://schemas.openxmlformats.org/presentationml/2006/main">
+<p:tagLst xmlns:a="http://schemas.openxmlformats.org/drawingml/2006/main" xmlns:r="http://schemas.openxmlformats.org/officeDocument/2006/relationships" xmlns:p="http://schemas.openxmlformats.org/presentationml/2006/main">
   <p:tag name="KSO_WM_DIAGRAM_VIRTUALLY_FRAME" val="{&quot;height&quot;:289.4,&quot;left&quot;:60,&quot;top&quot;:210,&quot;width&quot;:838}"/>
 </p:tagLst>
 </file>
 
 <file path=ppt/tags/tag27.xml><?xml version="1.0" encoding="utf-8"?>
-<p:tagLst xmlns:p="http://schemas.openxmlformats.org/presentationml/2006/main">
+<p:tagLst xmlns:a="http://schemas.openxmlformats.org/drawingml/2006/main" xmlns:r="http://schemas.openxmlformats.org/officeDocument/2006/relationships" xmlns:p="http://schemas.openxmlformats.org/presentationml/2006/main">
   <p:tag name="KSO_WM_DIAGRAM_VIRTUALLY_FRAME" val="{&quot;height&quot;:289.4,&quot;left&quot;:60,&quot;top&quot;:210,&quot;width&quot;:838}"/>
 </p:tagLst>
 </file>
 
 <file path=ppt/tags/tag28.xml><?xml version="1.0" encoding="utf-8"?>
-<p:tagLst xmlns:p="http://schemas.openxmlformats.org/presentationml/2006/main">
+<p:tagLst xmlns:a="http://schemas.openxmlformats.org/drawingml/2006/main" xmlns:r="http://schemas.openxmlformats.org/officeDocument/2006/relationships" xmlns:p="http://schemas.openxmlformats.org/presentationml/2006/main">
   <p:tag name="KSO_WM_DIAGRAM_VIRTUALLY_FRAME" val="{&quot;height&quot;:289.4,&quot;left&quot;:60,&quot;top&quot;:210,&quot;width&quot;:838}"/>
 </p:tagLst>
 </file>
 
 <file path=ppt/tags/tag29.xml><?xml version="1.0" encoding="utf-8"?>
-<p:tagLst xmlns:p="http://schemas.openxmlformats.org/presentationml/2006/main">
+<p:tagLst xmlns:a="http://schemas.openxmlformats.org/drawingml/2006/main" xmlns:r="http://schemas.openxmlformats.org/officeDocument/2006/relationships" xmlns:p="http://schemas.openxmlformats.org/presentationml/2006/main">
   <p:tag name="KSO_WM_DIAGRAM_VIRTUALLY_FRAME" val="{&quot;height&quot;:289.4,&quot;left&quot;:60,&quot;top&quot;:210,&quot;width&quot;:838}"/>
 </p:tagLst>
 </file>
 
 <file path=ppt/tags/tag3.xml><?xml version="1.0" encoding="utf-8"?>
-<p:tagLst xmlns:p="http://schemas.openxmlformats.org/presentationml/2006/main">
+<p:tagLst xmlns:a="http://schemas.openxmlformats.org/drawingml/2006/main" xmlns:r="http://schemas.openxmlformats.org/officeDocument/2006/relationships" xmlns:p="http://schemas.openxmlformats.org/presentationml/2006/main">
   <p:tag name="KSO_WM_DIAGRAM_VIRTUALLY_FRAME" val="{&quot;height&quot;:100,&quot;left&quot;:80,&quot;top&quot;:335,&quot;width&quot;:800}"/>
 </p:tagLst>
 </file>
 
 <file path=ppt/tags/tag30.xml><?xml version="1.0" encoding="utf-8"?>
-<p:tagLst xmlns:p="http://schemas.openxmlformats.org/presentationml/2006/main">
+<p:tagLst xmlns:a="http://schemas.openxmlformats.org/drawingml/2006/main" xmlns:r="http://schemas.openxmlformats.org/officeDocument/2006/relationships" xmlns:p="http://schemas.openxmlformats.org/presentationml/2006/main">
   <p:tag name="KSO_WM_DIAGRAM_VIRTUALLY_FRAME" val="{&quot;height&quot;:289.4,&quot;left&quot;:60,&quot;top&quot;:210,&quot;width&quot;:838}"/>
 </p:tagLst>
 </file>
 
 <file path=ppt/tags/tag31.xml><?xml version="1.0" encoding="utf-8"?>
-<p:tagLst xmlns:p="http://schemas.openxmlformats.org/presentationml/2006/main">
+<p:tagLst xmlns:a="http://schemas.openxmlformats.org/drawingml/2006/main" xmlns:r="http://schemas.openxmlformats.org/officeDocument/2006/relationships" xmlns:p="http://schemas.openxmlformats.org/presentationml/2006/main">
   <p:tag name="KSO_WM_DIAGRAM_VIRTUALLY_FRAME" val="{&quot;height&quot;:321.8,&quot;left&quot;:32.1,&quot;top&quot;:107,&quot;width&quot;:448.65}"/>
 </p:tagLst>
 </file>
 
 <file path=ppt/tags/tag32.xml><?xml version="1.0" encoding="utf-8"?>
-<p:tagLst xmlns:p="http://schemas.openxmlformats.org/presentationml/2006/main">
+<p:tagLst xmlns:a="http://schemas.openxmlformats.org/drawingml/2006/main" xmlns:r="http://schemas.openxmlformats.org/officeDocument/2006/relationships" xmlns:p="http://schemas.openxmlformats.org/presentationml/2006/main">
   <p:tag name="KSO_WM_DIAGRAM_VIRTUALLY_FRAME" val="{&quot;height&quot;:316.8,&quot;left&quot;:60,&quot;top&quot;:16,&quot;width&quot;:424}"/>
 </p:tagLst>
 </file>
 
 <file path=ppt/tags/tag33.xml><?xml version="1.0" encoding="utf-8"?>
-<p:tagLst xmlns:p="http://schemas.openxmlformats.org/presentationml/2006/main">
+<p:tagLst xmlns:a="http://schemas.openxmlformats.org/drawingml/2006/main" xmlns:r="http://schemas.openxmlformats.org/officeDocument/2006/relationships" xmlns:p="http://schemas.openxmlformats.org/presentationml/2006/main">
   <p:tag name="KSO_WM_DIAGRAM_VIRTUALLY_FRAME" val="{&quot;height&quot;:316.8,&quot;left&quot;:55.95,&quot;top&quot;:16,&quot;width&quot;:428.05}"/>
 </p:tagLst>
 </file>
 
 <file path=ppt/tags/tag34.xml><?xml version="1.0" encoding="utf-8"?>
-<p:tagLst xmlns:p="http://schemas.openxmlformats.org/presentationml/2006/main">
+<p:tagLst xmlns:a="http://schemas.openxmlformats.org/drawingml/2006/main" xmlns:r="http://schemas.openxmlformats.org/officeDocument/2006/relationships" xmlns:p="http://schemas.openxmlformats.org/presentationml/2006/main">
   <p:tag name="KSO_WM_DIAGRAM_VIRTUALLY_FRAME" val="{&quot;height&quot;:321.8,&quot;left&quot;:32.1,&quot;top&quot;:107,&quot;width&quot;:448.65}"/>
 </p:tagLst>
 </file>
 
 <file path=ppt/tags/tag35.xml><?xml version="1.0" encoding="utf-8"?>
-<p:tagLst xmlns:p="http://schemas.openxmlformats.org/presentationml/2006/main">
+<p:tagLst xmlns:a="http://schemas.openxmlformats.org/drawingml/2006/main" xmlns:r="http://schemas.openxmlformats.org/officeDocument/2006/relationships" xmlns:p="http://schemas.openxmlformats.org/presentationml/2006/main">
   <p:tag name="KSO_WM_DIAGRAM_VIRTUALLY_FRAME" val="{&quot;height&quot;:321.8,&quot;left&quot;:32.1,&quot;top&quot;:107,&quot;width&quot;:448.65}"/>
 </p:tagLst>
 </file>
 
 <file path=ppt/tags/tag36.xml><?xml version="1.0" encoding="utf-8"?>
-<p:tagLst xmlns:p="http://schemas.openxmlformats.org/presentationml/2006/main">
+<p:tagLst xmlns:a="http://schemas.openxmlformats.org/drawingml/2006/main" xmlns:r="http://schemas.openxmlformats.org/officeDocument/2006/relationships" xmlns:p="http://schemas.openxmlformats.org/presentationml/2006/main">
   <p:tag name="KSO_WM_DIAGRAM_VIRTUALLY_FRAME" val="{&quot;height&quot;:169.4,&quot;left&quot;:500,&quot;top&quot;:319.95,&quot;width&quot;:400}"/>
 </p:tagLst>
 </file>
 
 <file path=ppt/tags/tag37.xml><?xml version="1.0" encoding="utf-8"?>
-<p:tagLst xmlns:p="http://schemas.openxmlformats.org/presentationml/2006/main">
+<p:tagLst xmlns:a="http://schemas.openxmlformats.org/drawingml/2006/main" xmlns:r="http://schemas.openxmlformats.org/officeDocument/2006/relationships" xmlns:p="http://schemas.openxmlformats.org/presentationml/2006/main">
   <p:tag name="KSO_WM_DIAGRAM_VIRTUALLY_FRAME" val="{&quot;height&quot;:169.4,&quot;left&quot;:500,&quot;top&quot;:319.95,&quot;width&quot;:400}"/>
 </p:tagLst>
 </file>
 
 <file path=ppt/tags/tag38.xml><?xml version="1.0" encoding="utf-8"?>
-<p:tagLst xmlns:p="http://schemas.openxmlformats.org/presentationml/2006/main">
+<p:tagLst xmlns:a="http://schemas.openxmlformats.org/drawingml/2006/main" xmlns:r="http://schemas.openxmlformats.org/officeDocument/2006/relationships" xmlns:p="http://schemas.openxmlformats.org/presentationml/2006/main">
   <p:tag name="KSO_WM_DIAGRAM_VIRTUALLY_FRAME" val="{&quot;height&quot;:169.4,&quot;left&quot;:500,&quot;top&quot;:319.95,&quot;width&quot;:400}"/>
 </p:tagLst>
 </file>
 
 <file path=ppt/tags/tag39.xml><?xml version="1.0" encoding="utf-8"?>
-<p:tagLst xmlns:p="http://schemas.openxmlformats.org/presentationml/2006/main">
+<p:tagLst xmlns:a="http://schemas.openxmlformats.org/drawingml/2006/main" xmlns:r="http://schemas.openxmlformats.org/officeDocument/2006/relationships" xmlns:p="http://schemas.openxmlformats.org/presentationml/2006/main">
   <p:tag name="KSO_WM_DIAGRAM_VIRTUALLY_FRAME" val="{&quot;height&quot;:169.4,&quot;left&quot;:500,&quot;top&quot;:319.95,&quot;width&quot;:400}"/>
 </p:tagLst>
 </file>
 
 <file path=ppt/tags/tag4.xml><?xml version="1.0" encoding="utf-8"?>
-<p:tagLst xmlns:p="http://schemas.openxmlformats.org/presentationml/2006/main">
+<p:tagLst xmlns:a="http://schemas.openxmlformats.org/drawingml/2006/main" xmlns:r="http://schemas.openxmlformats.org/officeDocument/2006/relationships" xmlns:p="http://schemas.openxmlformats.org/presentationml/2006/main">
   <p:tag name="KSO_WM_DIAGRAM_VIRTUALLY_FRAME" val="{&quot;height&quot;:100,&quot;left&quot;:80,&quot;top&quot;:335,&quot;width&quot;:800}"/>
 </p:tagLst>
 </file>
 
 <file path=ppt/tags/tag40.xml><?xml version="1.0" encoding="utf-8"?>
-<p:tagLst xmlns:p="http://schemas.openxmlformats.org/presentationml/2006/main">
+<p:tagLst xmlns:a="http://schemas.openxmlformats.org/drawingml/2006/main" xmlns:r="http://schemas.openxmlformats.org/officeDocument/2006/relationships" xmlns:p="http://schemas.openxmlformats.org/presentationml/2006/main">
   <p:tag name="KSO_WM_DIAGRAM_VIRTUALLY_FRAME" val="{&quot;height&quot;:169.4,&quot;left&quot;:500,&quot;top&quot;:319.95,&quot;width&quot;:400}"/>
 </p:tagLst>
 </file>
 
 <file path=ppt/tags/tag41.xml><?xml version="1.0" encoding="utf-8"?>
-<p:tagLst xmlns:p="http://schemas.openxmlformats.org/presentationml/2006/main">
+<p:tagLst xmlns:a="http://schemas.openxmlformats.org/drawingml/2006/main" xmlns:r="http://schemas.openxmlformats.org/officeDocument/2006/relationships" xmlns:p="http://schemas.openxmlformats.org/presentationml/2006/main">
   <p:tag name="KSO_WM_DIAGRAM_VIRTUALLY_FRAME" val="{&quot;height&quot;:169.4,&quot;left&quot;:500,&quot;top&quot;:319.95,&quot;width&quot;:400}"/>
 </p:tagLst>
 </file>
 
 <file path=ppt/tags/tag42.xml><?xml version="1.0" encoding="utf-8"?>
-<p:tagLst xmlns:p="http://schemas.openxmlformats.org/presentationml/2006/main">
+<p:tagLst xmlns:a="http://schemas.openxmlformats.org/drawingml/2006/main" xmlns:r="http://schemas.openxmlformats.org/officeDocument/2006/relationships" xmlns:p="http://schemas.openxmlformats.org/presentationml/2006/main">
   <p:tag name="KSO_WM_DIAGRAM_VIRTUALLY_FRAME" val="{&quot;height&quot;:169.4,&quot;left&quot;:500,&quot;top&quot;:319.95,&quot;width&quot;:400}"/>
 </p:tagLst>
 </file>
 
 <file path=ppt/tags/tag43.xml><?xml version="1.0" encoding="utf-8"?>
-<p:tagLst xmlns:p="http://schemas.openxmlformats.org/presentationml/2006/main">
+<p:tagLst xmlns:a="http://schemas.openxmlformats.org/drawingml/2006/main" xmlns:r="http://schemas.openxmlformats.org/officeDocument/2006/relationships" xmlns:p="http://schemas.openxmlformats.org/presentationml/2006/main">
   <p:tag name="KSO_WM_DIAGRAM_VIRTUALLY_FRAME" val="{&quot;height&quot;:169.4,&quot;left&quot;:500,&quot;top&quot;:319.95,&quot;width&quot;:400}"/>
 </p:tagLst>
 </file>
 
 <file path=ppt/tags/tag44.xml><?xml version="1.0" encoding="utf-8"?>
-<p:tagLst xmlns:p="http://schemas.openxmlformats.org/presentationml/2006/main">
+<p:tagLst xmlns:a="http://schemas.openxmlformats.org/drawingml/2006/main" xmlns:r="http://schemas.openxmlformats.org/officeDocument/2006/relationships" xmlns:p="http://schemas.openxmlformats.org/presentationml/2006/main">
   <p:tag name="KSO_WM_DIAGRAM_VIRTUALLY_FRAME" val="{&quot;height&quot;:169.4,&quot;left&quot;:500,&quot;top&quot;:319.95,&quot;width&quot;:400}"/>
 </p:tagLst>
 </file>
 
 <file path=ppt/tags/tag45.xml><?xml version="1.0" encoding="utf-8"?>
-<p:tagLst xmlns:p="http://schemas.openxmlformats.org/presentationml/2006/main">
+<p:tagLst xmlns:a="http://schemas.openxmlformats.org/drawingml/2006/main" xmlns:r="http://schemas.openxmlformats.org/officeDocument/2006/relationships" xmlns:p="http://schemas.openxmlformats.org/presentationml/2006/main">
   <p:tag name="KSO_WM_DIAGRAM_VIRTUALLY_FRAME" val="{&quot;height&quot;:169.4,&quot;left&quot;:500,&quot;top&quot;:319.95,&quot;width&quot;:400}"/>
 </p:tagLst>
 </file>
 
 <file path=ppt/tags/tag46.xml><?xml version="1.0" encoding="utf-8"?>
-<p:tagLst xmlns:p="http://schemas.openxmlformats.org/presentationml/2006/main">
+<p:tagLst xmlns:a="http://schemas.openxmlformats.org/drawingml/2006/main" xmlns:r="http://schemas.openxmlformats.org/officeDocument/2006/relationships" xmlns:p="http://schemas.openxmlformats.org/presentationml/2006/main">
   <p:tag name="KSO_WM_DIAGRAM_VIRTUALLY_FRAME" val="{&quot;height&quot;:169.4,&quot;left&quot;:500,&quot;top&quot;:319.95,&quot;width&quot;:400}"/>
 </p:tagLst>
 </file>
 
 <file path=ppt/tags/tag47.xml><?xml version="1.0" encoding="utf-8"?>
-<p:tagLst xmlns:p="http://schemas.openxmlformats.org/presentationml/2006/main">
+<p:tagLst xmlns:a="http://schemas.openxmlformats.org/drawingml/2006/main" xmlns:r="http://schemas.openxmlformats.org/officeDocument/2006/relationships" xmlns:p="http://schemas.openxmlformats.org/presentationml/2006/main">
   <p:tag name="KSO_WM_DIAGRAM_VIRTUALLY_FRAME" val="{&quot;height&quot;:169.4,&quot;left&quot;:500,&quot;top&quot;:319.95,&quot;width&quot;:400}"/>
 </p:tagLst>
 </file>
 
 <file path=ppt/tags/tag48.xml><?xml version="1.0" encoding="utf-8"?>
-<p:tagLst xmlns:p="http://schemas.openxmlformats.org/presentationml/2006/main">
+<p:tagLst xmlns:a="http://schemas.openxmlformats.org/drawingml/2006/main" xmlns:r="http://schemas.openxmlformats.org/officeDocument/2006/relationships" xmlns:p="http://schemas.openxmlformats.org/presentationml/2006/main">
   <p:tag name="KSO_WM_DIAGRAM_VIRTUALLY_FRAME" val="{&quot;height&quot;:360,&quot;left&quot;:60,&quot;top&quot;:130,&quot;width&quot;:440}"/>
 </p:tagLst>
 </file>
 
 <file path=ppt/tags/tag49.xml><?xml version="1.0" encoding="utf-8"?>
-<p:tagLst xmlns:p="http://schemas.openxmlformats.org/presentationml/2006/main">
+<p:tagLst xmlns:a="http://schemas.openxmlformats.org/drawingml/2006/main" xmlns:r="http://schemas.openxmlformats.org/officeDocument/2006/relationships" xmlns:p="http://schemas.openxmlformats.org/presentationml/2006/main">
   <p:tag name="KSO_WM_DIAGRAM_VIRTUALLY_FRAME" val="{&quot;height&quot;:360,&quot;left&quot;:60,&quot;top&quot;:130,&quot;width&quot;:440}"/>
 </p:tagLst>
 </file>
 
 <file path=ppt/tags/tag5.xml><?xml version="1.0" encoding="utf-8"?>
-<p:tagLst xmlns:p="http://schemas.openxmlformats.org/presentationml/2006/main">
+<p:tagLst xmlns:a="http://schemas.openxmlformats.org/drawingml/2006/main" xmlns:r="http://schemas.openxmlformats.org/officeDocument/2006/relationships" xmlns:p="http://schemas.openxmlformats.org/presentationml/2006/main">
   <p:tag name="KSO_WM_DIAGRAM_VIRTUALLY_FRAME" val="{&quot;height&quot;:100,&quot;left&quot;:80,&quot;top&quot;:335,&quot;width&quot;:800}"/>
 </p:tagLst>
 </file>
 
 <file path=ppt/tags/tag50.xml><?xml version="1.0" encoding="utf-8"?>
-<p:tagLst xmlns:p="http://schemas.openxmlformats.org/presentationml/2006/main">
+<p:tagLst xmlns:a="http://schemas.openxmlformats.org/drawingml/2006/main" xmlns:r="http://schemas.openxmlformats.org/officeDocument/2006/relationships" xmlns:p="http://schemas.openxmlformats.org/presentationml/2006/main">
   <p:tag name="KSO_WM_DIAGRAM_VIRTUALLY_FRAME" val="{&quot;height&quot;:360,&quot;left&quot;:60,&quot;top&quot;:130,&quot;width&quot;:440}"/>
 </p:tagLst>
 </file>
 
 <file path=ppt/tags/tag51.xml><?xml version="1.0" encoding="utf-8"?>
-<p:tagLst xmlns:p="http://schemas.openxmlformats.org/presentationml/2006/main">
+<p:tagLst xmlns:a="http://schemas.openxmlformats.org/drawingml/2006/main" xmlns:r="http://schemas.openxmlformats.org/officeDocument/2006/relationships" xmlns:p="http://schemas.openxmlformats.org/presentationml/2006/main">
   <p:tag name="KSO_WM_DIAGRAM_VIRTUALLY_FRAME" val="{&quot;height&quot;:360,&quot;left&quot;:60,&quot;top&quot;:130,&quot;width&quot;:440}"/>
 </p:tagLst>
 </file>
 
 <file path=ppt/tags/tag52.xml><?xml version="1.0" encoding="utf-8"?>
-<p:tagLst xmlns:p="http://schemas.openxmlformats.org/presentationml/2006/main">
+<p:tagLst xmlns:a="http://schemas.openxmlformats.org/drawingml/2006/main" xmlns:r="http://schemas.openxmlformats.org/officeDocument/2006/relationships" xmlns:p="http://schemas.openxmlformats.org/presentationml/2006/main">
   <p:tag name="KSO_WM_DIAGRAM_VIRTUALLY_FRAME" val="{&quot;height&quot;:360,&quot;left&quot;:60,&quot;top&quot;:130,&quot;width&quot;:440}"/>
 </p:tagLst>
 </file>
 
 <file path=ppt/tags/tag53.xml><?xml version="1.0" encoding="utf-8"?>
-<p:tagLst xmlns:p="http://schemas.openxmlformats.org/presentationml/2006/main">
+<p:tagLst xmlns:a="http://schemas.openxmlformats.org/drawingml/2006/main" xmlns:r="http://schemas.openxmlformats.org/officeDocument/2006/relationships" xmlns:p="http://schemas.openxmlformats.org/presentationml/2006/main">
   <p:tag name="KSO_WM_DIAGRAM_VIRTUALLY_FRAME" val="{&quot;height&quot;:360,&quot;left&quot;:60,&quot;top&quot;:130,&quot;width&quot;:440}"/>
 </p:tagLst>
 </file>
 
 <file path=ppt/tags/tag54.xml><?xml version="1.0" encoding="utf-8"?>
-<p:tagLst xmlns:p="http://schemas.openxmlformats.org/presentationml/2006/main">
+<p:tagLst xmlns:a="http://schemas.openxmlformats.org/drawingml/2006/main" xmlns:r="http://schemas.openxmlformats.org/officeDocument/2006/relationships" xmlns:p="http://schemas.openxmlformats.org/presentationml/2006/main">
   <p:tag name="KSO_WM_DIAGRAM_VIRTUALLY_FRAME" val="{&quot;height&quot;:360,&quot;left&quot;:60,&quot;top&quot;:130,&quot;width&quot;:440}"/>
 </p:tagLst>
 </file>
 
 <file path=ppt/tags/tag55.xml><?xml version="1.0" encoding="utf-8"?>
-<p:tagLst xmlns:p="http://schemas.openxmlformats.org/presentationml/2006/main">
+<p:tagLst xmlns:a="http://schemas.openxmlformats.org/drawingml/2006/main" xmlns:r="http://schemas.openxmlformats.org/officeDocument/2006/relationships" xmlns:p="http://schemas.openxmlformats.org/presentationml/2006/main">
   <p:tag name="KSO_WM_DIAGRAM_VIRTUALLY_FRAME" val="{&quot;height&quot;:360,&quot;left&quot;:60,&quot;top&quot;:130,&quot;width&quot;:440}"/>
 </p:tagLst>
 </file>
 
 <file path=ppt/tags/tag56.xml><?xml version="1.0" encoding="utf-8"?>
-<p:tagLst xmlns:p="http://schemas.openxmlformats.org/presentationml/2006/main">
+<p:tagLst xmlns:a="http://schemas.openxmlformats.org/drawingml/2006/main" xmlns:r="http://schemas.openxmlformats.org/officeDocument/2006/relationships" xmlns:p="http://schemas.openxmlformats.org/presentationml/2006/main">
   <p:tag name="KSO_WM_DIAGRAM_VIRTUALLY_FRAME" val="{&quot;height&quot;:375.4,&quot;left&quot;:80,&quot;top&quot;:59.6,&quot;width&quot;:838.9}"/>
 </p:tagLst>
 </file>
 
 <file path=ppt/tags/tag57.xml><?xml version="1.0" encoding="utf-8"?>
-<p:tagLst xmlns:p="http://schemas.openxmlformats.org/presentationml/2006/main">
+<p:tagLst xmlns:a="http://schemas.openxmlformats.org/drawingml/2006/main" xmlns:r="http://schemas.openxmlformats.org/officeDocument/2006/relationships" xmlns:p="http://schemas.openxmlformats.org/presentationml/2006/main">
   <p:tag name="KSO_WM_DIAGRAM_VIRTUALLY_FRAME" val="{&quot;height&quot;:375.4,&quot;left&quot;:80,&quot;top&quot;:59.6,&quot;width&quot;:838.9}"/>
 </p:tagLst>
 </file>
 
 <file path=ppt/tags/tag58.xml><?xml version="1.0" encoding="utf-8"?>
-<p:tagLst xmlns:p="http://schemas.openxmlformats.org/presentationml/2006/main">
+<p:tagLst xmlns:a="http://schemas.openxmlformats.org/drawingml/2006/main" xmlns:r="http://schemas.openxmlformats.org/officeDocument/2006/relationships" xmlns:p="http://schemas.openxmlformats.org/presentationml/2006/main">
   <p:tag name="KSO_WM_DIAGRAM_VIRTUALLY_FRAME" val="{&quot;height&quot;:375.4,&quot;left&quot;:80,&quot;top&quot;:59.6,&quot;width&quot;:838.9}"/>
 </p:tagLst>
 </file>
 
 <file path=ppt/tags/tag59.xml><?xml version="1.0" encoding="utf-8"?>
-<p:tagLst xmlns:p="http://schemas.openxmlformats.org/presentationml/2006/main">
+<p:tagLst xmlns:a="http://schemas.openxmlformats.org/drawingml/2006/main" xmlns:r="http://schemas.openxmlformats.org/officeDocument/2006/relationships" xmlns:p="http://schemas.openxmlformats.org/presentationml/2006/main">
   <p:tag name="KSO_WM_DIAGRAM_VIRTUALLY_FRAME" val="{&quot;height&quot;:375.4,&quot;left&quot;:80,&quot;top&quot;:59.6,&quot;width&quot;:838.9}"/>
 </p:tagLst>
 </file>
 
 <file path=ppt/tags/tag6.xml><?xml version="1.0" encoding="utf-8"?>
-<p:tagLst xmlns:p="http://schemas.openxmlformats.org/presentationml/2006/main">
+<p:tagLst xmlns:a="http://schemas.openxmlformats.org/drawingml/2006/main" xmlns:r="http://schemas.openxmlformats.org/officeDocument/2006/relationships" xmlns:p="http://schemas.openxmlformats.org/presentationml/2006/main">
   <p:tag name="KSO_WM_DIAGRAM_VIRTUALLY_FRAME" val="{&quot;height&quot;:100,&quot;left&quot;:80,&quot;top&quot;:335,&quot;width&quot;:800}"/>
 </p:tagLst>
 </file>
 
 <file path=ppt/tags/tag60.xml><?xml version="1.0" encoding="utf-8"?>
-<p:tagLst xmlns:p="http://schemas.openxmlformats.org/presentationml/2006/main">
+<p:tagLst xmlns:a="http://schemas.openxmlformats.org/drawingml/2006/main" xmlns:r="http://schemas.openxmlformats.org/officeDocument/2006/relationships" xmlns:p="http://schemas.openxmlformats.org/presentationml/2006/main">
   <p:tag name="KSO_WM_DIAGRAM_VIRTUALLY_FRAME" val="{&quot;height&quot;:375.4,&quot;left&quot;:80,&quot;top&quot;:59.6,&quot;width&quot;:838.9}"/>
 </p:tagLst>
 </file>
 
 <file path=ppt/tags/tag61.xml><?xml version="1.0" encoding="utf-8"?>
-<p:tagLst xmlns:p="http://schemas.openxmlformats.org/presentationml/2006/main">
+<p:tagLst xmlns:a="http://schemas.openxmlformats.org/drawingml/2006/main" xmlns:r="http://schemas.openxmlformats.org/officeDocument/2006/relationships" xmlns:p="http://schemas.openxmlformats.org/presentationml/2006/main">
   <p:tag name="KSO_WM_DIAGRAM_VIRTUALLY_FRAME" val="{&quot;height&quot;:375.4,&quot;left&quot;:80,&quot;top&quot;:59.6,&quot;width&quot;:838.9}"/>
 </p:tagLst>
 </file>
 
 <file path=ppt/tags/tag62.xml><?xml version="1.0" encoding="utf-8"?>
-<p:tagLst xmlns:p="http://schemas.openxmlformats.org/presentationml/2006/main">
+<p:tagLst xmlns:a="http://schemas.openxmlformats.org/drawingml/2006/main" xmlns:r="http://schemas.openxmlformats.org/officeDocument/2006/relationships" xmlns:p="http://schemas.openxmlformats.org/presentationml/2006/main">
   <p:tag name="KSO_WM_DIAGRAM_VIRTUALLY_FRAME" val="{&quot;height&quot;:100,&quot;left&quot;:80,&quot;top&quot;:335,&quot;width&quot;:800}"/>
 </p:tagLst>
 </file>
 
 <file path=ppt/tags/tag63.xml><?xml version="1.0" encoding="utf-8"?>
-<p:tagLst xmlns:p="http://schemas.openxmlformats.org/presentationml/2006/main">
+<p:tagLst xmlns:a="http://schemas.openxmlformats.org/drawingml/2006/main" xmlns:r="http://schemas.openxmlformats.org/officeDocument/2006/relationships" xmlns:p="http://schemas.openxmlformats.org/presentationml/2006/main">
   <p:tag name="KSO_WM_DIAGRAM_VIRTUALLY_FRAME" val="{&quot;height&quot;:100,&quot;left&quot;:80,&quot;top&quot;:335,&quot;width&quot;:800}"/>
 </p:tagLst>
 </file>
 
 <file path=ppt/tags/tag64.xml><?xml version="1.0" encoding="utf-8"?>
-<p:tagLst xmlns:p="http://schemas.openxmlformats.org/presentationml/2006/main">
+<p:tagLst xmlns:a="http://schemas.openxmlformats.org/drawingml/2006/main" xmlns:r="http://schemas.openxmlformats.org/officeDocument/2006/relationships" xmlns:p="http://schemas.openxmlformats.org/presentationml/2006/main">
   <p:tag name="KSO_WM_DIAGRAM_VIRTUALLY_FRAME" val="{&quot;height&quot;:100,&quot;left&quot;:80,&quot;top&quot;:335,&quot;width&quot;:800}"/>
 </p:tagLst>
 </file>
 
 <file path=ppt/tags/tag7.xml><?xml version="1.0" encoding="utf-8"?>
-<p:tagLst xmlns:p="http://schemas.openxmlformats.org/presentationml/2006/main">
+<p:tagLst xmlns:a="http://schemas.openxmlformats.org/drawingml/2006/main" xmlns:r="http://schemas.openxmlformats.org/officeDocument/2006/relationships" xmlns:p="http://schemas.openxmlformats.org/presentationml/2006/main">
   <p:tag name="KSO_WM_DIAGRAM_VIRTUALLY_FRAME" val="{&quot;height&quot;:100,&quot;left&quot;:80,&quot;top&quot;:335,&quot;width&quot;:800}"/>
 </p:tagLst>
 </file>
 
 <file path=ppt/tags/tag8.xml><?xml version="1.0" encoding="utf-8"?>
-<p:tagLst xmlns:p="http://schemas.openxmlformats.org/presentationml/2006/main">
+<p:tagLst xmlns:a="http://schemas.openxmlformats.org/drawingml/2006/main" xmlns:r="http://schemas.openxmlformats.org/officeDocument/2006/relationships" xmlns:p="http://schemas.openxmlformats.org/presentationml/2006/main">
   <p:tag name="KSO_WM_DIAGRAM_VIRTUALLY_FRAME" val="{&quot;height&quot;:100,&quot;left&quot;:80,&quot;top&quot;:335,&quot;width&quot;:800}"/>
 </p:tagLst>
 </file>
 
 <file path=ppt/tags/tag9.xml><?xml version="1.0" encoding="utf-8"?>
-<p:tagLst xmlns:p="http://schemas.openxmlformats.org/presentationml/2006/main">
+<p:tagLst xmlns:a="http://schemas.openxmlformats.org/drawingml/2006/main" xmlns:r="http://schemas.openxmlformats.org/officeDocument/2006/relationships" xmlns:p="http://schemas.openxmlformats.org/presentationml/2006/main">
   <p:tag name="KSO_WM_DIAGRAM_VIRTUALLY_FRAME" val="{&quot;height&quot;:100,&quot;left&quot;:80,&quot;top&quot;:335,&quot;width&quot;:800}"/>
 </p:tagLst>
 </file>
@@ -33945,6 +33888,8 @@
       </a:bgFillStyleLst>
     </a:fmtScheme>
   </a:themeElements>
+  <a:objectDefaults/>
+  <a:extraClrSchemeLst/>
   <a:extLst>
     <a:ext uri="{05A4C25C-085E-4340-85A3-A5531E510DB2}">
       <thm15:themeFamily xmlns:thm15="http://schemas.microsoft.com/office/thememl/2012/main" name="Office Theme" id="{62F939B6-93AF-4DB8-9C6B-D6C7DFDC589F}" vid="{4A3C46E8-61CC-4603-A589-7422A47A8E4A}"/>
@@ -34229,6 +34174,8 @@
       </a:bgFillStyleLst>
     </a:fmtScheme>
   </a:themeElements>
+  <a:objectDefaults/>
+  <a:extraClrSchemeLst/>
   <a:extLst>
     <a:ext uri="{05A4C25C-085E-4340-85A3-A5531E510DB2}">
       <thm15:themeFamily xmlns:thm15="http://schemas.microsoft.com/office/thememl/2012/main" name="Office Theme" id="{62F939B6-93AF-4DB8-9C6B-D6C7DFDC589F}" vid="{4A3C46E8-61CC-4603-A589-7422A47A8E4A}"/>
@@ -34513,6 +34460,8 @@
       </a:bgFillStyleLst>
     </a:fmtScheme>
   </a:themeElements>
+  <a:objectDefaults/>
+  <a:extraClrSchemeLst/>
   <a:extLst>
     <a:ext uri="{05A4C25C-085E-4340-85A3-A5531E510DB2}">
       <thm15:themeFamily xmlns:thm15="http://schemas.microsoft.com/office/thememl/2012/main" name="Office Theme" id="{62F939B6-93AF-4DB8-9C6B-D6C7DFDC589F}" vid="{4A3C46E8-61CC-4603-A589-7422A47A8E4A}"/>
@@ -34797,6 +34746,8 @@
       </a:bgFillStyleLst>
     </a:fmtScheme>
   </a:themeElements>
+  <a:objectDefaults/>
+  <a:extraClrSchemeLst/>
   <a:extLst>
     <a:ext uri="{05A4C25C-085E-4340-85A3-A5531E510DB2}">
       <thm15:themeFamily xmlns:thm15="http://schemas.microsoft.com/office/thememl/2012/main" name="Office Theme" id="{62F939B6-93AF-4DB8-9C6B-D6C7DFDC589F}" vid="{4A3C46E8-61CC-4603-A589-7422A47A8E4A}"/>
@@ -35081,6 +35032,8 @@
       </a:bgFillStyleLst>
     </a:fmtScheme>
   </a:themeElements>
+  <a:objectDefaults/>
+  <a:extraClrSchemeLst/>
   <a:extLst>
     <a:ext uri="{05A4C25C-085E-4340-85A3-A5531E510DB2}">
       <thm15:themeFamily xmlns:thm15="http://schemas.microsoft.com/office/thememl/2012/main" name="Office Theme" id="{62F939B6-93AF-4DB8-9C6B-D6C7DFDC589F}" vid="{4A3C46E8-61CC-4603-A589-7422A47A8E4A}"/>
@@ -35365,6 +35318,8 @@
       </a:bgFillStyleLst>
     </a:fmtScheme>
   </a:themeElements>
+  <a:objectDefaults/>
+  <a:extraClrSchemeLst/>
   <a:extLst>
     <a:ext uri="{05A4C25C-085E-4340-85A3-A5531E510DB2}">
       <thm15:themeFamily xmlns:thm15="http://schemas.microsoft.com/office/thememl/2012/main" name="Office Theme" id="{62F939B6-93AF-4DB8-9C6B-D6C7DFDC589F}" vid="{4A3C46E8-61CC-4603-A589-7422A47A8E4A}"/>
@@ -35649,6 +35604,8 @@
       </a:bgFillStyleLst>
     </a:fmtScheme>
   </a:themeElements>
+  <a:objectDefaults/>
+  <a:extraClrSchemeLst/>
   <a:extLst>
     <a:ext uri="{05A4C25C-085E-4340-85A3-A5531E510DB2}">
       <thm15:themeFamily xmlns:thm15="http://schemas.microsoft.com/office/thememl/2012/main" name="Office Theme" id="{62F939B6-93AF-4DB8-9C6B-D6C7DFDC589F}" vid="{4A3C46E8-61CC-4603-A589-7422A47A8E4A}"/>
@@ -35933,6 +35890,8 @@
       </a:bgFillStyleLst>
     </a:fmtScheme>
   </a:themeElements>
+  <a:objectDefaults/>
+  <a:extraClrSchemeLst/>
   <a:extLst>
     <a:ext uri="{05A4C25C-085E-4340-85A3-A5531E510DB2}">
       <thm15:themeFamily xmlns:thm15="http://schemas.microsoft.com/office/thememl/2012/main" name="Office Theme" id="{62F939B6-93AF-4DB8-9C6B-D6C7DFDC589F}" vid="{4A3C46E8-61CC-4603-A589-7422A47A8E4A}"/>
@@ -36217,6 +36176,8 @@
       </a:bgFillStyleLst>
     </a:fmtScheme>
   </a:themeElements>
+  <a:objectDefaults/>
+  <a:extraClrSchemeLst/>
   <a:extLst>
     <a:ext uri="{05A4C25C-085E-4340-85A3-A5531E510DB2}">
       <thm15:themeFamily xmlns:thm15="http://schemas.microsoft.com/office/thememl/2012/main" name="Office Theme" id="{62F939B6-93AF-4DB8-9C6B-D6C7DFDC589F}" vid="{4A3C46E8-61CC-4603-A589-7422A47A8E4A}"/>
@@ -36501,6 +36462,8 @@
       </a:bgFillStyleLst>
     </a:fmtScheme>
   </a:themeElements>
+  <a:objectDefaults/>
+  <a:extraClrSchemeLst/>
   <a:extLst>
     <a:ext uri="{05A4C25C-085E-4340-85A3-A5531E510DB2}">
       <thm15:themeFamily xmlns:thm15="http://schemas.microsoft.com/office/thememl/2012/main" name="Office Theme" id="{62F939B6-93AF-4DB8-9C6B-D6C7DFDC589F}" vid="{4A3C46E8-61CC-4603-A589-7422A47A8E4A}"/>
